--- a/templates/proposal.pptx
+++ b/templates/proposal.pptx
@@ -18,6 +18,9 @@
     <p:sldId id="263" r:id="rId9"/>
     <p:sldId id="271" r:id="rId10"/>
     <p:sldId id="262" r:id="rId11"/>
+    <p:sldId id="273" r:id="rId12"/>
+    <p:sldId id="268" r:id="rId13"/>
+    <p:sldId id="269" r:id="rId14"/>
     <p:sldId id="270" r:id="rId15"/>
   </p:sldIdLst>
   <p:sldSz cx="9144000" cy="5143500" type="screen16x9"/>
@@ -409,6 +412,393 @@
               <a:t>10</a:t>
             </a:fld>
             <a:endParaRPr lang="en-US"/>
+          </a:p>
+        </p:txBody>
+      </p:sp>
+    </p:spTree>
+    <p:extLst>
+      <p:ext uri="{BB962C8B-B14F-4D97-AF65-F5344CB8AC3E}">
+        <p14:creationId xmlns:p14="http://schemas.microsoft.com/office/powerpoint/2010/main" val="1024086991"/>
+      </p:ext>
+    </p:extLst>
+  </p:cSld>
+  <p:clrMapOvr>
+    <a:masterClrMapping/>
+  </p:clrMapOvr>
+</p:notes>
+</file>
+
+<file path=ppt/notesSlides/notesSlide11.xml><?xml version="1.0" encoding="utf-8"?>
+<p:notes xmlns:a="http://schemas.openxmlformats.org/drawingml/2006/main" xmlns:r="http://schemas.openxmlformats.org/officeDocument/2006/relationships" xmlns:p="http://schemas.openxmlformats.org/presentationml/2006/main">
+  <p:cSld>
+    <p:spTree>
+      <p:nvGrpSpPr>
+        <p:cNvPr id="1" name=""/>
+        <p:cNvGrpSpPr/>
+        <p:nvPr/>
+      </p:nvGrpSpPr>
+      <p:grpSpPr>
+        <a:xfrm>
+          <a:off x="0" y="0"/>
+          <a:ext cx="0" cy="0"/>
+          <a:chOff x="0" y="0"/>
+          <a:chExt cx="0" cy="0"/>
+        </a:xfrm>
+      </p:grpSpPr>
+      <p:sp>
+        <p:nvSpPr>
+          <p:cNvPr id="2" name="Slide Image Placeholder 1"/>
+          <p:cNvSpPr>
+            <a:spLocks noGrp="1" noRot="1" noChangeAspect="1"/>
+          </p:cNvSpPr>
+          <p:nvPr>
+            <p:ph type="sldImg"/>
+          </p:nvPr>
+        </p:nvSpPr>
+        <p:spPr/>
+        <p:txBody>
+          <a:bodyPr/>
+          <a:lstStyle/>
+          <a:p>
+            <a:endParaRPr lang="en-US"/>
+          </a:p>
+        </p:txBody>
+      </p:sp>
+      <p:sp>
+        <p:nvSpPr>
+          <p:cNvPr id="3" name="Notes Placeholder 2"/>
+          <p:cNvSpPr>
+            <a:spLocks noGrp="1"/>
+          </p:cNvSpPr>
+          <p:nvPr>
+            <p:ph type="body" idx="1"/>
+          </p:nvPr>
+        </p:nvSpPr>
+        <p:spPr/>
+        <p:txBody>
+          <a:bodyPr/>
+          <a:lstStyle/>
+          <a:p/>
+        </p:txBody>
+      </p:sp>
+      <p:sp>
+        <p:nvSpPr>
+          <p:cNvPr id="4" name="Slide Number Placeholder 3"/>
+          <p:cNvSpPr>
+            <a:spLocks noGrp="1"/>
+          </p:cNvSpPr>
+          <p:nvPr>
+            <p:ph type="sldNum" sz="quarter" idx="10"/>
+          </p:nvPr>
+        </p:nvSpPr>
+        <p:spPr/>
+        <p:txBody>
+          <a:bodyPr/>
+          <a:lstStyle/>
+          <a:p>
+            <a:fld id="{F7021451-1387-4CA6-816F-3879F97B5CBC}" type="slidenum">
+              <a:rPr lang="en-US"/>
+              <a:t>11</a:t>
+            </a:fld>
+            <a:endParaRPr lang="en-US"/>
+          </a:p>
+        </p:txBody>
+      </p:sp>
+    </p:spTree>
+    <p:extLst>
+      <p:ext uri="{BB962C8B-B14F-4D97-AF65-F5344CB8AC3E}">
+        <p14:creationId xmlns:p14="http://schemas.microsoft.com/office/powerpoint/2010/main" val="1024086991"/>
+      </p:ext>
+    </p:extLst>
+  </p:cSld>
+  <p:clrMapOvr>
+    <a:masterClrMapping/>
+  </p:clrMapOvr>
+</p:notes>
+</file>
+
+<file path=ppt/notesSlides/notesSlide12.xml><?xml version="1.0" encoding="utf-8"?>
+<p:notes xmlns:a="http://schemas.openxmlformats.org/drawingml/2006/main" xmlns:r="http://schemas.openxmlformats.org/officeDocument/2006/relationships" xmlns:p="http://schemas.openxmlformats.org/presentationml/2006/main">
+  <p:cSld>
+    <p:spTree>
+      <p:nvGrpSpPr>
+        <p:cNvPr id="1" name=""/>
+        <p:cNvGrpSpPr/>
+        <p:nvPr/>
+      </p:nvGrpSpPr>
+      <p:grpSpPr>
+        <a:xfrm>
+          <a:off x="0" y="0"/>
+          <a:ext cx="0" cy="0"/>
+          <a:chOff x="0" y="0"/>
+          <a:chExt cx="0" cy="0"/>
+        </a:xfrm>
+      </p:grpSpPr>
+      <p:sp>
+        <p:nvSpPr>
+          <p:cNvPr id="2" name="Slide Image Placeholder 1"/>
+          <p:cNvSpPr>
+            <a:spLocks noGrp="1" noRot="1" noChangeAspect="1"/>
+          </p:cNvSpPr>
+          <p:nvPr>
+            <p:ph type="sldImg"/>
+          </p:nvPr>
+        </p:nvSpPr>
+        <p:spPr/>
+        <p:txBody>
+          <a:bodyPr/>
+          <a:lstStyle/>
+          <a:p>
+            <a:endParaRPr lang="en-US"/>
+          </a:p>
+        </p:txBody>
+      </p:sp>
+      <p:sp>
+        <p:nvSpPr>
+          <p:cNvPr id="3" name="Notes Placeholder 2"/>
+          <p:cNvSpPr>
+            <a:spLocks noGrp="1"/>
+          </p:cNvSpPr>
+          <p:nvPr>
+            <p:ph type="body" idx="1"/>
+          </p:nvPr>
+        </p:nvSpPr>
+        <p:spPr/>
+        <p:txBody>
+          <a:bodyPr/>
+          <a:lstStyle/>
+          <a:p/>
+        </p:txBody>
+      </p:sp>
+      <p:sp>
+        <p:nvSpPr>
+          <p:cNvPr id="4" name="Slide Number Placeholder 3"/>
+          <p:cNvSpPr>
+            <a:spLocks noGrp="1"/>
+          </p:cNvSpPr>
+          <p:nvPr>
+            <p:ph type="sldNum" sz="quarter" idx="10"/>
+          </p:nvPr>
+        </p:nvSpPr>
+        <p:spPr/>
+        <p:txBody>
+          <a:bodyPr/>
+          <a:lstStyle/>
+          <a:p>
+            <a:pPr marL="0" marR="0" lvl="0" indent="0" algn="l" defTabSz="914400" rtl="0" eaLnBrk="1" fontAlgn="auto" latinLnBrk="0" hangingPunct="1">
+              <a:lnSpc>
+                <a:spcPct val="100000"/>
+              </a:lnSpc>
+              <a:spcBef>
+                <a:spcPts val="0"/>
+              </a:spcBef>
+              <a:spcAft>
+                <a:spcPts val="0"/>
+              </a:spcAft>
+              <a:buClrTx/>
+              <a:buSzTx/>
+              <a:buFontTx/>
+              <a:buNone/>
+              <a:tabLst/>
+              <a:defRPr/>
+            </a:pPr>
+            <a:fld id="{F7021451-1387-4CA6-816F-3879F97B5CBC}" type="slidenum">
+              <a:rPr kumimoji="0" lang="en-US" sz="1800" b="0" i="0" u="none" strike="noStrike" kern="1200" cap="none" spc="0" normalizeH="0" baseline="0" noProof="0">
+                <a:ln>
+                  <a:noFill/>
+                </a:ln>
+                <a:solidFill>
+                  <a:prstClr val="black"/>
+                </a:solidFill>
+                <a:effectLst/>
+                <a:uLnTx/>
+                <a:uFillTx/>
+                <a:latin typeface="Aptos" panose="02110004020202020204"/>
+                <a:ea typeface="+mn-ea"/>
+                <a:cs typeface="+mn-cs"/>
+              </a:rPr>
+              <a:pPr marL="0" marR="0" lvl="0" indent="0" algn="l" defTabSz="914400" rtl="0" eaLnBrk="1" fontAlgn="auto" latinLnBrk="0" hangingPunct="1">
+                <a:lnSpc>
+                  <a:spcPct val="100000"/>
+                </a:lnSpc>
+                <a:spcBef>
+                  <a:spcPts val="0"/>
+                </a:spcBef>
+                <a:spcAft>
+                  <a:spcPts val="0"/>
+                </a:spcAft>
+                <a:buClrTx/>
+                <a:buSzTx/>
+                <a:buFontTx/>
+                <a:buNone/>
+                <a:tabLst/>
+                <a:defRPr/>
+              </a:pPr>
+              <a:t>12</a:t>
+            </a:fld>
+            <a:endParaRPr kumimoji="0" lang="en-US" sz="1800" b="0" i="0" u="none" strike="noStrike" kern="1200" cap="none" spc="0" normalizeH="0" baseline="0" noProof="0">
+              <a:ln>
+                <a:noFill/>
+              </a:ln>
+              <a:solidFill>
+                <a:prstClr val="black"/>
+              </a:solidFill>
+              <a:effectLst/>
+              <a:uLnTx/>
+              <a:uFillTx/>
+              <a:latin typeface="Aptos" panose="02110004020202020204"/>
+              <a:ea typeface="+mn-ea"/>
+              <a:cs typeface="+mn-cs"/>
+            </a:endParaRPr>
+          </a:p>
+        </p:txBody>
+      </p:sp>
+    </p:spTree>
+    <p:extLst>
+      <p:ext uri="{BB962C8B-B14F-4D97-AF65-F5344CB8AC3E}">
+        <p14:creationId xmlns:p14="http://schemas.microsoft.com/office/powerpoint/2010/main" val="1024086991"/>
+      </p:ext>
+    </p:extLst>
+  </p:cSld>
+  <p:clrMapOvr>
+    <a:masterClrMapping/>
+  </p:clrMapOvr>
+</p:notes>
+</file>
+
+<file path=ppt/notesSlides/notesSlide13.xml><?xml version="1.0" encoding="utf-8"?>
+<p:notes xmlns:a="http://schemas.openxmlformats.org/drawingml/2006/main" xmlns:r="http://schemas.openxmlformats.org/officeDocument/2006/relationships" xmlns:p="http://schemas.openxmlformats.org/presentationml/2006/main">
+  <p:cSld>
+    <p:spTree>
+      <p:nvGrpSpPr>
+        <p:cNvPr id="1" name=""/>
+        <p:cNvGrpSpPr/>
+        <p:nvPr/>
+      </p:nvGrpSpPr>
+      <p:grpSpPr>
+        <a:xfrm>
+          <a:off x="0" y="0"/>
+          <a:ext cx="0" cy="0"/>
+          <a:chOff x="0" y="0"/>
+          <a:chExt cx="0" cy="0"/>
+        </a:xfrm>
+      </p:grpSpPr>
+      <p:sp>
+        <p:nvSpPr>
+          <p:cNvPr id="2" name="Slide Image Placeholder 1"/>
+          <p:cNvSpPr>
+            <a:spLocks noGrp="1" noRot="1" noChangeAspect="1"/>
+          </p:cNvSpPr>
+          <p:nvPr>
+            <p:ph type="sldImg"/>
+          </p:nvPr>
+        </p:nvSpPr>
+        <p:spPr/>
+        <p:txBody>
+          <a:bodyPr/>
+          <a:lstStyle/>
+          <a:p>
+            <a:endParaRPr lang="en-US"/>
+          </a:p>
+        </p:txBody>
+      </p:sp>
+      <p:sp>
+        <p:nvSpPr>
+          <p:cNvPr id="3" name="Notes Placeholder 2"/>
+          <p:cNvSpPr>
+            <a:spLocks noGrp="1"/>
+          </p:cNvSpPr>
+          <p:nvPr>
+            <p:ph type="body" idx="1"/>
+          </p:nvPr>
+        </p:nvSpPr>
+        <p:spPr/>
+        <p:txBody>
+          <a:bodyPr/>
+          <a:lstStyle/>
+          <a:p/>
+        </p:txBody>
+      </p:sp>
+      <p:sp>
+        <p:nvSpPr>
+          <p:cNvPr id="4" name="Slide Number Placeholder 3"/>
+          <p:cNvSpPr>
+            <a:spLocks noGrp="1"/>
+          </p:cNvSpPr>
+          <p:nvPr>
+            <p:ph type="sldNum" sz="quarter" idx="10"/>
+          </p:nvPr>
+        </p:nvSpPr>
+        <p:spPr/>
+        <p:txBody>
+          <a:bodyPr/>
+          <a:lstStyle/>
+          <a:p>
+            <a:pPr marL="0" marR="0" lvl="0" indent="0" algn="l" defTabSz="914400" rtl="0" eaLnBrk="1" fontAlgn="auto" latinLnBrk="0" hangingPunct="1">
+              <a:lnSpc>
+                <a:spcPct val="100000"/>
+              </a:lnSpc>
+              <a:spcBef>
+                <a:spcPts val="0"/>
+              </a:spcBef>
+              <a:spcAft>
+                <a:spcPts val="0"/>
+              </a:spcAft>
+              <a:buClrTx/>
+              <a:buSzTx/>
+              <a:buFontTx/>
+              <a:buNone/>
+              <a:tabLst/>
+              <a:defRPr/>
+            </a:pPr>
+            <a:fld id="{F7021451-1387-4CA6-816F-3879F97B5CBC}" type="slidenum">
+              <a:rPr kumimoji="0" lang="en-US" sz="1800" b="0" i="0" u="none" strike="noStrike" kern="1200" cap="none" spc="0" normalizeH="0" baseline="0" noProof="0">
+                <a:ln>
+                  <a:noFill/>
+                </a:ln>
+                <a:solidFill>
+                  <a:prstClr val="black"/>
+                </a:solidFill>
+                <a:effectLst/>
+                <a:uLnTx/>
+                <a:uFillTx/>
+                <a:latin typeface="Aptos" panose="02110004020202020204"/>
+                <a:ea typeface="+mn-ea"/>
+                <a:cs typeface="+mn-cs"/>
+              </a:rPr>
+              <a:pPr marL="0" marR="0" lvl="0" indent="0" algn="l" defTabSz="914400" rtl="0" eaLnBrk="1" fontAlgn="auto" latinLnBrk="0" hangingPunct="1">
+                <a:lnSpc>
+                  <a:spcPct val="100000"/>
+                </a:lnSpc>
+                <a:spcBef>
+                  <a:spcPts val="0"/>
+                </a:spcBef>
+                <a:spcAft>
+                  <a:spcPts val="0"/>
+                </a:spcAft>
+                <a:buClrTx/>
+                <a:buSzTx/>
+                <a:buFontTx/>
+                <a:buNone/>
+                <a:tabLst/>
+                <a:defRPr/>
+              </a:pPr>
+              <a:t>13</a:t>
+            </a:fld>
+            <a:endParaRPr kumimoji="0" lang="en-US" sz="1800" b="0" i="0" u="none" strike="noStrike" kern="1200" cap="none" spc="0" normalizeH="0" baseline="0" noProof="0">
+              <a:ln>
+                <a:noFill/>
+              </a:ln>
+              <a:solidFill>
+                <a:prstClr val="black"/>
+              </a:solidFill>
+              <a:effectLst/>
+              <a:uLnTx/>
+              <a:uFillTx/>
+              <a:latin typeface="Aptos" panose="02110004020202020204"/>
+              <a:ea typeface="+mn-ea"/>
+              <a:cs typeface="+mn-cs"/>
+            </a:endParaRPr>
           </a:p>
         </p:txBody>
       </p:sp>
@@ -2675,15 +3065,870 @@
           </a:p>
         </p:txBody>
       </p:sp>
-      <p:sp>
-        <p:nvSpPr>
-          <p:cNvPr id="23" name="Text 19"/>
-          <p:cNvSpPr/>
-          <p:nvPr/>
-        </p:nvSpPr>
-        <p:spPr>
-          <a:xfrm>
-            <a:off x="5074920" y="4800600"/>
+    </p:spTree>
+  </p:cSld>
+  <p:clrMapOvr>
+    <a:masterClrMapping/>
+  </p:clrMapOvr>
+</p:sld>
+</file>
+
+<file path=ppt/slides/slide11.xml><?xml version="1.0" encoding="utf-8"?>
+<p:sld xmlns:a="http://schemas.openxmlformats.org/drawingml/2006/main" xmlns:r="http://schemas.openxmlformats.org/officeDocument/2006/relationships" xmlns:p="http://schemas.openxmlformats.org/presentationml/2006/main">
+  <p:cSld>
+    <p:spTree>
+      <p:nvGrpSpPr>
+        <p:cNvPr id="1" name=""/>
+        <p:cNvGrpSpPr/>
+        <p:nvPr/>
+      </p:nvGrpSpPr>
+      <p:grpSpPr>
+        <a:xfrm>
+          <a:off x="0" y="0"/>
+          <a:ext cx="0" cy="0"/>
+          <a:chOff x="0" y="0"/>
+          <a:chExt cx="0" cy="0"/>
+        </a:xfrm>
+      </p:grpSpPr>
+      <p:pic>
+        <p:nvPicPr>
+          <p:cNvPr id="2" name="Image 0" descr="/home/claude/logo_clean.png"/>
+          <p:cNvPicPr>
+            <a:picLocks noChangeAspect="1"/>
+          </p:cNvPicPr>
+          <p:nvPr/>
+        </p:nvPicPr>
+        <p:blipFill>
+          <a:blip r:embed="rId3"/>
+          <a:stretch>
+            <a:fillRect/>
+          </a:stretch>
+        </p:blipFill>
+        <p:spPr>
+          <a:xfrm>
+            <a:off x="7498080" y="201168"/>
+            <a:ext cx="1234440" cy="330064"/>
+          </a:xfrm>
+          <a:prstGeom prst="rect">
+            <a:avLst/>
+          </a:prstGeom>
+        </p:spPr>
+      </p:pic>
+      <p:sp>
+        <p:nvSpPr>
+          <p:cNvPr id="3" name="Text 0"/>
+          <p:cNvSpPr/>
+          <p:nvPr/>
+        </p:nvSpPr>
+        <p:spPr>
+          <a:xfrm>
+            <a:off x="457200" y="292608"/>
+            <a:ext cx="5486400" cy="274320"/>
+          </a:xfrm>
+          <a:prstGeom prst="rect">
+            <a:avLst/>
+          </a:prstGeom>
+          <a:noFill/>
+          <a:ln/>
+        </p:spPr>
+        <p:txBody>
+          <a:bodyPr wrap="square" lIns="0" tIns="0" rIns="0" bIns="0" rtlCol="0" anchor="ctr"/>
+          <a:lstStyle/>
+          <a:p>
+            <a:pPr marL="0" indent="0">
+              <a:buNone/>
+            </a:pPr>
+            <a:r>
+              <a:rPr lang="en-US" sz="1050" b="1" kern="0" spc="400" dirty="0">
+                <a:solidFill>
+                  <a:srgbClr val="10B981"/>
+                </a:solidFill>
+                <a:latin typeface="Calibri" pitchFamily="34" charset="0"/>
+                <a:ea typeface="Calibri" pitchFamily="34" charset="-122"/>
+                <a:cs typeface="Calibri" pitchFamily="34" charset="-120"/>
+              </a:rPr>
+              <a:t>THE PATH FORWARD</a:t>
+            </a:r>
+            <a:endParaRPr lang="en-US" sz="1050" dirty="0"/>
+          </a:p>
+        </p:txBody>
+      </p:sp>
+      <p:sp>
+        <p:nvSpPr>
+          <p:cNvPr id="4" name="Text 1"/>
+          <p:cNvSpPr/>
+          <p:nvPr/>
+        </p:nvSpPr>
+        <p:spPr>
+          <a:xfrm>
+            <a:off x="457200" y="566928"/>
+            <a:ext cx="7132320" cy="594360"/>
+          </a:xfrm>
+          <a:prstGeom prst="rect">
+            <a:avLst/>
+          </a:prstGeom>
+          <a:noFill/>
+          <a:ln/>
+        </p:spPr>
+        <p:txBody>
+          <a:bodyPr wrap="square" lIns="0" tIns="0" rIns="0" bIns="0" rtlCol="0" anchor="ctr"/>
+          <a:lstStyle/>
+          <a:p>
+            <a:pPr marL="0" indent="0">
+              <a:buNone/>
+            </a:pPr>
+            <a:r>
+              <a:rPr lang="en-US" sz="2600" b="1" dirty="0">
+                <a:solidFill>
+                  <a:srgbClr val="0F172A"/>
+                </a:solidFill>
+                <a:latin typeface="Calibri" pitchFamily="34" charset="0"/>
+                <a:ea typeface="Calibri" pitchFamily="34" charset="-122"/>
+                <a:cs typeface="Calibri" pitchFamily="34" charset="-120"/>
+              </a:rPr>
+              <a:t>From Current State to Safe Environment</a:t>
+            </a:r>
+            <a:endParaRPr lang="en-US" sz="2600" dirty="0"/>
+          </a:p>
+        </p:txBody>
+      </p:sp>
+      <p:sp>
+        <p:nvSpPr>
+          <p:cNvPr id="5" name="Shape 2"/>
+          <p:cNvSpPr/>
+          <p:nvPr/>
+        </p:nvSpPr>
+        <p:spPr>
+          <a:xfrm>
+            <a:off x="457200" y="1280160"/>
+            <a:ext cx="3657600" cy="3337560"/>
+          </a:xfrm>
+          <a:prstGeom prst="rect">
+            <a:avLst/>
+          </a:prstGeom>
+          <a:solidFill>
+            <a:srgbClr val="FFFFFF"/>
+          </a:solidFill>
+          <a:ln w="9525">
+            <a:solidFill>
+              <a:srgbClr val="E2E8F0"/>
+            </a:solidFill>
+            <a:prstDash val="solid"/>
+          </a:ln>
+          <a:effectLst>
+            <a:outerShdw blurRad="127000" dist="38100" dir="5400000" algn="bl" rotWithShape="0">
+              <a:srgbClr val="0F172A">
+                <a:alpha val="10000"/>
+              </a:srgbClr>
+            </a:outerShdw>
+          </a:effectLst>
+        </p:spPr>
+        <p:txBody>
+          <a:bodyPr/>
+          <a:lstStyle/>
+          <a:p>
+            <a:endParaRPr lang="en-US"/>
+          </a:p>
+        </p:txBody>
+      </p:sp>
+      <p:sp>
+        <p:nvSpPr>
+          <p:cNvPr id="6" name="Shape 3"/>
+          <p:cNvSpPr/>
+          <p:nvPr/>
+        </p:nvSpPr>
+        <p:spPr>
+          <a:xfrm>
+            <a:off x="457200" y="1280160"/>
+            <a:ext cx="3657600" cy="411480"/>
+          </a:xfrm>
+          <a:prstGeom prst="rect">
+            <a:avLst/>
+          </a:prstGeom>
+          <a:solidFill>
+            <a:srgbClr val="334155"/>
+          </a:solidFill>
+          <a:ln/>
+        </p:spPr>
+        <p:txBody>
+          <a:bodyPr/>
+          <a:lstStyle/>
+          <a:p>
+            <a:endParaRPr lang="en-US"/>
+          </a:p>
+        </p:txBody>
+      </p:sp>
+      <p:sp>
+        <p:nvSpPr>
+          <p:cNvPr id="7" name="Text 4"/>
+          <p:cNvSpPr/>
+          <p:nvPr/>
+        </p:nvSpPr>
+        <p:spPr>
+          <a:xfrm>
+            <a:off x="457200" y="1280160"/>
+            <a:ext cx="3657600" cy="411480"/>
+          </a:xfrm>
+          <a:prstGeom prst="rect">
+            <a:avLst/>
+          </a:prstGeom>
+          <a:noFill/>
+          <a:ln/>
+        </p:spPr>
+        <p:txBody>
+          <a:bodyPr wrap="square" lIns="0" tIns="0" rIns="0" bIns="0" rtlCol="0" anchor="ctr"/>
+          <a:lstStyle/>
+          <a:p>
+            <a:pPr marL="0" indent="0" algn="ctr">
+              <a:buNone/>
+            </a:pPr>
+            <a:r>
+              <a:rPr lang="en-US" sz="1200" b="1" kern="0" spc="300" dirty="0">
+                <a:solidFill>
+                  <a:srgbClr val="FFFFFF"/>
+                </a:solidFill>
+                <a:latin typeface="Calibri" pitchFamily="34" charset="0"/>
+                <a:ea typeface="Calibri" pitchFamily="34" charset="-122"/>
+                <a:cs typeface="Calibri" pitchFamily="34" charset="-120"/>
+              </a:rPr>
+              <a:t>CURRENT STATE</a:t>
+            </a:r>
+            <a:endParaRPr lang="en-US" sz="1200" dirty="0"/>
+          </a:p>
+        </p:txBody>
+      </p:sp>
+      <p:sp>
+        <p:nvSpPr>
+          <p:cNvPr id="8" name="Text 5"/>
+          <p:cNvSpPr/>
+          <p:nvPr/>
+        </p:nvSpPr>
+        <p:spPr>
+          <a:xfrm>
+            <a:off x="685800" y="1874520"/>
+            <a:ext cx="3200400" cy="2606040"/>
+          </a:xfrm>
+          <a:prstGeom prst="rect">
+            <a:avLst/>
+          </a:prstGeom>
+          <a:noFill/>
+          <a:ln/>
+        </p:spPr>
+        <p:txBody>
+          <a:bodyPr wrap="square" lIns="0" tIns="0" rIns="0" bIns="0" rtlCol="0" anchor="t"/>
+          <a:lstStyle/>
+          <a:p>
+            <a:pPr marL="342900" indent="-342900">
+              <a:spcAft>
+                <a:spcPts val="600"/>
+              </a:spcAft>
+              <a:buSzPct val="100000"/>
+              <a:buChar char="■"/>
+            </a:pPr>
+            <a:r>
+              <a:rPr lang="en-US" sz="1150" dirty="0">
+                <a:solidFill>
+                  <a:srgbClr val="334155"/>
+                </a:solidFill>
+                <a:latin typeface="Calibri" pitchFamily="34" charset="0"/>
+                <a:ea typeface="Calibri" pitchFamily="34" charset="-122"/>
+                <a:cs typeface="Calibri" pitchFamily="34" charset="-120"/>
+              </a:rPr>
+              <a:t>{{current_state}}</a:t>
+            </a:r>
+          </a:p>
+          <a:p>
+            <a:pPr marL="342900" indent="-342900">
+              <a:spcAft>
+                <a:spcPts val="600"/>
+              </a:spcAft>
+              <a:buSzPct val="100000"/>
+              <a:buChar char="■"/>
+            </a:pPr>
+            <a:endParaRPr lang="en-US" sz="1150" dirty="0"/>
+          </a:p>
+        </p:txBody>
+      </p:sp>
+      <p:sp>
+        <p:nvSpPr>
+          <p:cNvPr id="9" name="Shape 6"/>
+          <p:cNvSpPr/>
+          <p:nvPr/>
+        </p:nvSpPr>
+        <p:spPr>
+          <a:xfrm>
+            <a:off x="4206240" y="2651760"/>
+            <a:ext cx="731520" cy="731520"/>
+          </a:xfrm>
+          <a:prstGeom prst="ellipse">
+            <a:avLst/>
+          </a:prstGeom>
+          <a:solidFill>
+            <a:srgbClr val="10B981"/>
+          </a:solidFill>
+          <a:ln/>
+          <a:effectLst>
+            <a:outerShdw blurRad="127000" dist="38100" dir="5400000" algn="bl" rotWithShape="0">
+              <a:srgbClr val="0F172A">
+                <a:alpha val="10000"/>
+              </a:srgbClr>
+            </a:outerShdw>
+          </a:effectLst>
+        </p:spPr>
+        <p:txBody>
+          <a:bodyPr/>
+          <a:lstStyle/>
+          <a:p>
+            <a:endParaRPr lang="en-US"/>
+          </a:p>
+        </p:txBody>
+      </p:sp>
+      <p:pic>
+        <p:nvPicPr>
+          <p:cNvPr id="10" name="Image 1" descr="preencoded.png"/>
+          <p:cNvPicPr>
+            <a:picLocks noChangeAspect="1"/>
+          </p:cNvPicPr>
+          <p:nvPr/>
+        </p:nvPicPr>
+        <p:blipFill>
+          <a:blip r:embed="rId4"/>
+          <a:stretch>
+            <a:fillRect/>
+          </a:stretch>
+        </p:blipFill>
+        <p:spPr>
+          <a:xfrm>
+            <a:off x="4370832" y="2816352"/>
+            <a:ext cx="402336" cy="402336"/>
+          </a:xfrm>
+          <a:prstGeom prst="rect">
+            <a:avLst/>
+          </a:prstGeom>
+        </p:spPr>
+      </p:pic>
+      <p:sp>
+        <p:nvSpPr>
+          <p:cNvPr id="11" name="Shape 7"/>
+          <p:cNvSpPr/>
+          <p:nvPr/>
+        </p:nvSpPr>
+        <p:spPr>
+          <a:xfrm>
+            <a:off x="5029200" y="1280160"/>
+            <a:ext cx="3657600" cy="3337560"/>
+          </a:xfrm>
+          <a:prstGeom prst="rect">
+            <a:avLst/>
+          </a:prstGeom>
+          <a:solidFill>
+            <a:srgbClr val="FFFFFF"/>
+          </a:solidFill>
+          <a:ln w="9525">
+            <a:solidFill>
+              <a:srgbClr val="E2E8F0"/>
+            </a:solidFill>
+            <a:prstDash val="solid"/>
+          </a:ln>
+          <a:effectLst>
+            <a:outerShdw blurRad="127000" dist="38100" dir="5400000" algn="bl" rotWithShape="0">
+              <a:srgbClr val="0F172A">
+                <a:alpha val="10000"/>
+              </a:srgbClr>
+            </a:outerShdw>
+          </a:effectLst>
+        </p:spPr>
+        <p:txBody>
+          <a:bodyPr/>
+          <a:lstStyle/>
+          <a:p>
+            <a:endParaRPr lang="en-US"/>
+          </a:p>
+        </p:txBody>
+      </p:sp>
+      <p:sp>
+        <p:nvSpPr>
+          <p:cNvPr id="12" name="Shape 8"/>
+          <p:cNvSpPr/>
+          <p:nvPr/>
+        </p:nvSpPr>
+        <p:spPr>
+          <a:xfrm>
+            <a:off x="5029200" y="1280160"/>
+            <a:ext cx="3657600" cy="411480"/>
+          </a:xfrm>
+          <a:prstGeom prst="rect">
+            <a:avLst/>
+          </a:prstGeom>
+          <a:solidFill>
+            <a:srgbClr val="0F5132"/>
+          </a:solidFill>
+          <a:ln/>
+        </p:spPr>
+        <p:txBody>
+          <a:bodyPr/>
+          <a:lstStyle/>
+          <a:p>
+            <a:endParaRPr lang="en-US"/>
+          </a:p>
+        </p:txBody>
+      </p:sp>
+      <p:sp>
+        <p:nvSpPr>
+          <p:cNvPr id="13" name="Text 9"/>
+          <p:cNvSpPr/>
+          <p:nvPr/>
+        </p:nvSpPr>
+        <p:spPr>
+          <a:xfrm>
+            <a:off x="5029200" y="1280160"/>
+            <a:ext cx="3657600" cy="411480"/>
+          </a:xfrm>
+          <a:prstGeom prst="rect">
+            <a:avLst/>
+          </a:prstGeom>
+          <a:noFill/>
+          <a:ln/>
+        </p:spPr>
+        <p:txBody>
+          <a:bodyPr wrap="square" lIns="0" tIns="0" rIns="0" bIns="0" rtlCol="0" anchor="ctr"/>
+          <a:lstStyle/>
+          <a:p>
+            <a:pPr marL="0" indent="0" algn="ctr">
+              <a:buNone/>
+            </a:pPr>
+            <a:r>
+              <a:rPr lang="en-US" sz="1100" b="1" kern="0" spc="200" dirty="0">
+                <a:solidFill>
+                  <a:srgbClr val="FFFFFF"/>
+                </a:solidFill>
+                <a:latin typeface="Calibri" pitchFamily="34" charset="0"/>
+                <a:ea typeface="Calibri" pitchFamily="34" charset="-122"/>
+                <a:cs typeface="Calibri" pitchFamily="34" charset="-120"/>
+              </a:rPr>
+              <a:t>SAFE ENVIRONMENT WITH TEAMLOGIC IT</a:t>
+            </a:r>
+            <a:endParaRPr lang="en-US" sz="1100" dirty="0"/>
+          </a:p>
+        </p:txBody>
+      </p:sp>
+      <p:pic>
+        <p:nvPicPr>
+          <p:cNvPr id="14" name="Image 2" descr="preencoded.png"/>
+          <p:cNvPicPr>
+            <a:picLocks noChangeAspect="1"/>
+          </p:cNvPicPr>
+          <p:nvPr/>
+        </p:nvPicPr>
+        <p:blipFill>
+          <a:blip r:embed="rId5"/>
+          <a:stretch>
+            <a:fillRect/>
+          </a:stretch>
+        </p:blipFill>
+        <p:spPr>
+          <a:xfrm>
+            <a:off x="5212080" y="1874520"/>
+            <a:ext cx="182880" cy="182880"/>
+          </a:xfrm>
+          <a:prstGeom prst="rect">
+            <a:avLst/>
+          </a:prstGeom>
+        </p:spPr>
+      </p:pic>
+      <p:sp>
+        <p:nvSpPr>
+          <p:cNvPr id="15" name="Text 10"/>
+          <p:cNvSpPr/>
+          <p:nvPr/>
+        </p:nvSpPr>
+        <p:spPr>
+          <a:xfrm>
+            <a:off x="5440680" y="1828800"/>
+            <a:ext cx="3154680" cy="274320"/>
+          </a:xfrm>
+          <a:prstGeom prst="rect">
+            <a:avLst/>
+          </a:prstGeom>
+          <a:noFill/>
+          <a:ln/>
+        </p:spPr>
+        <p:txBody>
+          <a:bodyPr wrap="square" lIns="0" tIns="0" rIns="0" bIns="0" rtlCol="0" anchor="ctr"/>
+          <a:lstStyle/>
+          <a:p>
+            <a:pPr marL="0" indent="0">
+              <a:buNone/>
+            </a:pPr>
+            <a:r>
+              <a:rPr lang="en-US" sz="1100" b="1" dirty="0">
+                <a:solidFill>
+                  <a:srgbClr val="0F172A"/>
+                </a:solidFill>
+                <a:latin typeface="Calibri" pitchFamily="34" charset="0"/>
+                <a:ea typeface="Calibri" pitchFamily="34" charset="-122"/>
+                <a:cs typeface="Calibri" pitchFamily="34" charset="-120"/>
+              </a:rPr>
+              <a:t>24/7 Network Monitoring (NOC)</a:t>
+            </a:r>
+            <a:endParaRPr lang="en-US" sz="1100" dirty="0"/>
+          </a:p>
+        </p:txBody>
+      </p:sp>
+      <p:sp>
+        <p:nvSpPr>
+          <p:cNvPr id="16" name="Text 11"/>
+          <p:cNvSpPr/>
+          <p:nvPr/>
+        </p:nvSpPr>
+        <p:spPr>
+          <a:xfrm>
+            <a:off x="5440680" y="2075688"/>
+            <a:ext cx="3154680" cy="329184"/>
+          </a:xfrm>
+          <a:prstGeom prst="rect">
+            <a:avLst/>
+          </a:prstGeom>
+          <a:noFill/>
+          <a:ln/>
+        </p:spPr>
+        <p:txBody>
+          <a:bodyPr wrap="square" lIns="0" tIns="0" rIns="0" bIns="0" rtlCol="0" anchor="t"/>
+          <a:lstStyle/>
+          <a:p>
+            <a:pPr marL="0" indent="0">
+              <a:buNone/>
+            </a:pPr>
+            <a:r>
+              <a:rPr lang="en-US" sz="950" dirty="0">
+                <a:solidFill>
+                  <a:srgbClr val="64748B"/>
+                </a:solidFill>
+                <a:latin typeface="Calibri" pitchFamily="34" charset="0"/>
+                <a:ea typeface="Calibri" pitchFamily="34" charset="-122"/>
+                <a:cs typeface="Calibri" pitchFamily="34" charset="-120"/>
+              </a:rPr>
+              <a:t>Proactive detection across all systems and devices</a:t>
+            </a:r>
+            <a:endParaRPr lang="en-US" sz="950" dirty="0"/>
+          </a:p>
+        </p:txBody>
+      </p:sp>
+      <p:pic>
+        <p:nvPicPr>
+          <p:cNvPr id="17" name="Image 3" descr="preencoded.png"/>
+          <p:cNvPicPr>
+            <a:picLocks noChangeAspect="1"/>
+          </p:cNvPicPr>
+          <p:nvPr/>
+        </p:nvPicPr>
+        <p:blipFill>
+          <a:blip r:embed="rId5"/>
+          <a:stretch>
+            <a:fillRect/>
+          </a:stretch>
+        </p:blipFill>
+        <p:spPr>
+          <a:xfrm>
+            <a:off x="5212080" y="2532888"/>
+            <a:ext cx="182880" cy="182880"/>
+          </a:xfrm>
+          <a:prstGeom prst="rect">
+            <a:avLst/>
+          </a:prstGeom>
+        </p:spPr>
+      </p:pic>
+      <p:sp>
+        <p:nvSpPr>
+          <p:cNvPr id="18" name="Text 12"/>
+          <p:cNvSpPr/>
+          <p:nvPr/>
+        </p:nvSpPr>
+        <p:spPr>
+          <a:xfrm>
+            <a:off x="5440680" y="2487168"/>
+            <a:ext cx="3154680" cy="274320"/>
+          </a:xfrm>
+          <a:prstGeom prst="rect">
+            <a:avLst/>
+          </a:prstGeom>
+          <a:noFill/>
+          <a:ln/>
+        </p:spPr>
+        <p:txBody>
+          <a:bodyPr wrap="square" lIns="0" tIns="0" rIns="0" bIns="0" rtlCol="0" anchor="ctr"/>
+          <a:lstStyle/>
+          <a:p>
+            <a:pPr marL="0" indent="0">
+              <a:buNone/>
+            </a:pPr>
+            <a:r>
+              <a:rPr lang="en-US" sz="1100" b="1" dirty="0">
+                <a:solidFill>
+                  <a:srgbClr val="0F172A"/>
+                </a:solidFill>
+                <a:latin typeface="Calibri" pitchFamily="34" charset="0"/>
+                <a:ea typeface="Calibri" pitchFamily="34" charset="-122"/>
+                <a:cs typeface="Calibri" pitchFamily="34" charset="-120"/>
+              </a:rPr>
+              <a:t>Unlimited Help Desk Support/Local Presence</a:t>
+            </a:r>
+            <a:endParaRPr lang="en-US" sz="1100" dirty="0"/>
+          </a:p>
+        </p:txBody>
+      </p:sp>
+      <p:sp>
+        <p:nvSpPr>
+          <p:cNvPr id="19" name="Text 13"/>
+          <p:cNvSpPr/>
+          <p:nvPr/>
+        </p:nvSpPr>
+        <p:spPr>
+          <a:xfrm>
+            <a:off x="5440680" y="2734056"/>
+            <a:ext cx="3154680" cy="329184"/>
+          </a:xfrm>
+          <a:prstGeom prst="rect">
+            <a:avLst/>
+          </a:prstGeom>
+          <a:noFill/>
+          <a:ln/>
+        </p:spPr>
+        <p:txBody>
+          <a:bodyPr wrap="square" lIns="0" tIns="0" rIns="0" bIns="0" rtlCol="0" anchor="t"/>
+          <a:lstStyle/>
+          <a:p>
+            <a:pPr marL="0" indent="0">
+              <a:buNone/>
+            </a:pPr>
+            <a:r>
+              <a:rPr lang="en-US" sz="950" dirty="0">
+                <a:solidFill>
+                  <a:srgbClr val="64748B"/>
+                </a:solidFill>
+                <a:latin typeface="Calibri" pitchFamily="34" charset="0"/>
+                <a:ea typeface="Calibri" pitchFamily="34" charset="-122"/>
+                <a:cs typeface="Calibri" pitchFamily="34" charset="-120"/>
+              </a:rPr>
+              <a:t>Responsive end-user support; minimal downtime</a:t>
+            </a:r>
+            <a:endParaRPr lang="en-US" sz="950" dirty="0"/>
+          </a:p>
+        </p:txBody>
+      </p:sp>
+      <p:pic>
+        <p:nvPicPr>
+          <p:cNvPr id="20" name="Image 4" descr="preencoded.png"/>
+          <p:cNvPicPr>
+            <a:picLocks noChangeAspect="1"/>
+          </p:cNvPicPr>
+          <p:nvPr/>
+        </p:nvPicPr>
+        <p:blipFill>
+          <a:blip r:embed="rId5"/>
+          <a:stretch>
+            <a:fillRect/>
+          </a:stretch>
+        </p:blipFill>
+        <p:spPr>
+          <a:xfrm>
+            <a:off x="5212080" y="3191256"/>
+            <a:ext cx="182880" cy="182880"/>
+          </a:xfrm>
+          <a:prstGeom prst="rect">
+            <a:avLst/>
+          </a:prstGeom>
+        </p:spPr>
+      </p:pic>
+      <p:sp>
+        <p:nvSpPr>
+          <p:cNvPr id="21" name="Text 14"/>
+          <p:cNvSpPr/>
+          <p:nvPr/>
+        </p:nvSpPr>
+        <p:spPr>
+          <a:xfrm>
+            <a:off x="5440680" y="3145536"/>
+            <a:ext cx="3154680" cy="274320"/>
+          </a:xfrm>
+          <a:prstGeom prst="rect">
+            <a:avLst/>
+          </a:prstGeom>
+          <a:noFill/>
+          <a:ln/>
+        </p:spPr>
+        <p:txBody>
+          <a:bodyPr wrap="square" lIns="0" tIns="0" rIns="0" bIns="0" rtlCol="0" anchor="ctr"/>
+          <a:lstStyle/>
+          <a:p>
+            <a:pPr marL="0" indent="0">
+              <a:buNone/>
+            </a:pPr>
+            <a:r>
+              <a:rPr lang="en-US" sz="1100" b="1" dirty="0">
+                <a:solidFill>
+                  <a:srgbClr val="0F172A"/>
+                </a:solidFill>
+                <a:latin typeface="Calibri" pitchFamily="34" charset="0"/>
+                <a:ea typeface="Calibri" pitchFamily="34" charset="-122"/>
+                <a:cs typeface="Calibri" pitchFamily="34" charset="-120"/>
+              </a:rPr>
+              <a:t>Advanced Security Services </a:t>
+            </a:r>
+            <a:endParaRPr lang="en-US" sz="1100" dirty="0"/>
+          </a:p>
+        </p:txBody>
+      </p:sp>
+      <p:sp>
+        <p:nvSpPr>
+          <p:cNvPr id="22" name="Text 15"/>
+          <p:cNvSpPr/>
+          <p:nvPr/>
+        </p:nvSpPr>
+        <p:spPr>
+          <a:xfrm>
+            <a:off x="5440680" y="3392424"/>
+            <a:ext cx="3154680" cy="329184"/>
+          </a:xfrm>
+          <a:prstGeom prst="rect">
+            <a:avLst/>
+          </a:prstGeom>
+          <a:noFill/>
+          <a:ln/>
+        </p:spPr>
+        <p:txBody>
+          <a:bodyPr wrap="square" lIns="0" tIns="0" rIns="0" bIns="0" rtlCol="0" anchor="t"/>
+          <a:lstStyle/>
+          <a:p>
+            <a:pPr marL="0" indent="0">
+              <a:buNone/>
+            </a:pPr>
+            <a:r>
+              <a:rPr lang="en-US" sz="950" dirty="0">
+                <a:solidFill>
+                  <a:srgbClr val="64748B"/>
+                </a:solidFill>
+                <a:latin typeface="Calibri" pitchFamily="34" charset="0"/>
+                <a:ea typeface="Calibri" pitchFamily="34" charset="-122"/>
+                <a:cs typeface="Calibri" pitchFamily="34" charset="-120"/>
+              </a:rPr>
+              <a:t>Endpoint protection, email security, SOC services</a:t>
+            </a:r>
+            <a:endParaRPr lang="en-US" sz="950" dirty="0"/>
+          </a:p>
+        </p:txBody>
+      </p:sp>
+      <p:pic>
+        <p:nvPicPr>
+          <p:cNvPr id="23" name="Image 5" descr="preencoded.png"/>
+          <p:cNvPicPr>
+            <a:picLocks noChangeAspect="1"/>
+          </p:cNvPicPr>
+          <p:nvPr/>
+        </p:nvPicPr>
+        <p:blipFill>
+          <a:blip r:embed="rId5"/>
+          <a:stretch>
+            <a:fillRect/>
+          </a:stretch>
+        </p:blipFill>
+        <p:spPr>
+          <a:xfrm>
+            <a:off x="5212080" y="3849624"/>
+            <a:ext cx="182880" cy="182880"/>
+          </a:xfrm>
+          <a:prstGeom prst="rect">
+            <a:avLst/>
+          </a:prstGeom>
+        </p:spPr>
+      </p:pic>
+      <p:sp>
+        <p:nvSpPr>
+          <p:cNvPr id="24" name="Text 16"/>
+          <p:cNvSpPr/>
+          <p:nvPr/>
+        </p:nvSpPr>
+        <p:spPr>
+          <a:xfrm>
+            <a:off x="5440680" y="3803904"/>
+            <a:ext cx="3154680" cy="274320"/>
+          </a:xfrm>
+          <a:prstGeom prst="rect">
+            <a:avLst/>
+          </a:prstGeom>
+          <a:noFill/>
+          <a:ln/>
+        </p:spPr>
+        <p:txBody>
+          <a:bodyPr wrap="square" lIns="0" tIns="0" rIns="0" bIns="0" rtlCol="0" anchor="ctr"/>
+          <a:lstStyle/>
+          <a:p>
+            <a:pPr marL="0" indent="0">
+              <a:buNone/>
+            </a:pPr>
+            <a:r>
+              <a:rPr lang="en-US" sz="1100" b="1" dirty="0" err="1">
+                <a:solidFill>
+                  <a:srgbClr val="0F172A"/>
+                </a:solidFill>
+                <a:latin typeface="Calibri" pitchFamily="34" charset="0"/>
+                <a:ea typeface="Calibri" pitchFamily="34" charset="-122"/>
+                <a:cs typeface="Calibri" pitchFamily="34" charset="-120"/>
+              </a:rPr>
+              <a:t>vCIO</a:t>
+            </a:r>
+            <a:endParaRPr lang="en-US" sz="1100" dirty="0"/>
+          </a:p>
+        </p:txBody>
+      </p:sp>
+      <p:sp>
+        <p:nvSpPr>
+          <p:cNvPr id="25" name="Text 17"/>
+          <p:cNvSpPr/>
+          <p:nvPr/>
+        </p:nvSpPr>
+        <p:spPr>
+          <a:xfrm>
+            <a:off x="5440680" y="4050792"/>
+            <a:ext cx="3154680" cy="329184"/>
+          </a:xfrm>
+          <a:prstGeom prst="rect">
+            <a:avLst/>
+          </a:prstGeom>
+          <a:noFill/>
+          <a:ln/>
+        </p:spPr>
+        <p:txBody>
+          <a:bodyPr wrap="square" lIns="0" tIns="0" rIns="0" bIns="0" rtlCol="0" anchor="t"/>
+          <a:lstStyle/>
+          <a:p>
+            <a:pPr marL="0" indent="0">
+              <a:buNone/>
+            </a:pPr>
+            <a:r>
+              <a:rPr lang="en-US" sz="950" dirty="0">
+                <a:solidFill>
+                  <a:srgbClr val="64748B"/>
+                </a:solidFill>
+                <a:latin typeface="Calibri" pitchFamily="34" charset="0"/>
+                <a:ea typeface="Calibri" pitchFamily="34" charset="-122"/>
+                <a:cs typeface="Calibri" pitchFamily="34" charset="-120"/>
+              </a:rPr>
+              <a:t>Strategic guidance</a:t>
+            </a:r>
+            <a:endParaRPr lang="en-US" sz="950" dirty="0"/>
+          </a:p>
+        </p:txBody>
+      </p:sp>
+      <p:sp>
+        <p:nvSpPr>
+          <p:cNvPr id="26" name="Text 18"/>
+          <p:cNvSpPr/>
+          <p:nvPr/>
+        </p:nvSpPr>
+        <p:spPr>
+          <a:xfrm>
+            <a:off x="411480" y="4800600"/>
             <a:ext cx="3657600" cy="228600"/>
           </a:xfrm>
           <a:prstGeom prst="rect">
@@ -2695,7 +3940,5633 @@
         <p:txBody>
           <a:bodyPr wrap="square" lIns="0" tIns="0" rIns="0" bIns="0" rtlCol="0" anchor="ctr"/>
           <a:lstStyle/>
-          <a:p/>
+          <a:p>
+            <a:pPr marL="0" indent="0" algn="l">
+              <a:buNone/>
+            </a:pPr>
+            <a:r>
+              <a:rPr lang="en-US" sz="900" dirty="0">
+                <a:solidFill>
+                  <a:srgbClr val="64748B"/>
+                </a:solidFill>
+                <a:latin typeface="Calibri" pitchFamily="34" charset="0"/>
+                <a:ea typeface="Calibri" pitchFamily="34" charset="-122"/>
+                <a:cs typeface="Calibri" pitchFamily="34" charset="-120"/>
+              </a:rPr>
+              <a:t>TeamLogic IT  |  Scottsdale</a:t>
+            </a:r>
+            <a:endParaRPr lang="en-US" sz="900" dirty="0"/>
+          </a:p>
+        </p:txBody>
+      </p:sp>
+    </p:spTree>
+  </p:cSld>
+  <p:clrMapOvr>
+    <a:masterClrMapping/>
+  </p:clrMapOvr>
+</p:sld>
+</file>
+
+<file path=ppt/slides/slide12.xml><?xml version="1.0" encoding="utf-8"?>
+<p:sld xmlns:a="http://schemas.openxmlformats.org/drawingml/2006/main" xmlns:r="http://schemas.openxmlformats.org/officeDocument/2006/relationships" xmlns:p="http://schemas.openxmlformats.org/presentationml/2006/main">
+  <p:cSld>
+    <p:bg>
+      <p:bgPr>
+        <a:solidFill>
+          <a:srgbClr val="F8FAFC"/>
+        </a:solidFill>
+        <a:effectLst/>
+      </p:bgPr>
+    </p:bg>
+    <p:spTree>
+      <p:nvGrpSpPr>
+        <p:cNvPr id="1" name=""/>
+        <p:cNvGrpSpPr/>
+        <p:nvPr/>
+      </p:nvGrpSpPr>
+      <p:grpSpPr>
+        <a:xfrm>
+          <a:off x="0" y="0"/>
+          <a:ext cx="0" cy="0"/>
+          <a:chOff x="0" y="0"/>
+          <a:chExt cx="0" cy="0"/>
+        </a:xfrm>
+      </p:grpSpPr>
+      <p:pic>
+        <p:nvPicPr>
+          <p:cNvPr id="2" name="Image 0" descr="/home/claude/logo_clean.png"/>
+          <p:cNvPicPr>
+            <a:picLocks noChangeAspect="1"/>
+          </p:cNvPicPr>
+          <p:nvPr/>
+        </p:nvPicPr>
+        <p:blipFill>
+          <a:blip r:embed="rId3"/>
+          <a:stretch>
+            <a:fillRect/>
+          </a:stretch>
+        </p:blipFill>
+        <p:spPr>
+          <a:xfrm>
+            <a:off x="7498080" y="201168"/>
+            <a:ext cx="1234440" cy="330064"/>
+          </a:xfrm>
+          <a:prstGeom prst="rect">
+            <a:avLst/>
+          </a:prstGeom>
+        </p:spPr>
+      </p:pic>
+      <p:sp>
+        <p:nvSpPr>
+          <p:cNvPr id="3" name="Text 0"/>
+          <p:cNvSpPr/>
+          <p:nvPr/>
+        </p:nvSpPr>
+        <p:spPr>
+          <a:xfrm>
+            <a:off x="457200" y="292608"/>
+            <a:ext cx="5486400" cy="274320"/>
+          </a:xfrm>
+          <a:prstGeom prst="rect">
+            <a:avLst/>
+          </a:prstGeom>
+          <a:noFill/>
+          <a:ln/>
+        </p:spPr>
+        <p:txBody>
+          <a:bodyPr wrap="square" lIns="0" tIns="0" rIns="0" bIns="0" rtlCol="0" anchor="ctr"/>
+          <a:lstStyle/>
+          <a:p>
+            <a:pPr marL="0" marR="0" lvl="0" indent="0" algn="l" defTabSz="914400" rtl="0" eaLnBrk="1" fontAlgn="auto" latinLnBrk="0" hangingPunct="1">
+              <a:lnSpc>
+                <a:spcPct val="100000"/>
+              </a:lnSpc>
+              <a:spcBef>
+                <a:spcPts val="0"/>
+              </a:spcBef>
+              <a:spcAft>
+                <a:spcPts val="0"/>
+              </a:spcAft>
+              <a:buClrTx/>
+              <a:buSzTx/>
+              <a:buFontTx/>
+              <a:buNone/>
+              <a:tabLst/>
+              <a:defRPr/>
+            </a:pPr>
+            <a:r>
+              <a:rPr kumimoji="0" lang="en-US" sz="1200" b="1" i="0" u="none" strike="noStrike" kern="0" cap="none" spc="400" normalizeH="0" baseline="0" noProof="0" dirty="0">
+                <a:ln>
+                  <a:noFill/>
+                </a:ln>
+                <a:solidFill>
+                  <a:srgbClr val="10B981"/>
+                </a:solidFill>
+                <a:effectLst/>
+                <a:uLnTx/>
+                <a:uFillTx/>
+                <a:latin typeface="Calibri" pitchFamily="34" charset="0"/>
+                <a:ea typeface="Calibri" pitchFamily="34" charset="-122"/>
+                <a:cs typeface="Calibri" pitchFamily="34" charset="-120"/>
+              </a:rPr>
+              <a:t>PROPOSAL PRICING – {{pricing_basis}}</a:t>
+            </a:r>
+            <a:endParaRPr kumimoji="0" lang="en-US" sz="1200" b="0" i="0" u="none" strike="noStrike" kern="1200" cap="none" spc="0" normalizeH="0" baseline="0" noProof="0" dirty="0">
+              <a:ln>
+                <a:noFill/>
+              </a:ln>
+              <a:solidFill>
+                <a:prstClr val="black"/>
+              </a:solidFill>
+              <a:effectLst/>
+              <a:uLnTx/>
+              <a:uFillTx/>
+              <a:latin typeface="Calibri" panose="020F0502020204030204"/>
+              <a:ea typeface="+mn-ea"/>
+              <a:cs typeface="+mn-cs"/>
+            </a:endParaRPr>
+          </a:p>
+        </p:txBody>
+      </p:sp>
+      <p:sp>
+        <p:nvSpPr>
+          <p:cNvPr id="4" name="Text 1"/>
+          <p:cNvSpPr/>
+          <p:nvPr/>
+        </p:nvSpPr>
+        <p:spPr>
+          <a:xfrm>
+            <a:off x="457200" y="566928"/>
+            <a:ext cx="7132320" cy="594360"/>
+          </a:xfrm>
+          <a:prstGeom prst="rect">
+            <a:avLst/>
+          </a:prstGeom>
+          <a:noFill/>
+          <a:ln/>
+        </p:spPr>
+        <p:txBody>
+          <a:bodyPr wrap="square" lIns="0" tIns="0" rIns="0" bIns="0" rtlCol="0" anchor="ctr"/>
+          <a:lstStyle/>
+          <a:p>
+            <a:pPr marL="0" marR="0" lvl="0" indent="0" algn="l" defTabSz="914400" rtl="0" eaLnBrk="1" fontAlgn="auto" latinLnBrk="0" hangingPunct="1">
+              <a:lnSpc>
+                <a:spcPct val="100000"/>
+              </a:lnSpc>
+              <a:spcBef>
+                <a:spcPts val="0"/>
+              </a:spcBef>
+              <a:spcAft>
+                <a:spcPts val="0"/>
+              </a:spcAft>
+              <a:buClrTx/>
+              <a:buSzTx/>
+              <a:buFontTx/>
+              <a:buNone/>
+              <a:tabLst/>
+              <a:defRPr/>
+            </a:pPr>
+            <a:r>
+              <a:rPr kumimoji="0" lang="en-US" sz="2600" b="1" i="0" u="none" strike="noStrike" kern="1200" cap="none" spc="0" normalizeH="0" baseline="0" noProof="0" dirty="0">
+                <a:ln>
+                  <a:noFill/>
+                </a:ln>
+                <a:solidFill>
+                  <a:srgbClr val="0F172A"/>
+                </a:solidFill>
+                <a:effectLst/>
+                <a:uLnTx/>
+                <a:uFillTx/>
+                <a:latin typeface="Calibri" pitchFamily="34" charset="0"/>
+                <a:ea typeface="Calibri" pitchFamily="34" charset="-122"/>
+                <a:cs typeface="Calibri" pitchFamily="34" charset="-120"/>
+              </a:rPr>
+              <a:t>Your Monthly Investment</a:t>
+            </a:r>
+            <a:endParaRPr kumimoji="0" lang="en-US" sz="2600" b="0" i="0" u="none" strike="noStrike" kern="1200" cap="none" spc="0" normalizeH="0" baseline="0" noProof="0" dirty="0">
+              <a:ln>
+                <a:noFill/>
+              </a:ln>
+              <a:solidFill>
+                <a:prstClr val="black"/>
+              </a:solidFill>
+              <a:effectLst/>
+              <a:uLnTx/>
+              <a:uFillTx/>
+              <a:latin typeface="Calibri" panose="020F0502020204030204"/>
+              <a:ea typeface="+mn-ea"/>
+              <a:cs typeface="+mn-cs"/>
+            </a:endParaRPr>
+          </a:p>
+        </p:txBody>
+      </p:sp>
+      <p:sp>
+        <p:nvSpPr>
+          <p:cNvPr id="7" name="Text 4"/>
+          <p:cNvSpPr/>
+          <p:nvPr/>
+        </p:nvSpPr>
+        <p:spPr>
+          <a:xfrm>
+            <a:off x="419318" y="1629266"/>
+            <a:ext cx="3383280" cy="960120"/>
+          </a:xfrm>
+          <a:prstGeom prst="rect">
+            <a:avLst/>
+          </a:prstGeom>
+          <a:noFill/>
+          <a:ln/>
+        </p:spPr>
+        <p:txBody>
+          <a:bodyPr wrap="square" lIns="0" tIns="0" rIns="0" bIns="0" rtlCol="0" anchor="t"/>
+          <a:lstStyle/>
+          <a:p>
+            <a:pPr marL="0" marR="0" lvl="0" indent="0" algn="l" defTabSz="914400" rtl="0" eaLnBrk="1" fontAlgn="auto" latinLnBrk="0" hangingPunct="1">
+              <a:lnSpc>
+                <a:spcPct val="100000"/>
+              </a:lnSpc>
+              <a:spcBef>
+                <a:spcPts val="0"/>
+              </a:spcBef>
+              <a:spcAft>
+                <a:spcPts val="0"/>
+              </a:spcAft>
+              <a:buClrTx/>
+              <a:buSzTx/>
+              <a:buFontTx/>
+              <a:buNone/>
+              <a:tabLst/>
+              <a:defRPr/>
+            </a:pPr>
+            <a:r>
+              <a:rPr kumimoji="0" lang="en-US" sz="5800" b="1" i="0" u="none" strike="noStrike" kern="1200" cap="none" spc="0" normalizeH="0" baseline="0" noProof="0" dirty="0">
+                <a:ln>
+                  <a:noFill/>
+                </a:ln>
+                <a:solidFill>
+                  <a:srgbClr val="0F5132"/>
+                </a:solidFill>
+                <a:effectLst/>
+                <a:uLnTx/>
+                <a:uFillTx/>
+                <a:latin typeface="Calibri" pitchFamily="34" charset="0"/>
+                <a:ea typeface="Calibri" pitchFamily="34" charset="-122"/>
+                <a:cs typeface="Calibri" pitchFamily="34" charset="-120"/>
+              </a:rPr>
+              <a:t>{{monthly}}</a:t>
+            </a:r>
+            <a:endParaRPr kumimoji="0" lang="en-US" sz="5800" b="0" i="0" u="none" strike="noStrike" kern="1200" cap="none" spc="0" normalizeH="0" baseline="0" noProof="0" dirty="0">
+              <a:ln>
+                <a:noFill/>
+              </a:ln>
+              <a:solidFill>
+                <a:prstClr val="black"/>
+              </a:solidFill>
+              <a:effectLst/>
+              <a:uLnTx/>
+              <a:uFillTx/>
+              <a:latin typeface="Calibri" panose="020F0502020204030204"/>
+              <a:ea typeface="+mn-ea"/>
+              <a:cs typeface="+mn-cs"/>
+            </a:endParaRPr>
+          </a:p>
+        </p:txBody>
+      </p:sp>
+      <p:sp>
+        <p:nvSpPr>
+          <p:cNvPr id="8" name="Text 5"/>
+          <p:cNvSpPr/>
+          <p:nvPr/>
+        </p:nvSpPr>
+        <p:spPr>
+          <a:xfrm>
+            <a:off x="3038668" y="1953137"/>
+            <a:ext cx="3383280" cy="365760"/>
+          </a:xfrm>
+          <a:prstGeom prst="rect">
+            <a:avLst/>
+          </a:prstGeom>
+          <a:noFill/>
+          <a:ln/>
+        </p:spPr>
+        <p:txBody>
+          <a:bodyPr wrap="square" lIns="0" tIns="0" rIns="0" bIns="0" rtlCol="0" anchor="ctr"/>
+          <a:lstStyle/>
+          <a:p>
+            <a:pPr marL="0" marR="0" lvl="0" indent="0" algn="l" defTabSz="914400" rtl="0" eaLnBrk="1" fontAlgn="auto" latinLnBrk="0" hangingPunct="1">
+              <a:lnSpc>
+                <a:spcPct val="100000"/>
+              </a:lnSpc>
+              <a:spcBef>
+                <a:spcPts val="0"/>
+              </a:spcBef>
+              <a:spcAft>
+                <a:spcPts val="0"/>
+              </a:spcAft>
+              <a:buClrTx/>
+              <a:buSzTx/>
+              <a:buFontTx/>
+              <a:buNone/>
+              <a:tabLst/>
+              <a:defRPr/>
+            </a:pPr>
+            <a:r>
+              <a:rPr kumimoji="0" lang="en-US" sz="1600" b="0" i="1" u="none" strike="noStrike" kern="1200" cap="none" spc="0" normalizeH="0" baseline="0" noProof="0" dirty="0">
+                <a:ln>
+                  <a:noFill/>
+                </a:ln>
+                <a:solidFill>
+                  <a:srgbClr val="64748B"/>
+                </a:solidFill>
+                <a:effectLst/>
+                <a:uLnTx/>
+                <a:uFillTx/>
+                <a:latin typeface="Calibri" pitchFamily="34" charset="0"/>
+                <a:ea typeface="Calibri" pitchFamily="34" charset="-122"/>
+                <a:cs typeface="Calibri" pitchFamily="34" charset="-120"/>
+              </a:rPr>
+              <a:t>/ month     </a:t>
+            </a:r>
+            <a:endParaRPr kumimoji="0" lang="en-US" sz="1600" b="0" i="0" u="none" strike="noStrike" kern="1200" cap="none" spc="0" normalizeH="0" baseline="0" noProof="0" dirty="0">
+              <a:ln>
+                <a:noFill/>
+              </a:ln>
+              <a:solidFill>
+                <a:prstClr val="black"/>
+              </a:solidFill>
+              <a:effectLst/>
+              <a:uLnTx/>
+              <a:uFillTx/>
+              <a:latin typeface="Calibri" panose="020F0502020204030204"/>
+              <a:ea typeface="+mn-ea"/>
+              <a:cs typeface="+mn-cs"/>
+            </a:endParaRPr>
+          </a:p>
+        </p:txBody>
+      </p:sp>
+      <p:sp>
+        <p:nvSpPr>
+          <p:cNvPr id="12" name="Text 9"/>
+          <p:cNvSpPr/>
+          <p:nvPr/>
+        </p:nvSpPr>
+        <p:spPr>
+          <a:xfrm>
+            <a:off x="457200" y="3794760"/>
+            <a:ext cx="2215708" cy="320040"/>
+          </a:xfrm>
+          <a:prstGeom prst="rect">
+            <a:avLst/>
+          </a:prstGeom>
+          <a:noFill/>
+          <a:ln/>
+        </p:spPr>
+        <p:txBody>
+          <a:bodyPr wrap="square" lIns="0" tIns="0" rIns="0" bIns="0" rtlCol="0" anchor="ctr"/>
+          <a:lstStyle/>
+          <a:p>
+            <a:pPr marL="0" marR="0" lvl="0" indent="0" algn="ctr" defTabSz="914400" rtl="0" eaLnBrk="1" fontAlgn="auto" latinLnBrk="0" hangingPunct="1">
+              <a:lnSpc>
+                <a:spcPct val="100000"/>
+              </a:lnSpc>
+              <a:spcBef>
+                <a:spcPts val="0"/>
+              </a:spcBef>
+              <a:spcAft>
+                <a:spcPts val="0"/>
+              </a:spcAft>
+              <a:buClrTx/>
+              <a:buSzTx/>
+              <a:buFontTx/>
+              <a:buNone/>
+              <a:tabLst/>
+              <a:defRPr/>
+            </a:pPr>
+            <a:r>
+              <a:rPr kumimoji="0" lang="en-US" sz="1100" b="1" i="0" u="none" strike="noStrike" kern="1200" cap="none" spc="0" normalizeH="0" baseline="0" noProof="0" dirty="0">
+                <a:ln>
+                  <a:noFill/>
+                </a:ln>
+                <a:solidFill>
+                  <a:srgbClr val="FFFFFF"/>
+                </a:solidFill>
+                <a:effectLst/>
+                <a:uLnTx/>
+                <a:uFillTx/>
+                <a:latin typeface="Calibri" pitchFamily="34" charset="0"/>
+                <a:ea typeface="Calibri" pitchFamily="34" charset="-122"/>
+                <a:cs typeface="Calibri" pitchFamily="34" charset="-120"/>
+              </a:rPr>
+              <a:t>65%</a:t>
+            </a:r>
+            <a:endParaRPr kumimoji="0" lang="en-US" sz="1100" b="0" i="0" u="none" strike="noStrike" kern="1200" cap="none" spc="0" normalizeH="0" baseline="0" noProof="0" dirty="0">
+              <a:ln>
+                <a:noFill/>
+              </a:ln>
+              <a:solidFill>
+                <a:prstClr val="black"/>
+              </a:solidFill>
+              <a:effectLst/>
+              <a:uLnTx/>
+              <a:uFillTx/>
+              <a:latin typeface="Calibri" panose="020F0502020204030204"/>
+              <a:ea typeface="+mn-ea"/>
+              <a:cs typeface="+mn-cs"/>
+            </a:endParaRPr>
+          </a:p>
+        </p:txBody>
+      </p:sp>
+      <p:sp>
+        <p:nvSpPr>
+          <p:cNvPr id="14" name="Text 11"/>
+          <p:cNvSpPr/>
+          <p:nvPr/>
+        </p:nvSpPr>
+        <p:spPr>
+          <a:xfrm>
+            <a:off x="2672908" y="3794760"/>
+            <a:ext cx="1167572" cy="320040"/>
+          </a:xfrm>
+          <a:prstGeom prst="rect">
+            <a:avLst/>
+          </a:prstGeom>
+          <a:noFill/>
+          <a:ln/>
+        </p:spPr>
+        <p:txBody>
+          <a:bodyPr wrap="square" lIns="0" tIns="0" rIns="0" bIns="0" rtlCol="0" anchor="ctr"/>
+          <a:lstStyle/>
+          <a:p>
+            <a:pPr marL="0" marR="0" lvl="0" indent="0" algn="ctr" defTabSz="914400" rtl="0" eaLnBrk="1" fontAlgn="auto" latinLnBrk="0" hangingPunct="1">
+              <a:lnSpc>
+                <a:spcPct val="100000"/>
+              </a:lnSpc>
+              <a:spcBef>
+                <a:spcPts val="0"/>
+              </a:spcBef>
+              <a:spcAft>
+                <a:spcPts val="0"/>
+              </a:spcAft>
+              <a:buClrTx/>
+              <a:buSzTx/>
+              <a:buFontTx/>
+              <a:buNone/>
+              <a:tabLst/>
+              <a:defRPr/>
+            </a:pPr>
+            <a:r>
+              <a:rPr kumimoji="0" lang="en-US" sz="1100" b="1" i="0" u="none" strike="noStrike" kern="1200" cap="none" spc="0" normalizeH="0" baseline="0" noProof="0" dirty="0">
+                <a:ln>
+                  <a:noFill/>
+                </a:ln>
+                <a:solidFill>
+                  <a:srgbClr val="FFFFFF"/>
+                </a:solidFill>
+                <a:effectLst/>
+                <a:uLnTx/>
+                <a:uFillTx/>
+                <a:latin typeface="Calibri" pitchFamily="34" charset="0"/>
+                <a:ea typeface="Calibri" pitchFamily="34" charset="-122"/>
+                <a:cs typeface="Calibri" pitchFamily="34" charset="-120"/>
+              </a:rPr>
+              <a:t>35%</a:t>
+            </a:r>
+            <a:endParaRPr kumimoji="0" lang="en-US" sz="1100" b="0" i="0" u="none" strike="noStrike" kern="1200" cap="none" spc="0" normalizeH="0" baseline="0" noProof="0" dirty="0">
+              <a:ln>
+                <a:noFill/>
+              </a:ln>
+              <a:solidFill>
+                <a:prstClr val="black"/>
+              </a:solidFill>
+              <a:effectLst/>
+              <a:uLnTx/>
+              <a:uFillTx/>
+              <a:latin typeface="Calibri" panose="020F0502020204030204"/>
+              <a:ea typeface="+mn-ea"/>
+              <a:cs typeface="+mn-cs"/>
+            </a:endParaRPr>
+          </a:p>
+        </p:txBody>
+      </p:sp>
+      <p:sp>
+        <p:nvSpPr>
+          <p:cNvPr id="21" name="Shape 18"/>
+          <p:cNvSpPr/>
+          <p:nvPr/>
+        </p:nvSpPr>
+        <p:spPr>
+          <a:xfrm>
+            <a:off x="4160520" y="1358550"/>
+            <a:ext cx="4526280" cy="1207008"/>
+          </a:xfrm>
+          <a:prstGeom prst="rect">
+            <a:avLst/>
+          </a:prstGeom>
+          <a:solidFill>
+            <a:srgbClr val="FFFFFF"/>
+          </a:solidFill>
+          <a:ln w="9525">
+            <a:solidFill>
+              <a:srgbClr val="E2E8F0"/>
+            </a:solidFill>
+            <a:prstDash val="solid"/>
+          </a:ln>
+          <a:effectLst>
+            <a:outerShdw blurRad="127000" dist="38100" dir="5400000" algn="bl" rotWithShape="0">
+              <a:srgbClr val="0F172A">
+                <a:alpha val="10000"/>
+              </a:srgbClr>
+            </a:outerShdw>
+          </a:effectLst>
+        </p:spPr>
+        <p:txBody>
+          <a:bodyPr/>
+          <a:lstStyle/>
+          <a:p>
+            <a:pPr marL="0" marR="0" lvl="0" indent="0" algn="l" defTabSz="914400" rtl="0" eaLnBrk="1" fontAlgn="auto" latinLnBrk="0" hangingPunct="1">
+              <a:lnSpc>
+                <a:spcPct val="100000"/>
+              </a:lnSpc>
+              <a:spcBef>
+                <a:spcPts val="0"/>
+              </a:spcBef>
+              <a:spcAft>
+                <a:spcPts val="0"/>
+              </a:spcAft>
+              <a:buClrTx/>
+              <a:buSzTx/>
+              <a:buFontTx/>
+              <a:buNone/>
+              <a:tabLst/>
+              <a:defRPr/>
+            </a:pPr>
+            <a:endParaRPr kumimoji="0" lang="en-US" sz="1800" b="0" i="0" u="none" strike="noStrike" kern="1200" cap="none" spc="0" normalizeH="0" baseline="0" noProof="0" dirty="0">
+              <a:ln>
+                <a:noFill/>
+              </a:ln>
+              <a:solidFill>
+                <a:prstClr val="black"/>
+              </a:solidFill>
+              <a:effectLst/>
+              <a:uLnTx/>
+              <a:uFillTx/>
+              <a:latin typeface="Calibri" panose="020F0502020204030204"/>
+              <a:ea typeface="+mn-ea"/>
+              <a:cs typeface="+mn-cs"/>
+            </a:endParaRPr>
+          </a:p>
+        </p:txBody>
+      </p:sp>
+      <p:sp>
+        <p:nvSpPr>
+          <p:cNvPr id="22" name="Shape 19"/>
+          <p:cNvSpPr/>
+          <p:nvPr/>
+        </p:nvSpPr>
+        <p:spPr>
+          <a:xfrm>
+            <a:off x="4160520" y="1358550"/>
+            <a:ext cx="4526280" cy="438912"/>
+          </a:xfrm>
+          <a:prstGeom prst="rect">
+            <a:avLst/>
+          </a:prstGeom>
+          <a:solidFill>
+            <a:srgbClr val="0F5132"/>
+          </a:solidFill>
+          <a:ln/>
+        </p:spPr>
+        <p:txBody>
+          <a:bodyPr/>
+          <a:lstStyle/>
+          <a:p>
+            <a:pPr marL="0" marR="0" lvl="0" indent="0" algn="l" defTabSz="914400" rtl="0" eaLnBrk="1" fontAlgn="auto" latinLnBrk="0" hangingPunct="1">
+              <a:lnSpc>
+                <a:spcPct val="100000"/>
+              </a:lnSpc>
+              <a:spcBef>
+                <a:spcPts val="0"/>
+              </a:spcBef>
+              <a:spcAft>
+                <a:spcPts val="0"/>
+              </a:spcAft>
+              <a:buClrTx/>
+              <a:buSzTx/>
+              <a:buFontTx/>
+              <a:buNone/>
+              <a:tabLst/>
+              <a:defRPr/>
+            </a:pPr>
+            <a:endParaRPr kumimoji="0" lang="en-US" sz="1800" b="0" i="0" u="none" strike="noStrike" kern="1200" cap="none" spc="0" normalizeH="0" baseline="0" noProof="0">
+              <a:ln>
+                <a:noFill/>
+              </a:ln>
+              <a:solidFill>
+                <a:prstClr val="black"/>
+              </a:solidFill>
+              <a:effectLst/>
+              <a:uLnTx/>
+              <a:uFillTx/>
+              <a:latin typeface="Calibri" panose="020F0502020204030204"/>
+              <a:ea typeface="+mn-ea"/>
+              <a:cs typeface="+mn-cs"/>
+            </a:endParaRPr>
+          </a:p>
+        </p:txBody>
+      </p:sp>
+      <p:sp>
+        <p:nvSpPr>
+          <p:cNvPr id="23" name="Text 20"/>
+          <p:cNvSpPr/>
+          <p:nvPr/>
+        </p:nvSpPr>
+        <p:spPr>
+          <a:xfrm>
+            <a:off x="4361688" y="1404270"/>
+            <a:ext cx="2697480" cy="164592"/>
+          </a:xfrm>
+          <a:prstGeom prst="rect">
+            <a:avLst/>
+          </a:prstGeom>
+          <a:noFill/>
+          <a:ln/>
+        </p:spPr>
+        <p:txBody>
+          <a:bodyPr wrap="square" lIns="0" tIns="0" rIns="0" bIns="0" rtlCol="0" anchor="ctr"/>
+          <a:lstStyle/>
+          <a:p>
+            <a:pPr marL="0" marR="0" lvl="0" indent="0" algn="l" defTabSz="914400" rtl="0" eaLnBrk="1" fontAlgn="auto" latinLnBrk="0" hangingPunct="1">
+              <a:lnSpc>
+                <a:spcPct val="100000"/>
+              </a:lnSpc>
+              <a:spcBef>
+                <a:spcPts val="0"/>
+              </a:spcBef>
+              <a:spcAft>
+                <a:spcPts val="0"/>
+              </a:spcAft>
+              <a:buClrTx/>
+              <a:buSzTx/>
+              <a:buFontTx/>
+              <a:buNone/>
+              <a:tabLst/>
+              <a:defRPr/>
+            </a:pPr>
+            <a:r>
+              <a:rPr kumimoji="0" lang="en-US" sz="850" b="1" i="0" u="none" strike="noStrike" kern="0" cap="none" spc="300" normalizeH="0" baseline="0" noProof="0" dirty="0">
+                <a:ln>
+                  <a:noFill/>
+                </a:ln>
+                <a:solidFill>
+                  <a:srgbClr val="D1FAE5"/>
+                </a:solidFill>
+                <a:effectLst/>
+                <a:uLnTx/>
+                <a:uFillTx/>
+                <a:latin typeface="Calibri" pitchFamily="34" charset="0"/>
+                <a:ea typeface="Calibri" pitchFamily="34" charset="-122"/>
+                <a:cs typeface="Calibri" pitchFamily="34" charset="-120"/>
+              </a:rPr>
+              <a:t>CORE SUPPORT</a:t>
+            </a:r>
+            <a:endParaRPr kumimoji="0" lang="en-US" sz="850" b="0" i="0" u="none" strike="noStrike" kern="1200" cap="none" spc="0" normalizeH="0" baseline="0" noProof="0" dirty="0">
+              <a:ln>
+                <a:noFill/>
+              </a:ln>
+              <a:solidFill>
+                <a:prstClr val="black"/>
+              </a:solidFill>
+              <a:effectLst/>
+              <a:uLnTx/>
+              <a:uFillTx/>
+              <a:latin typeface="Calibri" panose="020F0502020204030204"/>
+              <a:ea typeface="+mn-ea"/>
+              <a:cs typeface="+mn-cs"/>
+            </a:endParaRPr>
+          </a:p>
+        </p:txBody>
+      </p:sp>
+      <p:sp>
+        <p:nvSpPr>
+          <p:cNvPr id="24" name="Text 21"/>
+          <p:cNvSpPr/>
+          <p:nvPr/>
+        </p:nvSpPr>
+        <p:spPr>
+          <a:xfrm>
+            <a:off x="4361688" y="1559718"/>
+            <a:ext cx="2697480" cy="219456"/>
+          </a:xfrm>
+          <a:prstGeom prst="rect">
+            <a:avLst/>
+          </a:prstGeom>
+          <a:noFill/>
+          <a:ln/>
+        </p:spPr>
+        <p:txBody>
+          <a:bodyPr wrap="square" lIns="0" tIns="0" rIns="0" bIns="0" rtlCol="0" anchor="ctr"/>
+          <a:lstStyle/>
+          <a:p>
+            <a:pPr marL="0" marR="0" lvl="0" indent="0" algn="l" defTabSz="914400" rtl="0" eaLnBrk="1" fontAlgn="auto" latinLnBrk="0" hangingPunct="1">
+              <a:lnSpc>
+                <a:spcPct val="100000"/>
+              </a:lnSpc>
+              <a:spcBef>
+                <a:spcPts val="0"/>
+              </a:spcBef>
+              <a:spcAft>
+                <a:spcPts val="0"/>
+              </a:spcAft>
+              <a:buClrTx/>
+              <a:buSzTx/>
+              <a:buFontTx/>
+              <a:buNone/>
+              <a:tabLst/>
+              <a:defRPr/>
+            </a:pPr>
+            <a:r>
+              <a:rPr kumimoji="0" lang="en-US" sz="1350" b="1" i="0" u="none" strike="noStrike" kern="1200" cap="none" spc="0" normalizeH="0" baseline="0" noProof="0" dirty="0">
+                <a:ln>
+                  <a:noFill/>
+                </a:ln>
+                <a:solidFill>
+                  <a:srgbClr val="FFFFFF"/>
+                </a:solidFill>
+                <a:effectLst/>
+                <a:uLnTx/>
+                <a:uFillTx/>
+                <a:latin typeface="Calibri" pitchFamily="34" charset="0"/>
+                <a:ea typeface="Calibri" pitchFamily="34" charset="-122"/>
+                <a:cs typeface="Calibri" pitchFamily="34" charset="-120"/>
+              </a:rPr>
+              <a:t>Managed Services</a:t>
+            </a:r>
+            <a:endParaRPr kumimoji="0" lang="en-US" sz="1350" b="0" i="0" u="none" strike="noStrike" kern="1200" cap="none" spc="0" normalizeH="0" baseline="0" noProof="0" dirty="0">
+              <a:ln>
+                <a:noFill/>
+              </a:ln>
+              <a:solidFill>
+                <a:prstClr val="black"/>
+              </a:solidFill>
+              <a:effectLst/>
+              <a:uLnTx/>
+              <a:uFillTx/>
+              <a:latin typeface="Calibri" panose="020F0502020204030204"/>
+              <a:ea typeface="+mn-ea"/>
+              <a:cs typeface="+mn-cs"/>
+            </a:endParaRPr>
+          </a:p>
+        </p:txBody>
+      </p:sp>
+      <p:sp>
+        <p:nvSpPr>
+          <p:cNvPr id="25" name="Text 22"/>
+          <p:cNvSpPr/>
+          <p:nvPr/>
+        </p:nvSpPr>
+        <p:spPr>
+          <a:xfrm>
+            <a:off x="7086600" y="1358550"/>
+            <a:ext cx="1463040" cy="438912"/>
+          </a:xfrm>
+          <a:prstGeom prst="rect">
+            <a:avLst/>
+          </a:prstGeom>
+          <a:noFill/>
+          <a:ln/>
+        </p:spPr>
+        <p:txBody>
+          <a:bodyPr wrap="square" lIns="0" tIns="0" rIns="0" bIns="0" rtlCol="0" anchor="ctr"/>
+          <a:lstStyle/>
+          <a:p>
+            <a:pPr marL="0" marR="0" lvl="0" indent="0" algn="r" defTabSz="914400" rtl="0" eaLnBrk="1" fontAlgn="auto" latinLnBrk="0" hangingPunct="1">
+              <a:lnSpc>
+                <a:spcPct val="100000"/>
+              </a:lnSpc>
+              <a:spcBef>
+                <a:spcPts val="0"/>
+              </a:spcBef>
+              <a:spcAft>
+                <a:spcPts val="0"/>
+              </a:spcAft>
+              <a:buClrTx/>
+              <a:buSzTx/>
+              <a:buFontTx/>
+              <a:buNone/>
+              <a:tabLst/>
+              <a:defRPr/>
+            </a:pPr>
+            <a:r>
+              <a:rPr kumimoji="0" lang="en-US" sz="1700" b="1" i="0" u="none" strike="noStrike" kern="1200" cap="none" spc="0" normalizeH="0" baseline="0" noProof="0" dirty="0">
+                <a:ln>
+                  <a:noFill/>
+                </a:ln>
+                <a:solidFill>
+                  <a:srgbClr val="FFFFFF"/>
+                </a:solidFill>
+                <a:effectLst/>
+                <a:uLnTx/>
+                <a:uFillTx/>
+                <a:latin typeface="Calibri" pitchFamily="34" charset="0"/>
+                <a:ea typeface="Calibri" pitchFamily="34" charset="-122"/>
+                <a:cs typeface="Calibri" pitchFamily="34" charset="-120"/>
+              </a:rPr>
+              <a:t>{{core_monthly}}/mo</a:t>
+            </a:r>
+            <a:endParaRPr kumimoji="0" lang="en-US" sz="1700" b="0" i="0" u="none" strike="noStrike" kern="1200" cap="none" spc="0" normalizeH="0" baseline="0" noProof="0" dirty="0">
+              <a:ln>
+                <a:noFill/>
+              </a:ln>
+              <a:solidFill>
+                <a:prstClr val="black"/>
+              </a:solidFill>
+              <a:effectLst/>
+              <a:uLnTx/>
+              <a:uFillTx/>
+              <a:latin typeface="Calibri" panose="020F0502020204030204"/>
+              <a:ea typeface="+mn-ea"/>
+              <a:cs typeface="+mn-cs"/>
+            </a:endParaRPr>
+          </a:p>
+        </p:txBody>
+      </p:sp>
+      <p:sp>
+        <p:nvSpPr>
+          <p:cNvPr id="26" name="Text 23"/>
+          <p:cNvSpPr/>
+          <p:nvPr/>
+        </p:nvSpPr>
+        <p:spPr>
+          <a:xfrm>
+            <a:off x="4332624" y="2042962"/>
+            <a:ext cx="2606040" cy="201168"/>
+          </a:xfrm>
+          <a:prstGeom prst="rect">
+            <a:avLst/>
+          </a:prstGeom>
+          <a:noFill/>
+          <a:ln/>
+        </p:spPr>
+        <p:txBody>
+          <a:bodyPr wrap="square" lIns="0" tIns="0" rIns="0" bIns="0" rtlCol="0" anchor="ctr"/>
+          <a:lstStyle/>
+          <a:p>
+            <a:pPr marL="0" marR="0" lvl="0" indent="0" algn="l" defTabSz="914400" rtl="0" eaLnBrk="1" fontAlgn="auto" latinLnBrk="0" hangingPunct="1">
+              <a:lnSpc>
+                <a:spcPct val="100000"/>
+              </a:lnSpc>
+              <a:spcBef>
+                <a:spcPts val="0"/>
+              </a:spcBef>
+              <a:spcAft>
+                <a:spcPts val="0"/>
+              </a:spcAft>
+              <a:buClrTx/>
+              <a:buSzTx/>
+              <a:buFontTx/>
+              <a:buNone/>
+              <a:tabLst/>
+              <a:defRPr/>
+            </a:pPr>
+            <a:r>
+              <a:rPr kumimoji="0" lang="en-US" sz="1000" b="0" i="0" u="none" strike="noStrike" kern="1200" cap="none" spc="0" normalizeH="0" baseline="0" noProof="0" dirty="0">
+                <a:ln>
+                  <a:noFill/>
+                </a:ln>
+                <a:solidFill>
+                  <a:srgbClr val="0F172A"/>
+                </a:solidFill>
+                <a:effectLst/>
+                <a:uLnTx/>
+                <a:uFillTx/>
+                <a:latin typeface="Calibri" pitchFamily="34" charset="0"/>
+                <a:ea typeface="Calibri" pitchFamily="34" charset="-122"/>
+                <a:cs typeface="Calibri" pitchFamily="34" charset="-120"/>
+              </a:rPr>
+              <a:t>Unlimited Help Desk Support (Business Hours)</a:t>
+            </a:r>
+          </a:p>
+          <a:p>
+            <a:pPr marL="0" marR="0" lvl="0" indent="0" algn="l" defTabSz="914400" rtl="0" eaLnBrk="1" fontAlgn="auto" latinLnBrk="0" hangingPunct="1">
+              <a:lnSpc>
+                <a:spcPct val="100000"/>
+              </a:lnSpc>
+              <a:spcBef>
+                <a:spcPts val="0"/>
+              </a:spcBef>
+              <a:spcAft>
+                <a:spcPts val="0"/>
+              </a:spcAft>
+              <a:buClrTx/>
+              <a:buSzTx/>
+              <a:buFontTx/>
+              <a:buNone/>
+              <a:tabLst/>
+              <a:defRPr/>
+            </a:pPr>
+            <a:r>
+              <a:rPr kumimoji="0" lang="en-US" sz="1000" b="0" i="0" u="none" strike="noStrike" kern="1200" cap="none" spc="0" normalizeH="0" baseline="0" noProof="0" dirty="0">
+                <a:ln>
+                  <a:noFill/>
+                </a:ln>
+                <a:solidFill>
+                  <a:srgbClr val="0F172A"/>
+                </a:solidFill>
+                <a:effectLst/>
+                <a:uLnTx/>
+                <a:uFillTx/>
+                <a:latin typeface="Calibri" pitchFamily="34" charset="0"/>
+                <a:ea typeface="Calibri" pitchFamily="34" charset="-122"/>
+                <a:cs typeface="Calibri" pitchFamily="34" charset="-120"/>
+              </a:rPr>
+              <a:t>24/7 NOC Monitoring</a:t>
+            </a:r>
+          </a:p>
+          <a:p>
+            <a:pPr marL="0" marR="0" lvl="0" indent="0" algn="l" defTabSz="914400" rtl="0" eaLnBrk="1" fontAlgn="auto" latinLnBrk="0" hangingPunct="1">
+              <a:lnSpc>
+                <a:spcPct val="100000"/>
+              </a:lnSpc>
+              <a:spcBef>
+                <a:spcPts val="0"/>
+              </a:spcBef>
+              <a:spcAft>
+                <a:spcPts val="0"/>
+              </a:spcAft>
+              <a:buClrTx/>
+              <a:buSzTx/>
+              <a:buFontTx/>
+              <a:buNone/>
+              <a:tabLst/>
+              <a:defRPr/>
+            </a:pPr>
+            <a:r>
+              <a:rPr lang="en-US" sz="1000" dirty="0">
+                <a:solidFill>
+                  <a:srgbClr val="0F172A"/>
+                </a:solidFill>
+                <a:latin typeface="Calibri" pitchFamily="34" charset="0"/>
+                <a:ea typeface="Calibri" pitchFamily="34" charset="-122"/>
+                <a:cs typeface="Calibri" pitchFamily="34" charset="-120"/>
+              </a:rPr>
+              <a:t>Patch Management</a:t>
+            </a:r>
+            <a:endParaRPr kumimoji="0" lang="en-US" sz="1000" b="0" i="0" u="none" strike="noStrike" kern="1200" cap="none" spc="0" normalizeH="0" baseline="0" noProof="0" dirty="0">
+              <a:ln>
+                <a:noFill/>
+              </a:ln>
+              <a:solidFill>
+                <a:prstClr val="black"/>
+              </a:solidFill>
+              <a:effectLst/>
+              <a:uLnTx/>
+              <a:uFillTx/>
+              <a:latin typeface="Calibri" panose="020F0502020204030204"/>
+              <a:ea typeface="+mn-ea"/>
+              <a:cs typeface="+mn-cs"/>
+            </a:endParaRPr>
+          </a:p>
+        </p:txBody>
+      </p:sp>
+      <p:sp>
+        <p:nvSpPr>
+          <p:cNvPr id="27" name="Text 24"/>
+          <p:cNvSpPr/>
+          <p:nvPr/>
+        </p:nvSpPr>
+        <p:spPr>
+          <a:xfrm>
+            <a:off x="6995160" y="1870614"/>
+            <a:ext cx="1143000" cy="201168"/>
+          </a:xfrm>
+          <a:prstGeom prst="rect">
+            <a:avLst/>
+          </a:prstGeom>
+          <a:noFill/>
+          <a:ln/>
+        </p:spPr>
+        <p:txBody>
+          <a:bodyPr wrap="square" lIns="0" tIns="0" rIns="0" bIns="0" rtlCol="0" anchor="ctr"/>
+          <a:lstStyle/>
+          <a:p>
+            <a:pPr marL="0" marR="0" lvl="0" indent="0" algn="l" defTabSz="914400" rtl="0" eaLnBrk="1" fontAlgn="auto" latinLnBrk="0" hangingPunct="1">
+              <a:lnSpc>
+                <a:spcPct val="100000"/>
+              </a:lnSpc>
+              <a:spcBef>
+                <a:spcPts val="0"/>
+              </a:spcBef>
+              <a:spcAft>
+                <a:spcPts val="0"/>
+              </a:spcAft>
+              <a:buClrTx/>
+              <a:buSzTx/>
+              <a:buFontTx/>
+              <a:buNone/>
+              <a:tabLst/>
+              <a:defRPr/>
+            </a:pPr>
+            <a:r>
+              <a:rPr lang="en-US" sz="850" i="1" dirty="0">
+                <a:solidFill>
+                  <a:srgbClr val="64748B"/>
+                </a:solidFill>
+                <a:latin typeface="Calibri" pitchFamily="34" charset="0"/>
+                <a:ea typeface="Calibri" pitchFamily="34" charset="-122"/>
+                <a:cs typeface="Calibri" pitchFamily="34" charset="-120"/>
+              </a:rPr>
+              <a:t>{{core_detail}}</a:t>
+            </a:r>
+            <a:r>
+              <a:rPr kumimoji="0" lang="en-US" sz="850" b="0" i="1" u="none" strike="noStrike" kern="1200" cap="none" spc="0" normalizeH="0" baseline="0" noProof="0" dirty="0">
+                <a:ln>
+                  <a:noFill/>
+                </a:ln>
+                <a:solidFill>
+                  <a:srgbClr val="64748B"/>
+                </a:solidFill>
+                <a:effectLst/>
+                <a:uLnTx/>
+                <a:uFillTx/>
+                <a:latin typeface="Calibri" pitchFamily="34" charset="0"/>
+                <a:ea typeface="Calibri" pitchFamily="34" charset="-122"/>
+                <a:cs typeface="Calibri" pitchFamily="34" charset="-120"/>
+              </a:rPr>
+              <a:t/>
+            </a:r>
+            <a:endParaRPr kumimoji="0" lang="en-US" sz="850" b="0" i="0" u="none" strike="noStrike" kern="1200" cap="none" spc="0" normalizeH="0" baseline="0" noProof="0" dirty="0">
+              <a:ln>
+                <a:noFill/>
+              </a:ln>
+              <a:solidFill>
+                <a:prstClr val="black"/>
+              </a:solidFill>
+              <a:effectLst/>
+              <a:uLnTx/>
+              <a:uFillTx/>
+              <a:latin typeface="Calibri" panose="020F0502020204030204"/>
+              <a:ea typeface="+mn-ea"/>
+              <a:cs typeface="+mn-cs"/>
+            </a:endParaRPr>
+          </a:p>
+        </p:txBody>
+      </p:sp>
+      <p:sp>
+        <p:nvSpPr>
+          <p:cNvPr id="28" name="Text 25"/>
+          <p:cNvSpPr/>
+          <p:nvPr/>
+        </p:nvSpPr>
+        <p:spPr>
+          <a:xfrm>
+            <a:off x="8001000" y="1870614"/>
+            <a:ext cx="548640" cy="201168"/>
+          </a:xfrm>
+          <a:prstGeom prst="rect">
+            <a:avLst/>
+          </a:prstGeom>
+          <a:noFill/>
+          <a:ln/>
+        </p:spPr>
+        <p:txBody>
+          <a:bodyPr wrap="square" lIns="0" tIns="0" rIns="0" bIns="0" rtlCol="0" anchor="ctr"/>
+          <a:lstStyle/>
+          <a:p>
+            <a:pPr marL="0" marR="0" lvl="0" indent="0" algn="r" defTabSz="914400" rtl="0" eaLnBrk="1" fontAlgn="auto" latinLnBrk="0" hangingPunct="1">
+              <a:lnSpc>
+                <a:spcPct val="100000"/>
+              </a:lnSpc>
+              <a:spcBef>
+                <a:spcPts val="0"/>
+              </a:spcBef>
+              <a:spcAft>
+                <a:spcPts val="0"/>
+              </a:spcAft>
+              <a:buClrTx/>
+              <a:buSzTx/>
+              <a:buFontTx/>
+              <a:buNone/>
+              <a:tabLst/>
+              <a:defRPr/>
+            </a:pPr>
+            <a:r>
+              <a:rPr kumimoji="0" lang="en-US" sz="1050" b="1" i="0" u="none" strike="noStrike" kern="1200" cap="none" spc="0" normalizeH="0" baseline="0" noProof="0" dirty="0">
+                <a:ln>
+                  <a:noFill/>
+                </a:ln>
+                <a:solidFill>
+                  <a:srgbClr val="0F172A"/>
+                </a:solidFill>
+                <a:effectLst/>
+                <a:uLnTx/>
+                <a:uFillTx/>
+                <a:latin typeface="Calibri" pitchFamily="34" charset="0"/>
+                <a:ea typeface="Calibri" pitchFamily="34" charset="-122"/>
+                <a:cs typeface="Calibri" pitchFamily="34" charset="-120"/>
+              </a:rPr>
+              <a:t>{{core_total}}</a:t>
+            </a:r>
+            <a:r>
+              <a:rPr lang="en-US" sz="1050" b="1" dirty="0">
+                <a:solidFill>
+                  <a:srgbClr val="0F172A"/>
+                </a:solidFill>
+                <a:latin typeface="Calibri" pitchFamily="34" charset="0"/>
+                <a:ea typeface="Calibri" pitchFamily="34" charset="-122"/>
+                <a:cs typeface="Calibri" pitchFamily="34" charset="-120"/>
+              </a:rPr>
+              <a:t/>
+            </a:r>
+            <a:r>
+              <a:rPr kumimoji="0" lang="en-US" sz="1050" b="1" i="0" u="none" strike="noStrike" kern="1200" cap="none" spc="0" normalizeH="0" baseline="0" noProof="0" dirty="0">
+                <a:ln>
+                  <a:noFill/>
+                </a:ln>
+                <a:solidFill>
+                  <a:srgbClr val="0F172A"/>
+                </a:solidFill>
+                <a:effectLst/>
+                <a:uLnTx/>
+                <a:uFillTx/>
+                <a:latin typeface="Calibri" pitchFamily="34" charset="0"/>
+                <a:ea typeface="Calibri" pitchFamily="34" charset="-122"/>
+                <a:cs typeface="Calibri" pitchFamily="34" charset="-120"/>
+              </a:rPr>
+              <a:t/>
+            </a:r>
+            <a:endParaRPr kumimoji="0" lang="en-US" sz="1050" b="0" i="0" u="none" strike="noStrike" kern="1200" cap="none" spc="0" normalizeH="0" baseline="0" noProof="0" dirty="0">
+              <a:ln>
+                <a:noFill/>
+              </a:ln>
+              <a:solidFill>
+                <a:prstClr val="black"/>
+              </a:solidFill>
+              <a:effectLst/>
+              <a:uLnTx/>
+              <a:uFillTx/>
+              <a:latin typeface="Calibri" panose="020F0502020204030204"/>
+              <a:ea typeface="+mn-ea"/>
+              <a:cs typeface="+mn-cs"/>
+            </a:endParaRPr>
+          </a:p>
+        </p:txBody>
+      </p:sp>
+      <p:sp>
+        <p:nvSpPr>
+          <p:cNvPr id="29" name="Shape 26"/>
+          <p:cNvSpPr/>
+          <p:nvPr/>
+        </p:nvSpPr>
+        <p:spPr>
+          <a:xfrm>
+            <a:off x="4361688" y="2263140"/>
+            <a:ext cx="4123944" cy="4572"/>
+          </a:xfrm>
+          <a:prstGeom prst="rect">
+            <a:avLst/>
+          </a:prstGeom>
+          <a:solidFill>
+            <a:srgbClr val="F1F5F9"/>
+          </a:solidFill>
+          <a:ln/>
+        </p:spPr>
+        <p:txBody>
+          <a:bodyPr/>
+          <a:lstStyle/>
+          <a:p>
+            <a:pPr marL="0" marR="0" lvl="0" indent="0" algn="l" defTabSz="914400" rtl="0" eaLnBrk="1" fontAlgn="auto" latinLnBrk="0" hangingPunct="1">
+              <a:lnSpc>
+                <a:spcPct val="100000"/>
+              </a:lnSpc>
+              <a:spcBef>
+                <a:spcPts val="0"/>
+              </a:spcBef>
+              <a:spcAft>
+                <a:spcPts val="0"/>
+              </a:spcAft>
+              <a:buClrTx/>
+              <a:buSzTx/>
+              <a:buFontTx/>
+              <a:buNone/>
+              <a:tabLst/>
+              <a:defRPr/>
+            </a:pPr>
+            <a:endParaRPr kumimoji="0" lang="en-US" sz="1800" b="0" i="0" u="none" strike="noStrike" kern="1200" cap="none" spc="0" normalizeH="0" baseline="0" noProof="0">
+              <a:ln>
+                <a:noFill/>
+              </a:ln>
+              <a:solidFill>
+                <a:prstClr val="black"/>
+              </a:solidFill>
+              <a:effectLst/>
+              <a:uLnTx/>
+              <a:uFillTx/>
+              <a:latin typeface="Calibri" panose="020F0502020204030204"/>
+              <a:ea typeface="+mn-ea"/>
+              <a:cs typeface="+mn-cs"/>
+            </a:endParaRPr>
+          </a:p>
+        </p:txBody>
+      </p:sp>
+      <p:sp>
+        <p:nvSpPr>
+          <p:cNvPr id="33" name="Shape 30"/>
+          <p:cNvSpPr/>
+          <p:nvPr/>
+        </p:nvSpPr>
+        <p:spPr>
+          <a:xfrm>
+            <a:off x="4361688" y="2464308"/>
+            <a:ext cx="4123944" cy="4572"/>
+          </a:xfrm>
+          <a:prstGeom prst="rect">
+            <a:avLst/>
+          </a:prstGeom>
+          <a:solidFill>
+            <a:srgbClr val="F1F5F9"/>
+          </a:solidFill>
+          <a:ln/>
+        </p:spPr>
+        <p:txBody>
+          <a:bodyPr/>
+          <a:lstStyle/>
+          <a:p>
+            <a:pPr marL="0" marR="0" lvl="0" indent="0" algn="l" defTabSz="914400" rtl="0" eaLnBrk="1" fontAlgn="auto" latinLnBrk="0" hangingPunct="1">
+              <a:lnSpc>
+                <a:spcPct val="100000"/>
+              </a:lnSpc>
+              <a:spcBef>
+                <a:spcPts val="0"/>
+              </a:spcBef>
+              <a:spcAft>
+                <a:spcPts val="0"/>
+              </a:spcAft>
+              <a:buClrTx/>
+              <a:buSzTx/>
+              <a:buFontTx/>
+              <a:buNone/>
+              <a:tabLst/>
+              <a:defRPr/>
+            </a:pPr>
+            <a:endParaRPr kumimoji="0" lang="en-US" sz="1800" b="0" i="0" u="none" strike="noStrike" kern="1200" cap="none" spc="0" normalizeH="0" baseline="0" noProof="0">
+              <a:ln>
+                <a:noFill/>
+              </a:ln>
+              <a:solidFill>
+                <a:prstClr val="black"/>
+              </a:solidFill>
+              <a:effectLst/>
+              <a:uLnTx/>
+              <a:uFillTx/>
+              <a:latin typeface="Calibri" panose="020F0502020204030204"/>
+              <a:ea typeface="+mn-ea"/>
+              <a:cs typeface="+mn-cs"/>
+            </a:endParaRPr>
+          </a:p>
+        </p:txBody>
+      </p:sp>
+      <p:sp>
+        <p:nvSpPr>
+          <p:cNvPr id="45" name="Shape 42"/>
+          <p:cNvSpPr/>
+          <p:nvPr/>
+        </p:nvSpPr>
+        <p:spPr>
+          <a:xfrm>
+            <a:off x="4361688" y="3616452"/>
+            <a:ext cx="4123944" cy="4572"/>
+          </a:xfrm>
+          <a:prstGeom prst="rect">
+            <a:avLst/>
+          </a:prstGeom>
+          <a:solidFill>
+            <a:srgbClr val="F1F5F9"/>
+          </a:solidFill>
+          <a:ln/>
+        </p:spPr>
+        <p:txBody>
+          <a:bodyPr/>
+          <a:lstStyle/>
+          <a:p>
+            <a:pPr marL="0" marR="0" lvl="0" indent="0" algn="l" defTabSz="914400" rtl="0" eaLnBrk="1" fontAlgn="auto" latinLnBrk="0" hangingPunct="1">
+              <a:lnSpc>
+                <a:spcPct val="100000"/>
+              </a:lnSpc>
+              <a:spcBef>
+                <a:spcPts val="0"/>
+              </a:spcBef>
+              <a:spcAft>
+                <a:spcPts val="0"/>
+              </a:spcAft>
+              <a:buClrTx/>
+              <a:buSzTx/>
+              <a:buFontTx/>
+              <a:buNone/>
+              <a:tabLst/>
+              <a:defRPr/>
+            </a:pPr>
+            <a:endParaRPr kumimoji="0" lang="en-US" sz="1800" b="0" i="0" u="none" strike="noStrike" kern="1200" cap="none" spc="0" normalizeH="0" baseline="0" noProof="0">
+              <a:ln>
+                <a:noFill/>
+              </a:ln>
+              <a:solidFill>
+                <a:prstClr val="black"/>
+              </a:solidFill>
+              <a:effectLst/>
+              <a:uLnTx/>
+              <a:uFillTx/>
+              <a:latin typeface="Calibri" panose="020F0502020204030204"/>
+              <a:ea typeface="+mn-ea"/>
+              <a:cs typeface="+mn-cs"/>
+            </a:endParaRPr>
+          </a:p>
+        </p:txBody>
+      </p:sp>
+      <p:sp>
+        <p:nvSpPr>
+          <p:cNvPr id="49" name="Shape 46"/>
+          <p:cNvSpPr/>
+          <p:nvPr/>
+        </p:nvSpPr>
+        <p:spPr>
+          <a:xfrm>
+            <a:off x="4361688" y="3817620"/>
+            <a:ext cx="4123944" cy="4572"/>
+          </a:xfrm>
+          <a:prstGeom prst="rect">
+            <a:avLst/>
+          </a:prstGeom>
+          <a:solidFill>
+            <a:srgbClr val="F1F5F9"/>
+          </a:solidFill>
+          <a:ln/>
+        </p:spPr>
+        <p:txBody>
+          <a:bodyPr/>
+          <a:lstStyle/>
+          <a:p>
+            <a:pPr marL="0" marR="0" lvl="0" indent="0" algn="l" defTabSz="914400" rtl="0" eaLnBrk="1" fontAlgn="auto" latinLnBrk="0" hangingPunct="1">
+              <a:lnSpc>
+                <a:spcPct val="100000"/>
+              </a:lnSpc>
+              <a:spcBef>
+                <a:spcPts val="0"/>
+              </a:spcBef>
+              <a:spcAft>
+                <a:spcPts val="0"/>
+              </a:spcAft>
+              <a:buClrTx/>
+              <a:buSzTx/>
+              <a:buFontTx/>
+              <a:buNone/>
+              <a:tabLst/>
+              <a:defRPr/>
+            </a:pPr>
+            <a:endParaRPr kumimoji="0" lang="en-US" sz="1800" b="0" i="0" u="none" strike="noStrike" kern="1200" cap="none" spc="0" normalizeH="0" baseline="0" noProof="0">
+              <a:ln>
+                <a:noFill/>
+              </a:ln>
+              <a:solidFill>
+                <a:prstClr val="black"/>
+              </a:solidFill>
+              <a:effectLst/>
+              <a:uLnTx/>
+              <a:uFillTx/>
+              <a:latin typeface="Calibri" panose="020F0502020204030204"/>
+              <a:ea typeface="+mn-ea"/>
+              <a:cs typeface="+mn-cs"/>
+            </a:endParaRPr>
+          </a:p>
+        </p:txBody>
+      </p:sp>
+      <p:sp>
+        <p:nvSpPr>
+          <p:cNvPr id="53" name="Shape 50"/>
+          <p:cNvSpPr/>
+          <p:nvPr/>
+        </p:nvSpPr>
+        <p:spPr>
+          <a:xfrm>
+            <a:off x="4361688" y="4018788"/>
+            <a:ext cx="4123944" cy="4572"/>
+          </a:xfrm>
+          <a:prstGeom prst="rect">
+            <a:avLst/>
+          </a:prstGeom>
+          <a:solidFill>
+            <a:srgbClr val="F1F5F9"/>
+          </a:solidFill>
+          <a:ln/>
+        </p:spPr>
+        <p:txBody>
+          <a:bodyPr/>
+          <a:lstStyle/>
+          <a:p>
+            <a:pPr marL="0" marR="0" lvl="0" indent="0" algn="l" defTabSz="914400" rtl="0" eaLnBrk="1" fontAlgn="auto" latinLnBrk="0" hangingPunct="1">
+              <a:lnSpc>
+                <a:spcPct val="100000"/>
+              </a:lnSpc>
+              <a:spcBef>
+                <a:spcPts val="0"/>
+              </a:spcBef>
+              <a:spcAft>
+                <a:spcPts val="0"/>
+              </a:spcAft>
+              <a:buClrTx/>
+              <a:buSzTx/>
+              <a:buFontTx/>
+              <a:buNone/>
+              <a:tabLst/>
+              <a:defRPr/>
+            </a:pPr>
+            <a:endParaRPr kumimoji="0" lang="en-US" sz="1800" b="0" i="0" u="none" strike="noStrike" kern="1200" cap="none" spc="0" normalizeH="0" baseline="0" noProof="0">
+              <a:ln>
+                <a:noFill/>
+              </a:ln>
+              <a:solidFill>
+                <a:prstClr val="black"/>
+              </a:solidFill>
+              <a:effectLst/>
+              <a:uLnTx/>
+              <a:uFillTx/>
+              <a:latin typeface="Calibri" panose="020F0502020204030204"/>
+              <a:ea typeface="+mn-ea"/>
+              <a:cs typeface="+mn-cs"/>
+            </a:endParaRPr>
+          </a:p>
+        </p:txBody>
+      </p:sp>
+      <p:sp>
+        <p:nvSpPr>
+          <p:cNvPr id="57" name="Shape 54"/>
+          <p:cNvSpPr/>
+          <p:nvPr/>
+        </p:nvSpPr>
+        <p:spPr>
+          <a:xfrm>
+            <a:off x="4361688" y="4219956"/>
+            <a:ext cx="4123944" cy="4572"/>
+          </a:xfrm>
+          <a:prstGeom prst="rect">
+            <a:avLst/>
+          </a:prstGeom>
+          <a:solidFill>
+            <a:srgbClr val="F1F5F9"/>
+          </a:solidFill>
+          <a:ln/>
+        </p:spPr>
+        <p:txBody>
+          <a:bodyPr/>
+          <a:lstStyle/>
+          <a:p>
+            <a:pPr marL="0" marR="0" lvl="0" indent="0" algn="l" defTabSz="914400" rtl="0" eaLnBrk="1" fontAlgn="auto" latinLnBrk="0" hangingPunct="1">
+              <a:lnSpc>
+                <a:spcPct val="100000"/>
+              </a:lnSpc>
+              <a:spcBef>
+                <a:spcPts val="0"/>
+              </a:spcBef>
+              <a:spcAft>
+                <a:spcPts val="0"/>
+              </a:spcAft>
+              <a:buClrTx/>
+              <a:buSzTx/>
+              <a:buFontTx/>
+              <a:buNone/>
+              <a:tabLst/>
+              <a:defRPr/>
+            </a:pPr>
+            <a:endParaRPr kumimoji="0" lang="en-US" sz="1800" b="0" i="0" u="none" strike="noStrike" kern="1200" cap="none" spc="0" normalizeH="0" baseline="0" noProof="0">
+              <a:ln>
+                <a:noFill/>
+              </a:ln>
+              <a:solidFill>
+                <a:prstClr val="black"/>
+              </a:solidFill>
+              <a:effectLst/>
+              <a:uLnTx/>
+              <a:uFillTx/>
+              <a:latin typeface="Calibri" panose="020F0502020204030204"/>
+              <a:ea typeface="+mn-ea"/>
+              <a:cs typeface="+mn-cs"/>
+            </a:endParaRPr>
+          </a:p>
+        </p:txBody>
+      </p:sp>
+      <p:sp>
+        <p:nvSpPr>
+          <p:cNvPr id="61" name="Text 58"/>
+          <p:cNvSpPr/>
+          <p:nvPr/>
+        </p:nvSpPr>
+        <p:spPr>
+          <a:xfrm>
+            <a:off x="411480" y="4800600"/>
+            <a:ext cx="3657600" cy="228600"/>
+          </a:xfrm>
+          <a:prstGeom prst="rect">
+            <a:avLst/>
+          </a:prstGeom>
+          <a:noFill/>
+          <a:ln/>
+        </p:spPr>
+        <p:txBody>
+          <a:bodyPr wrap="square" lIns="0" tIns="0" rIns="0" bIns="0" rtlCol="0" anchor="ctr"/>
+          <a:lstStyle/>
+          <a:p>
+            <a:pPr marL="0" marR="0" lvl="0" indent="0" algn="l" defTabSz="914400" rtl="0" eaLnBrk="1" fontAlgn="auto" latinLnBrk="0" hangingPunct="1">
+              <a:lnSpc>
+                <a:spcPct val="100000"/>
+              </a:lnSpc>
+              <a:spcBef>
+                <a:spcPts val="0"/>
+              </a:spcBef>
+              <a:spcAft>
+                <a:spcPts val="0"/>
+              </a:spcAft>
+              <a:buClrTx/>
+              <a:buSzTx/>
+              <a:buFontTx/>
+              <a:buNone/>
+              <a:tabLst/>
+              <a:defRPr/>
+            </a:pPr>
+            <a:r>
+              <a:rPr kumimoji="0" lang="en-US" sz="900" b="0" i="0" u="none" strike="noStrike" kern="1200" cap="none" spc="0" normalizeH="0" baseline="0" noProof="0" dirty="0">
+                <a:ln>
+                  <a:noFill/>
+                </a:ln>
+                <a:solidFill>
+                  <a:srgbClr val="64748B"/>
+                </a:solidFill>
+                <a:effectLst/>
+                <a:uLnTx/>
+                <a:uFillTx/>
+                <a:latin typeface="Calibri" pitchFamily="34" charset="0"/>
+                <a:ea typeface="Calibri" pitchFamily="34" charset="-122"/>
+                <a:cs typeface="Calibri" pitchFamily="34" charset="-120"/>
+              </a:rPr>
+              <a:t>TeamLogic IT  |  Scottsdale</a:t>
+            </a:r>
+            <a:endParaRPr kumimoji="0" lang="en-US" sz="900" b="0" i="0" u="none" strike="noStrike" kern="1200" cap="none" spc="0" normalizeH="0" baseline="0" noProof="0" dirty="0">
+              <a:ln>
+                <a:noFill/>
+              </a:ln>
+              <a:solidFill>
+                <a:prstClr val="black"/>
+              </a:solidFill>
+              <a:effectLst/>
+              <a:uLnTx/>
+              <a:uFillTx/>
+              <a:latin typeface="Calibri" panose="020F0502020204030204"/>
+              <a:ea typeface="+mn-ea"/>
+              <a:cs typeface="+mn-cs"/>
+            </a:endParaRPr>
+          </a:p>
+        </p:txBody>
+      </p:sp>
+      <p:sp>
+        <p:nvSpPr>
+          <p:cNvPr id="63" name="Text 21">
+            <a:extLst>
+              <a:ext uri="{FF2B5EF4-FFF2-40B4-BE49-F238E27FC236}">
+                <a16:creationId xmlns:a16="http://schemas.microsoft.com/office/drawing/2014/main" id="{DCF82DC6-8FF4-14FC-136C-F89780B29FF6}"/>
+              </a:ext>
+            </a:extLst>
+          </p:cNvPr>
+          <p:cNvSpPr/>
+          <p:nvPr/>
+        </p:nvSpPr>
+        <p:spPr>
+          <a:xfrm>
+            <a:off x="457200" y="1214385"/>
+            <a:ext cx="3438798" cy="219456"/>
+          </a:xfrm>
+          <a:prstGeom prst="rect">
+            <a:avLst/>
+          </a:prstGeom>
+          <a:noFill/>
+          <a:ln/>
+        </p:spPr>
+        <p:txBody>
+          <a:bodyPr wrap="square" lIns="0" tIns="0" rIns="0" bIns="0" rtlCol="0" anchor="ctr"/>
+          <a:lstStyle/>
+          <a:p>
+            <a:pPr>
+              <a:defRPr/>
+            </a:pPr>
+            <a:r>
+              <a:rPr kumimoji="0" lang="en-US" sz="1350" b="1" i="0" u="none" strike="noStrike" kern="1200" cap="none" spc="0" normalizeH="0" baseline="0" noProof="0" dirty="0">
+                <a:ln>
+                  <a:noFill/>
+                </a:ln>
+                <a:solidFill>
+                  <a:srgbClr val="00B050"/>
+                </a:solidFill>
+                <a:effectLst/>
+                <a:uLnTx/>
+                <a:uFillTx/>
+                <a:latin typeface="Calibri" pitchFamily="34" charset="0"/>
+                <a:ea typeface="Calibri" pitchFamily="34" charset="-122"/>
+                <a:cs typeface="Calibri" pitchFamily="34" charset="-120"/>
+              </a:rPr>
+              <a:t>+ Managed Services </a:t>
+            </a:r>
+            <a:r>
+              <a:rPr lang="en-US" sz="1350" b="1" dirty="0">
+                <a:solidFill>
+                  <a:srgbClr val="00B050"/>
+                </a:solidFill>
+                <a:latin typeface="Calibri" pitchFamily="34" charset="0"/>
+                <a:ea typeface="Calibri" pitchFamily="34" charset="-122"/>
+                <a:cs typeface="Calibri" pitchFamily="34" charset="-120"/>
+              </a:rPr>
+              <a:t>+ Cybersecurity Protection</a:t>
+            </a:r>
+          </a:p>
+          <a:p>
+            <a:pPr marL="0" marR="0" lvl="0" indent="0" algn="l" defTabSz="914400" rtl="0" eaLnBrk="1" fontAlgn="auto" latinLnBrk="0" hangingPunct="1">
+              <a:lnSpc>
+                <a:spcPct val="100000"/>
+              </a:lnSpc>
+              <a:spcBef>
+                <a:spcPts val="0"/>
+              </a:spcBef>
+              <a:spcAft>
+                <a:spcPts val="0"/>
+              </a:spcAft>
+              <a:buClrTx/>
+              <a:buSzTx/>
+              <a:buFontTx/>
+              <a:buNone/>
+              <a:tabLst/>
+              <a:defRPr/>
+            </a:pPr>
+            <a:r>
+              <a:rPr kumimoji="0" lang="en-US" sz="1350" b="1" i="0" u="none" strike="noStrike" kern="1200" cap="none" spc="0" normalizeH="0" baseline="0" noProof="0" dirty="0">
+                <a:ln>
+                  <a:noFill/>
+                </a:ln>
+                <a:solidFill>
+                  <a:srgbClr val="00B050"/>
+                </a:solidFill>
+                <a:effectLst/>
+                <a:uLnTx/>
+                <a:uFillTx/>
+                <a:latin typeface="Calibri" pitchFamily="34" charset="0"/>
+                <a:ea typeface="Calibri" pitchFamily="34" charset="-122"/>
+                <a:cs typeface="Calibri" pitchFamily="34" charset="-120"/>
+              </a:rPr>
+              <a:t>+ Backup Services + Network Support</a:t>
+            </a:r>
+            <a:endParaRPr kumimoji="0" lang="en-US" sz="1350" b="0" i="0" u="none" strike="noStrike" kern="1200" cap="none" spc="0" normalizeH="0" baseline="0" noProof="0" dirty="0">
+              <a:ln>
+                <a:noFill/>
+              </a:ln>
+              <a:solidFill>
+                <a:srgbClr val="00B050"/>
+              </a:solidFill>
+              <a:effectLst/>
+              <a:uLnTx/>
+              <a:uFillTx/>
+              <a:latin typeface="Calibri" panose="020F0502020204030204"/>
+              <a:ea typeface="+mn-ea"/>
+              <a:cs typeface="+mn-cs"/>
+            </a:endParaRPr>
+          </a:p>
+        </p:txBody>
+      </p:sp>
+      <p:grpSp>
+        <p:nvGrpSpPr>
+          <p:cNvPr id="67" name="Group 66">
+            <a:extLst>
+              <a:ext uri="{FF2B5EF4-FFF2-40B4-BE49-F238E27FC236}">
+                <a16:creationId xmlns:a16="http://schemas.microsoft.com/office/drawing/2014/main" id="{7D634C8C-B9B9-3A82-679B-63893066140F}"/>
+              </a:ext>
+            </a:extLst>
+          </p:cNvPr>
+          <p:cNvGrpSpPr/>
+          <p:nvPr/>
+        </p:nvGrpSpPr>
+        <p:grpSpPr>
+          <a:xfrm>
+            <a:off x="4160520" y="218477"/>
+            <a:ext cx="2514600" cy="1024781"/>
+            <a:chOff x="6089904" y="1280160"/>
+            <a:chExt cx="2697480" cy="1417320"/>
+          </a:xfrm>
+        </p:grpSpPr>
+        <p:sp>
+          <p:nvSpPr>
+            <p:cNvPr id="68" name="Shape 12"/>
+            <p:cNvSpPr/>
+            <p:nvPr/>
+          </p:nvSpPr>
+          <p:spPr>
+            <a:xfrm>
+              <a:off x="6089904" y="1280160"/>
+              <a:ext cx="2697480" cy="1417320"/>
+            </a:xfrm>
+            <a:prstGeom prst="rect">
+              <a:avLst/>
+            </a:prstGeom>
+            <a:solidFill>
+              <a:srgbClr val="10B981"/>
+            </a:solidFill>
+            <a:ln/>
+            <a:effectLst>
+              <a:outerShdw blurRad="127000" dist="38100" dir="5400000" algn="bl" rotWithShape="0">
+                <a:srgbClr val="0F172A">
+                  <a:alpha val="10000"/>
+                </a:srgbClr>
+              </a:outerShdw>
+            </a:effectLst>
+          </p:spPr>
+          <p:txBody>
+            <a:bodyPr/>
+            <a:lstStyle/>
+            <a:p>
+              <a:pPr marL="0" marR="0" lvl="0" indent="0" algn="l" defTabSz="914400" rtl="0" eaLnBrk="1" fontAlgn="auto" latinLnBrk="0" hangingPunct="1">
+                <a:lnSpc>
+                  <a:spcPct val="100000"/>
+                </a:lnSpc>
+                <a:spcBef>
+                  <a:spcPts val="0"/>
+                </a:spcBef>
+                <a:spcAft>
+                  <a:spcPts val="0"/>
+                </a:spcAft>
+                <a:buClrTx/>
+                <a:buSzTx/>
+                <a:buFontTx/>
+                <a:buNone/>
+                <a:tabLst/>
+                <a:defRPr/>
+              </a:pPr>
+              <a:endParaRPr kumimoji="0" lang="en-US" sz="1800" b="0" i="0" u="none" strike="noStrike" kern="1200" cap="none" spc="0" normalizeH="0" baseline="0" noProof="0">
+                <a:ln>
+                  <a:noFill/>
+                </a:ln>
+                <a:solidFill>
+                  <a:prstClr val="black"/>
+                </a:solidFill>
+                <a:effectLst/>
+                <a:uLnTx/>
+                <a:uFillTx/>
+                <a:latin typeface="Calibri" panose="020F0502020204030204"/>
+                <a:ea typeface="+mn-ea"/>
+                <a:cs typeface="+mn-cs"/>
+              </a:endParaRPr>
+            </a:p>
+          </p:txBody>
+        </p:sp>
+        <p:sp>
+          <p:nvSpPr>
+            <p:cNvPr id="69" name="Text 13"/>
+            <p:cNvSpPr/>
+            <p:nvPr/>
+          </p:nvSpPr>
+          <p:spPr>
+            <a:xfrm>
+              <a:off x="6272784" y="1417320"/>
+              <a:ext cx="2331720" cy="274320"/>
+            </a:xfrm>
+            <a:prstGeom prst="rect">
+              <a:avLst/>
+            </a:prstGeom>
+            <a:noFill/>
+            <a:ln/>
+          </p:spPr>
+          <p:txBody>
+            <a:bodyPr wrap="square" lIns="0" tIns="0" rIns="0" bIns="0" rtlCol="0" anchor="ctr"/>
+            <a:lstStyle/>
+            <a:p>
+              <a:pPr marL="0" marR="0" lvl="0" indent="0" algn="l" defTabSz="914400" rtl="0" eaLnBrk="1" fontAlgn="auto" latinLnBrk="0" hangingPunct="1">
+                <a:lnSpc>
+                  <a:spcPct val="100000"/>
+                </a:lnSpc>
+                <a:spcBef>
+                  <a:spcPts val="0"/>
+                </a:spcBef>
+                <a:spcAft>
+                  <a:spcPts val="0"/>
+                </a:spcAft>
+                <a:buClrTx/>
+                <a:buSzTx/>
+                <a:buFontTx/>
+                <a:buNone/>
+                <a:tabLst/>
+                <a:defRPr/>
+              </a:pPr>
+              <a:r>
+                <a:rPr kumimoji="0" lang="en-US" sz="1000" b="1" i="0" u="none" strike="noStrike" kern="0" cap="none" spc="300" normalizeH="0" baseline="0" noProof="0" dirty="0">
+                  <a:ln>
+                    <a:noFill/>
+                  </a:ln>
+                  <a:solidFill>
+                    <a:srgbClr val="0F172A"/>
+                  </a:solidFill>
+                  <a:effectLst/>
+                  <a:uLnTx/>
+                  <a:uFillTx/>
+                  <a:latin typeface="Calibri" pitchFamily="34" charset="0"/>
+                  <a:ea typeface="Calibri" pitchFamily="34" charset="-122"/>
+                  <a:cs typeface="Calibri" pitchFamily="34" charset="-120"/>
+                </a:rPr>
+                <a:t>ONE-TIME SETUP</a:t>
+              </a:r>
+              <a:endParaRPr kumimoji="0" lang="en-US" sz="1000" b="0" i="0" u="none" strike="noStrike" kern="1200" cap="none" spc="0" normalizeH="0" baseline="0" noProof="0" dirty="0">
+                <a:ln>
+                  <a:noFill/>
+                </a:ln>
+                <a:solidFill>
+                  <a:prstClr val="black"/>
+                </a:solidFill>
+                <a:effectLst/>
+                <a:uLnTx/>
+                <a:uFillTx/>
+                <a:latin typeface="Calibri" panose="020F0502020204030204"/>
+                <a:ea typeface="+mn-ea"/>
+                <a:cs typeface="+mn-cs"/>
+              </a:endParaRPr>
+            </a:p>
+          </p:txBody>
+        </p:sp>
+        <p:sp>
+          <p:nvSpPr>
+            <p:cNvPr id="70" name="Text 14"/>
+            <p:cNvSpPr/>
+            <p:nvPr/>
+          </p:nvSpPr>
+          <p:spPr>
+            <a:xfrm>
+              <a:off x="6272784" y="1664208"/>
+              <a:ext cx="2331720" cy="594360"/>
+            </a:xfrm>
+            <a:prstGeom prst="rect">
+              <a:avLst/>
+            </a:prstGeom>
+            <a:noFill/>
+            <a:ln/>
+          </p:spPr>
+          <p:txBody>
+            <a:bodyPr wrap="square" lIns="0" tIns="0" rIns="0" bIns="0" rtlCol="0" anchor="ctr"/>
+            <a:lstStyle/>
+            <a:p>
+              <a:pPr marL="0" marR="0" lvl="0" indent="0" algn="l" defTabSz="914400" rtl="0" eaLnBrk="1" fontAlgn="auto" latinLnBrk="0" hangingPunct="1">
+                <a:lnSpc>
+                  <a:spcPct val="100000"/>
+                </a:lnSpc>
+                <a:spcBef>
+                  <a:spcPts val="0"/>
+                </a:spcBef>
+                <a:spcAft>
+                  <a:spcPts val="0"/>
+                </a:spcAft>
+                <a:buClrTx/>
+                <a:buSzTx/>
+                <a:buFontTx/>
+                <a:buNone/>
+                <a:tabLst/>
+                <a:defRPr/>
+              </a:pPr>
+              <a:r>
+                <a:rPr kumimoji="0" lang="en-US" sz="3600" b="1" i="0" u="none" strike="noStrike" kern="1200" cap="none" spc="0" normalizeH="0" baseline="0" noProof="0" dirty="0">
+                  <a:ln>
+                    <a:noFill/>
+                  </a:ln>
+                  <a:solidFill>
+                    <a:srgbClr val="FFFFFF"/>
+                  </a:solidFill>
+                  <a:effectLst/>
+                  <a:uLnTx/>
+                  <a:uFillTx/>
+                  <a:latin typeface="Calibri" pitchFamily="34" charset="0"/>
+                  <a:ea typeface="Calibri" pitchFamily="34" charset="-122"/>
+                  <a:cs typeface="Calibri" pitchFamily="34" charset="-120"/>
+                </a:rPr>
+                <a:t>{{onboarding}}</a:t>
+              </a:r>
+              <a:endParaRPr kumimoji="0" lang="en-US" sz="3600" b="0" i="0" u="none" strike="noStrike" kern="1200" cap="none" spc="0" normalizeH="0" baseline="0" noProof="0" dirty="0">
+                <a:ln>
+                  <a:noFill/>
+                </a:ln>
+                <a:solidFill>
+                  <a:prstClr val="black"/>
+                </a:solidFill>
+                <a:effectLst/>
+                <a:uLnTx/>
+                <a:uFillTx/>
+                <a:latin typeface="Calibri" panose="020F0502020204030204"/>
+                <a:ea typeface="+mn-ea"/>
+                <a:cs typeface="+mn-cs"/>
+              </a:endParaRPr>
+            </a:p>
+          </p:txBody>
+        </p:sp>
+        <p:sp>
+          <p:nvSpPr>
+            <p:cNvPr id="72" name="Text 16"/>
+            <p:cNvSpPr/>
+            <p:nvPr/>
+          </p:nvSpPr>
+          <p:spPr>
+            <a:xfrm>
+              <a:off x="6272784" y="2208276"/>
+              <a:ext cx="2331720" cy="274320"/>
+            </a:xfrm>
+            <a:prstGeom prst="rect">
+              <a:avLst/>
+            </a:prstGeom>
+            <a:noFill/>
+            <a:ln/>
+          </p:spPr>
+          <p:txBody>
+            <a:bodyPr wrap="square" lIns="0" tIns="0" rIns="0" bIns="0" rtlCol="0" anchor="ctr"/>
+            <a:lstStyle/>
+            <a:p>
+              <a:pPr marL="0" marR="0" lvl="0" indent="0" algn="l" defTabSz="914400" rtl="0" eaLnBrk="1" fontAlgn="auto" latinLnBrk="0" hangingPunct="1">
+                <a:lnSpc>
+                  <a:spcPct val="100000"/>
+                </a:lnSpc>
+                <a:spcBef>
+                  <a:spcPts val="0"/>
+                </a:spcBef>
+                <a:spcAft>
+                  <a:spcPts val="0"/>
+                </a:spcAft>
+                <a:buClrTx/>
+                <a:buSzTx/>
+                <a:buFontTx/>
+                <a:buNone/>
+                <a:tabLst/>
+                <a:defRPr/>
+              </a:pPr>
+              <a:r>
+                <a:rPr kumimoji="0" lang="en-US" sz="850" b="0" i="0" u="none" strike="noStrike" kern="1200" cap="none" spc="0" normalizeH="0" baseline="0" noProof="0" dirty="0">
+                  <a:ln>
+                    <a:noFill/>
+                  </a:ln>
+                  <a:solidFill>
+                    <a:srgbClr val="0F172A"/>
+                  </a:solidFill>
+                  <a:effectLst/>
+                  <a:uLnTx/>
+                  <a:uFillTx/>
+                  <a:latin typeface="Calibri" pitchFamily="34" charset="0"/>
+                  <a:ea typeface="Calibri" pitchFamily="34" charset="-122"/>
+                  <a:cs typeface="Calibri" pitchFamily="34" charset="-120"/>
+                </a:rPr>
+                <a:t>Onboarding, discovery &amp; infrastructure baseline</a:t>
+              </a:r>
+              <a:endParaRPr kumimoji="0" lang="en-US" sz="850" b="0" i="0" u="none" strike="noStrike" kern="1200" cap="none" spc="0" normalizeH="0" baseline="0" noProof="0" dirty="0">
+                <a:ln>
+                  <a:noFill/>
+                </a:ln>
+                <a:solidFill>
+                  <a:prstClr val="black"/>
+                </a:solidFill>
+                <a:effectLst/>
+                <a:uLnTx/>
+                <a:uFillTx/>
+                <a:latin typeface="Calibri" panose="020F0502020204030204"/>
+                <a:ea typeface="+mn-ea"/>
+                <a:cs typeface="+mn-cs"/>
+              </a:endParaRPr>
+            </a:p>
+          </p:txBody>
+        </p:sp>
+      </p:grpSp>
+      <p:sp>
+        <p:nvSpPr>
+          <p:cNvPr id="54" name="Shape 17">
+            <a:extLst>
+              <a:ext uri="{FF2B5EF4-FFF2-40B4-BE49-F238E27FC236}">
+                <a16:creationId xmlns:a16="http://schemas.microsoft.com/office/drawing/2014/main" id="{D5818ECE-70AE-73DB-11D0-B00F0F3905D7}"/>
+              </a:ext>
+            </a:extLst>
+          </p:cNvPr>
+          <p:cNvSpPr/>
+          <p:nvPr/>
+        </p:nvSpPr>
+        <p:spPr>
+          <a:xfrm>
+            <a:off x="432628" y="2742874"/>
+            <a:ext cx="73152" cy="274320"/>
+          </a:xfrm>
+          <a:prstGeom prst="rect">
+            <a:avLst/>
+          </a:prstGeom>
+          <a:solidFill>
+            <a:srgbClr val="10B981"/>
+          </a:solidFill>
+          <a:ln/>
+        </p:spPr>
+        <p:txBody>
+          <a:bodyPr/>
+          <a:lstStyle/>
+          <a:p>
+            <a:pPr marL="0" marR="0" lvl="0" indent="0" algn="l" defTabSz="914400" rtl="0" eaLnBrk="1" fontAlgn="auto" latinLnBrk="0" hangingPunct="1">
+              <a:lnSpc>
+                <a:spcPct val="100000"/>
+              </a:lnSpc>
+              <a:spcBef>
+                <a:spcPts val="0"/>
+              </a:spcBef>
+              <a:spcAft>
+                <a:spcPts val="0"/>
+              </a:spcAft>
+              <a:buClrTx/>
+              <a:buSzTx/>
+              <a:buFontTx/>
+              <a:buNone/>
+              <a:tabLst/>
+              <a:defRPr/>
+            </a:pPr>
+            <a:endParaRPr kumimoji="0" lang="en-US" sz="1200" b="0" i="0" u="none" strike="noStrike" kern="1200" cap="none" spc="0" normalizeH="0" baseline="0" noProof="0">
+              <a:ln>
+                <a:noFill/>
+              </a:ln>
+              <a:solidFill>
+                <a:prstClr val="black"/>
+              </a:solidFill>
+              <a:effectLst/>
+              <a:uLnTx/>
+              <a:uFillTx/>
+              <a:latin typeface="Calibri" panose="020F0502020204030204"/>
+              <a:ea typeface="+mn-ea"/>
+              <a:cs typeface="+mn-cs"/>
+            </a:endParaRPr>
+          </a:p>
+        </p:txBody>
+      </p:sp>
+      <p:sp>
+        <p:nvSpPr>
+          <p:cNvPr id="55" name="Text 18">
+            <a:extLst>
+              <a:ext uri="{FF2B5EF4-FFF2-40B4-BE49-F238E27FC236}">
+                <a16:creationId xmlns:a16="http://schemas.microsoft.com/office/drawing/2014/main" id="{2786F558-C9D7-15A6-4E78-3F9D8692321A}"/>
+              </a:ext>
+            </a:extLst>
+          </p:cNvPr>
+          <p:cNvSpPr/>
+          <p:nvPr/>
+        </p:nvSpPr>
+        <p:spPr>
+          <a:xfrm>
+            <a:off x="615508" y="2715442"/>
+            <a:ext cx="8229600" cy="320040"/>
+          </a:xfrm>
+          <a:prstGeom prst="rect">
+            <a:avLst/>
+          </a:prstGeom>
+          <a:noFill/>
+          <a:ln/>
+        </p:spPr>
+        <p:txBody>
+          <a:bodyPr wrap="square" lIns="0" tIns="0" rIns="0" bIns="0" rtlCol="0" anchor="ctr"/>
+          <a:lstStyle/>
+          <a:p>
+            <a:pPr marL="0" marR="0" lvl="0" indent="0" algn="l" defTabSz="914400" rtl="0" eaLnBrk="1" fontAlgn="auto" latinLnBrk="0" hangingPunct="1">
+              <a:lnSpc>
+                <a:spcPct val="100000"/>
+              </a:lnSpc>
+              <a:spcBef>
+                <a:spcPts val="0"/>
+              </a:spcBef>
+              <a:spcAft>
+                <a:spcPts val="0"/>
+              </a:spcAft>
+              <a:buClrTx/>
+              <a:buSzTx/>
+              <a:buFontTx/>
+              <a:buNone/>
+              <a:tabLst/>
+              <a:defRPr/>
+            </a:pPr>
+            <a:r>
+              <a:rPr kumimoji="0" lang="en-US" sz="1050" b="1" i="0" u="none" strike="noStrike" kern="1200" cap="none" spc="0" normalizeH="0" baseline="0" noProof="0" dirty="0">
+                <a:ln>
+                  <a:noFill/>
+                </a:ln>
+                <a:solidFill>
+                  <a:srgbClr val="0F172A"/>
+                </a:solidFill>
+                <a:effectLst/>
+                <a:uLnTx/>
+                <a:uFillTx/>
+                <a:latin typeface="Calibri" pitchFamily="34" charset="0"/>
+                <a:ea typeface="Calibri" pitchFamily="34" charset="-122"/>
+                <a:cs typeface="Calibri" pitchFamily="34" charset="-120"/>
+              </a:rPr>
+              <a:t>Included in Managed Services — at no additional cost</a:t>
+            </a:r>
+            <a:endParaRPr kumimoji="0" lang="en-US" sz="1050" b="0" i="0" u="none" strike="noStrike" kern="1200" cap="none" spc="0" normalizeH="0" baseline="0" noProof="0" dirty="0">
+              <a:ln>
+                <a:noFill/>
+              </a:ln>
+              <a:solidFill>
+                <a:prstClr val="black"/>
+              </a:solidFill>
+              <a:effectLst/>
+              <a:uLnTx/>
+              <a:uFillTx/>
+              <a:latin typeface="Calibri" panose="020F0502020204030204"/>
+              <a:ea typeface="+mn-ea"/>
+              <a:cs typeface="+mn-cs"/>
+            </a:endParaRPr>
+          </a:p>
+        </p:txBody>
+      </p:sp>
+      <p:sp>
+        <p:nvSpPr>
+          <p:cNvPr id="56" name="Shape 19">
+            <a:extLst>
+              <a:ext uri="{FF2B5EF4-FFF2-40B4-BE49-F238E27FC236}">
+                <a16:creationId xmlns:a16="http://schemas.microsoft.com/office/drawing/2014/main" id="{BD1BD9B0-7EB9-AAE8-A4B3-BBA2B405AF52}"/>
+              </a:ext>
+            </a:extLst>
+          </p:cNvPr>
+          <p:cNvSpPr/>
+          <p:nvPr/>
+        </p:nvSpPr>
+        <p:spPr>
+          <a:xfrm>
+            <a:off x="413440" y="3270450"/>
+            <a:ext cx="320040" cy="320040"/>
+          </a:xfrm>
+          <a:prstGeom prst="ellipse">
+            <a:avLst/>
+          </a:prstGeom>
+          <a:solidFill>
+            <a:srgbClr val="10B981"/>
+          </a:solidFill>
+          <a:ln/>
+        </p:spPr>
+        <p:txBody>
+          <a:bodyPr/>
+          <a:lstStyle/>
+          <a:p>
+            <a:pPr marL="0" marR="0" lvl="0" indent="0" algn="l" defTabSz="914400" rtl="0" eaLnBrk="1" fontAlgn="auto" latinLnBrk="0" hangingPunct="1">
+              <a:lnSpc>
+                <a:spcPct val="100000"/>
+              </a:lnSpc>
+              <a:spcBef>
+                <a:spcPts val="0"/>
+              </a:spcBef>
+              <a:spcAft>
+                <a:spcPts val="0"/>
+              </a:spcAft>
+              <a:buClrTx/>
+              <a:buSzTx/>
+              <a:buFontTx/>
+              <a:buNone/>
+              <a:tabLst/>
+              <a:defRPr/>
+            </a:pPr>
+            <a:endParaRPr kumimoji="0" lang="en-US" sz="1200" b="0" i="0" u="none" strike="noStrike" kern="1200" cap="none" spc="0" normalizeH="0" baseline="0" noProof="0">
+              <a:ln>
+                <a:noFill/>
+              </a:ln>
+              <a:solidFill>
+                <a:prstClr val="black"/>
+              </a:solidFill>
+              <a:effectLst/>
+              <a:uLnTx/>
+              <a:uFillTx/>
+              <a:latin typeface="Calibri" panose="020F0502020204030204"/>
+              <a:ea typeface="+mn-ea"/>
+              <a:cs typeface="+mn-cs"/>
+            </a:endParaRPr>
+          </a:p>
+        </p:txBody>
+      </p:sp>
+      <p:pic>
+        <p:nvPicPr>
+          <p:cNvPr id="58" name="Image 1" descr="preencoded.png">
+            <a:extLst>
+              <a:ext uri="{FF2B5EF4-FFF2-40B4-BE49-F238E27FC236}">
+                <a16:creationId xmlns:a16="http://schemas.microsoft.com/office/drawing/2014/main" id="{8F0B72DF-4E6B-65F6-077B-0A6E983D1538}"/>
+              </a:ext>
+            </a:extLst>
+          </p:cNvPr>
+          <p:cNvPicPr>
+            <a:picLocks noChangeAspect="1"/>
+          </p:cNvPicPr>
+          <p:nvPr/>
+        </p:nvPicPr>
+        <p:blipFill>
+          <a:blip r:embed="rId4"/>
+          <a:stretch>
+            <a:fillRect/>
+          </a:stretch>
+        </p:blipFill>
+        <p:spPr>
+          <a:xfrm>
+            <a:off x="491164" y="3348174"/>
+            <a:ext cx="164592" cy="164592"/>
+          </a:xfrm>
+          <a:prstGeom prst="rect">
+            <a:avLst/>
+          </a:prstGeom>
+        </p:spPr>
+      </p:pic>
+      <p:sp>
+        <p:nvSpPr>
+          <p:cNvPr id="59" name="Text 20">
+            <a:extLst>
+              <a:ext uri="{FF2B5EF4-FFF2-40B4-BE49-F238E27FC236}">
+                <a16:creationId xmlns:a16="http://schemas.microsoft.com/office/drawing/2014/main" id="{FDB2EA8A-DF8D-05AD-ED95-D752D1F4EC23}"/>
+              </a:ext>
+            </a:extLst>
+          </p:cNvPr>
+          <p:cNvSpPr/>
+          <p:nvPr/>
+        </p:nvSpPr>
+        <p:spPr>
+          <a:xfrm>
+            <a:off x="797488" y="3233874"/>
+            <a:ext cx="1627632" cy="365760"/>
+          </a:xfrm>
+          <a:prstGeom prst="rect">
+            <a:avLst/>
+          </a:prstGeom>
+          <a:noFill/>
+          <a:ln/>
+        </p:spPr>
+        <p:txBody>
+          <a:bodyPr wrap="square" lIns="0" tIns="0" rIns="0" bIns="0" rtlCol="0" anchor="ctr"/>
+          <a:lstStyle/>
+          <a:p>
+            <a:pPr marL="0" marR="0" lvl="0" indent="0" algn="l" defTabSz="914400" rtl="0" eaLnBrk="1" fontAlgn="auto" latinLnBrk="0" hangingPunct="1">
+              <a:lnSpc>
+                <a:spcPct val="100000"/>
+              </a:lnSpc>
+              <a:spcBef>
+                <a:spcPts val="0"/>
+              </a:spcBef>
+              <a:spcAft>
+                <a:spcPts val="0"/>
+              </a:spcAft>
+              <a:buClrTx/>
+              <a:buSzTx/>
+              <a:buFontTx/>
+              <a:buNone/>
+              <a:tabLst/>
+              <a:defRPr/>
+            </a:pPr>
+            <a:r>
+              <a:rPr kumimoji="0" lang="en-US" sz="800" b="1" i="0" u="none" strike="noStrike" kern="1200" cap="none" spc="0" normalizeH="0" baseline="0" noProof="0" dirty="0">
+                <a:ln>
+                  <a:noFill/>
+                </a:ln>
+                <a:solidFill>
+                  <a:srgbClr val="0F172A"/>
+                </a:solidFill>
+                <a:effectLst/>
+                <a:uLnTx/>
+                <a:uFillTx/>
+                <a:latin typeface="Calibri" pitchFamily="34" charset="0"/>
+                <a:ea typeface="Calibri" pitchFamily="34" charset="-122"/>
+                <a:cs typeface="Calibri" pitchFamily="34" charset="-120"/>
+              </a:rPr>
+              <a:t>Microsoft license management</a:t>
+            </a:r>
+            <a:endParaRPr kumimoji="0" lang="en-US" sz="800" b="0" i="0" u="none" strike="noStrike" kern="1200" cap="none" spc="0" normalizeH="0" baseline="0" noProof="0" dirty="0">
+              <a:ln>
+                <a:noFill/>
+              </a:ln>
+              <a:solidFill>
+                <a:prstClr val="black"/>
+              </a:solidFill>
+              <a:effectLst/>
+              <a:uLnTx/>
+              <a:uFillTx/>
+              <a:latin typeface="Calibri" panose="020F0502020204030204"/>
+              <a:ea typeface="+mn-ea"/>
+              <a:cs typeface="+mn-cs"/>
+            </a:endParaRPr>
+          </a:p>
+        </p:txBody>
+      </p:sp>
+      <p:sp>
+        <p:nvSpPr>
+          <p:cNvPr id="60" name="Text 21">
+            <a:extLst>
+              <a:ext uri="{FF2B5EF4-FFF2-40B4-BE49-F238E27FC236}">
+                <a16:creationId xmlns:a16="http://schemas.microsoft.com/office/drawing/2014/main" id="{24F55BB4-8C3D-68B3-8ADB-C7E9F68B7E95}"/>
+              </a:ext>
+            </a:extLst>
+          </p:cNvPr>
+          <p:cNvSpPr/>
+          <p:nvPr/>
+        </p:nvSpPr>
+        <p:spPr>
+          <a:xfrm>
+            <a:off x="413440" y="3727650"/>
+            <a:ext cx="1965960" cy="594360"/>
+          </a:xfrm>
+          <a:prstGeom prst="rect">
+            <a:avLst/>
+          </a:prstGeom>
+          <a:noFill/>
+          <a:ln/>
+        </p:spPr>
+        <p:txBody>
+          <a:bodyPr wrap="square" lIns="0" tIns="0" rIns="0" bIns="0" rtlCol="0" anchor="t"/>
+          <a:lstStyle/>
+          <a:p>
+            <a:pPr marL="0" marR="0" lvl="0" indent="0" algn="l" defTabSz="914400" rtl="0" eaLnBrk="1" fontAlgn="auto" latinLnBrk="0" hangingPunct="1">
+              <a:lnSpc>
+                <a:spcPct val="100000"/>
+              </a:lnSpc>
+              <a:spcBef>
+                <a:spcPts val="0"/>
+              </a:spcBef>
+              <a:spcAft>
+                <a:spcPts val="0"/>
+              </a:spcAft>
+              <a:buClrTx/>
+              <a:buSzTx/>
+              <a:buFontTx/>
+              <a:buNone/>
+              <a:tabLst/>
+              <a:defRPr/>
+            </a:pPr>
+            <a:r>
+              <a:rPr kumimoji="0" lang="en-US" sz="700" b="0" i="0" u="none" strike="noStrike" kern="1200" cap="none" spc="0" normalizeH="0" baseline="0" noProof="0" dirty="0">
+                <a:ln>
+                  <a:noFill/>
+                </a:ln>
+                <a:solidFill>
+                  <a:srgbClr val="64748B"/>
+                </a:solidFill>
+                <a:effectLst/>
+                <a:uLnTx/>
+                <a:uFillTx/>
+                <a:latin typeface="Calibri" pitchFamily="34" charset="0"/>
+                <a:ea typeface="Calibri" pitchFamily="34" charset="-122"/>
+                <a:cs typeface="Calibri" pitchFamily="34" charset="-120"/>
+              </a:rPr>
+              <a:t>Admin access required; no extra charge.</a:t>
+            </a:r>
+            <a:endParaRPr kumimoji="0" lang="en-US" sz="700" b="0" i="0" u="none" strike="noStrike" kern="1200" cap="none" spc="0" normalizeH="0" baseline="0" noProof="0" dirty="0">
+              <a:ln>
+                <a:noFill/>
+              </a:ln>
+              <a:solidFill>
+                <a:prstClr val="black"/>
+              </a:solidFill>
+              <a:effectLst/>
+              <a:uLnTx/>
+              <a:uFillTx/>
+              <a:latin typeface="Calibri" panose="020F0502020204030204"/>
+              <a:ea typeface="+mn-ea"/>
+              <a:cs typeface="+mn-cs"/>
+            </a:endParaRPr>
+          </a:p>
+        </p:txBody>
+      </p:sp>
+      <p:sp>
+        <p:nvSpPr>
+          <p:cNvPr id="71" name="Shape 27">
+            <a:extLst>
+              <a:ext uri="{FF2B5EF4-FFF2-40B4-BE49-F238E27FC236}">
+                <a16:creationId xmlns:a16="http://schemas.microsoft.com/office/drawing/2014/main" id="{821E28BF-6F48-DC8B-23AE-9EECBEDB8361}"/>
+              </a:ext>
+            </a:extLst>
+          </p:cNvPr>
+          <p:cNvSpPr/>
+          <p:nvPr/>
+        </p:nvSpPr>
+        <p:spPr>
+          <a:xfrm>
+            <a:off x="2366664" y="3270450"/>
+            <a:ext cx="320040" cy="320040"/>
+          </a:xfrm>
+          <a:prstGeom prst="ellipse">
+            <a:avLst/>
+          </a:prstGeom>
+          <a:solidFill>
+            <a:srgbClr val="10B981"/>
+          </a:solidFill>
+          <a:ln/>
+        </p:spPr>
+        <p:txBody>
+          <a:bodyPr/>
+          <a:lstStyle/>
+          <a:p>
+            <a:pPr marL="0" marR="0" lvl="0" indent="0" algn="l" defTabSz="914400" rtl="0" eaLnBrk="1" fontAlgn="auto" latinLnBrk="0" hangingPunct="1">
+              <a:lnSpc>
+                <a:spcPct val="100000"/>
+              </a:lnSpc>
+              <a:spcBef>
+                <a:spcPts val="0"/>
+              </a:spcBef>
+              <a:spcAft>
+                <a:spcPts val="0"/>
+              </a:spcAft>
+              <a:buClrTx/>
+              <a:buSzTx/>
+              <a:buFontTx/>
+              <a:buNone/>
+              <a:tabLst/>
+              <a:defRPr/>
+            </a:pPr>
+            <a:endParaRPr kumimoji="0" lang="en-US" sz="1200" b="0" i="0" u="none" strike="noStrike" kern="1200" cap="none" spc="0" normalizeH="0" baseline="0" noProof="0">
+              <a:ln>
+                <a:noFill/>
+              </a:ln>
+              <a:solidFill>
+                <a:prstClr val="black"/>
+              </a:solidFill>
+              <a:effectLst/>
+              <a:uLnTx/>
+              <a:uFillTx/>
+              <a:latin typeface="Calibri" panose="020F0502020204030204"/>
+              <a:ea typeface="+mn-ea"/>
+              <a:cs typeface="+mn-cs"/>
+            </a:endParaRPr>
+          </a:p>
+        </p:txBody>
+      </p:sp>
+      <p:pic>
+        <p:nvPicPr>
+          <p:cNvPr id="73" name="Image 3" descr="preencoded.png">
+            <a:extLst>
+              <a:ext uri="{FF2B5EF4-FFF2-40B4-BE49-F238E27FC236}">
+                <a16:creationId xmlns:a16="http://schemas.microsoft.com/office/drawing/2014/main" id="{DBD5F0E6-69A0-5B9F-2BFC-7F089CD81421}"/>
+              </a:ext>
+            </a:extLst>
+          </p:cNvPr>
+          <p:cNvPicPr>
+            <a:picLocks noChangeAspect="1"/>
+          </p:cNvPicPr>
+          <p:nvPr/>
+        </p:nvPicPr>
+        <p:blipFill>
+          <a:blip r:embed="rId4"/>
+          <a:stretch>
+            <a:fillRect/>
+          </a:stretch>
+        </p:blipFill>
+        <p:spPr>
+          <a:xfrm>
+            <a:off x="2444388" y="3348174"/>
+            <a:ext cx="164592" cy="164592"/>
+          </a:xfrm>
+          <a:prstGeom prst="rect">
+            <a:avLst/>
+          </a:prstGeom>
+        </p:spPr>
+      </p:pic>
+      <p:sp>
+        <p:nvSpPr>
+          <p:cNvPr id="74" name="Text 28">
+            <a:extLst>
+              <a:ext uri="{FF2B5EF4-FFF2-40B4-BE49-F238E27FC236}">
+                <a16:creationId xmlns:a16="http://schemas.microsoft.com/office/drawing/2014/main" id="{A336BB3A-957D-0C4E-18B7-2D70F626512A}"/>
+              </a:ext>
+            </a:extLst>
+          </p:cNvPr>
+          <p:cNvSpPr/>
+          <p:nvPr/>
+        </p:nvSpPr>
+        <p:spPr>
+          <a:xfrm>
+            <a:off x="2750712" y="3233874"/>
+            <a:ext cx="1627632" cy="365760"/>
+          </a:xfrm>
+          <a:prstGeom prst="rect">
+            <a:avLst/>
+          </a:prstGeom>
+          <a:noFill/>
+          <a:ln/>
+        </p:spPr>
+        <p:txBody>
+          <a:bodyPr wrap="square" lIns="0" tIns="0" rIns="0" bIns="0" rtlCol="0" anchor="ctr"/>
+          <a:lstStyle/>
+          <a:p>
+            <a:pPr marL="0" marR="0" lvl="0" indent="0" algn="l" defTabSz="914400" rtl="0" eaLnBrk="1" fontAlgn="auto" latinLnBrk="0" hangingPunct="1">
+              <a:lnSpc>
+                <a:spcPct val="100000"/>
+              </a:lnSpc>
+              <a:spcBef>
+                <a:spcPts val="0"/>
+              </a:spcBef>
+              <a:spcAft>
+                <a:spcPts val="0"/>
+              </a:spcAft>
+              <a:buClrTx/>
+              <a:buSzTx/>
+              <a:buFontTx/>
+              <a:buNone/>
+              <a:tabLst/>
+              <a:defRPr/>
+            </a:pPr>
+            <a:r>
+              <a:rPr kumimoji="0" lang="en-US" sz="800" b="1" i="0" u="none" strike="noStrike" kern="1200" cap="none" spc="0" normalizeH="0" baseline="0" noProof="0" dirty="0">
+                <a:ln>
+                  <a:noFill/>
+                </a:ln>
+                <a:solidFill>
+                  <a:srgbClr val="0F172A"/>
+                </a:solidFill>
+                <a:effectLst/>
+                <a:uLnTx/>
+                <a:uFillTx/>
+                <a:latin typeface="Calibri" pitchFamily="34" charset="0"/>
+                <a:ea typeface="Calibri" pitchFamily="34" charset="-122"/>
+                <a:cs typeface="Calibri" pitchFamily="34" charset="-120"/>
+              </a:rPr>
+              <a:t>Vendor &amp; license management</a:t>
+            </a:r>
+            <a:endParaRPr kumimoji="0" lang="en-US" sz="800" b="0" i="0" u="none" strike="noStrike" kern="1200" cap="none" spc="0" normalizeH="0" baseline="0" noProof="0" dirty="0">
+              <a:ln>
+                <a:noFill/>
+              </a:ln>
+              <a:solidFill>
+                <a:prstClr val="black"/>
+              </a:solidFill>
+              <a:effectLst/>
+              <a:uLnTx/>
+              <a:uFillTx/>
+              <a:latin typeface="Calibri" panose="020F0502020204030204"/>
+              <a:ea typeface="+mn-ea"/>
+              <a:cs typeface="+mn-cs"/>
+            </a:endParaRPr>
+          </a:p>
+        </p:txBody>
+      </p:sp>
+      <p:sp>
+        <p:nvSpPr>
+          <p:cNvPr id="75" name="Text 29">
+            <a:extLst>
+              <a:ext uri="{FF2B5EF4-FFF2-40B4-BE49-F238E27FC236}">
+                <a16:creationId xmlns:a16="http://schemas.microsoft.com/office/drawing/2014/main" id="{072B195E-98D7-1BF9-A757-F3EB80022867}"/>
+              </a:ext>
+            </a:extLst>
+          </p:cNvPr>
+          <p:cNvSpPr/>
+          <p:nvPr/>
+        </p:nvSpPr>
+        <p:spPr>
+          <a:xfrm>
+            <a:off x="2366664" y="3727650"/>
+            <a:ext cx="1965960" cy="594360"/>
+          </a:xfrm>
+          <a:prstGeom prst="rect">
+            <a:avLst/>
+          </a:prstGeom>
+          <a:noFill/>
+          <a:ln/>
+        </p:spPr>
+        <p:txBody>
+          <a:bodyPr wrap="square" lIns="0" tIns="0" rIns="0" bIns="0" rtlCol="0" anchor="t"/>
+          <a:lstStyle/>
+          <a:p>
+            <a:pPr marL="0" marR="0" lvl="0" indent="0" algn="l" defTabSz="914400" rtl="0" eaLnBrk="1" fontAlgn="auto" latinLnBrk="0" hangingPunct="1">
+              <a:lnSpc>
+                <a:spcPct val="100000"/>
+              </a:lnSpc>
+              <a:spcBef>
+                <a:spcPts val="0"/>
+              </a:spcBef>
+              <a:spcAft>
+                <a:spcPts val="0"/>
+              </a:spcAft>
+              <a:buClrTx/>
+              <a:buSzTx/>
+              <a:buFontTx/>
+              <a:buNone/>
+              <a:tabLst/>
+              <a:defRPr/>
+            </a:pPr>
+            <a:r>
+              <a:rPr kumimoji="0" lang="en-US" sz="700" b="0" i="0" u="none" strike="noStrike" kern="1200" cap="none" spc="0" normalizeH="0" baseline="0" noProof="0" dirty="0">
+                <a:ln>
+                  <a:noFill/>
+                </a:ln>
+                <a:solidFill>
+                  <a:srgbClr val="64748B"/>
+                </a:solidFill>
+                <a:effectLst/>
+                <a:uLnTx/>
+                <a:uFillTx/>
+                <a:latin typeface="Calibri" pitchFamily="34" charset="0"/>
+                <a:ea typeface="Calibri" pitchFamily="34" charset="-122"/>
+                <a:cs typeface="Calibri" pitchFamily="34" charset="-120"/>
+              </a:rPr>
+              <a:t>Centralized coordination across your stack.</a:t>
+            </a:r>
+            <a:endParaRPr kumimoji="0" lang="en-US" sz="700" b="0" i="0" u="none" strike="noStrike" kern="1200" cap="none" spc="0" normalizeH="0" baseline="0" noProof="0" dirty="0">
+              <a:ln>
+                <a:noFill/>
+              </a:ln>
+              <a:solidFill>
+                <a:prstClr val="black"/>
+              </a:solidFill>
+              <a:effectLst/>
+              <a:uLnTx/>
+              <a:uFillTx/>
+              <a:latin typeface="Calibri" panose="020F0502020204030204"/>
+              <a:ea typeface="+mn-ea"/>
+              <a:cs typeface="+mn-cs"/>
+            </a:endParaRPr>
+          </a:p>
+        </p:txBody>
+      </p:sp>
+      <p:sp>
+        <p:nvSpPr>
+          <p:cNvPr id="76" name="Shape 31">
+            <a:extLst>
+              <a:ext uri="{FF2B5EF4-FFF2-40B4-BE49-F238E27FC236}">
+                <a16:creationId xmlns:a16="http://schemas.microsoft.com/office/drawing/2014/main" id="{5054495B-0214-1C70-BE55-D30BB012CC04}"/>
+              </a:ext>
+            </a:extLst>
+          </p:cNvPr>
+          <p:cNvSpPr/>
+          <p:nvPr/>
+        </p:nvSpPr>
+        <p:spPr>
+          <a:xfrm>
+            <a:off x="413440" y="4063365"/>
+            <a:ext cx="320040" cy="320040"/>
+          </a:xfrm>
+          <a:prstGeom prst="ellipse">
+            <a:avLst/>
+          </a:prstGeom>
+          <a:solidFill>
+            <a:srgbClr val="10B981"/>
+          </a:solidFill>
+          <a:ln/>
+        </p:spPr>
+        <p:txBody>
+          <a:bodyPr/>
+          <a:lstStyle/>
+          <a:p>
+            <a:pPr marL="0" marR="0" lvl="0" indent="0" algn="l" defTabSz="914400" rtl="0" eaLnBrk="1" fontAlgn="auto" latinLnBrk="0" hangingPunct="1">
+              <a:lnSpc>
+                <a:spcPct val="100000"/>
+              </a:lnSpc>
+              <a:spcBef>
+                <a:spcPts val="0"/>
+              </a:spcBef>
+              <a:spcAft>
+                <a:spcPts val="0"/>
+              </a:spcAft>
+              <a:buClrTx/>
+              <a:buSzTx/>
+              <a:buFontTx/>
+              <a:buNone/>
+              <a:tabLst/>
+              <a:defRPr/>
+            </a:pPr>
+            <a:endParaRPr kumimoji="0" lang="en-US" sz="1200" b="0" i="0" u="none" strike="noStrike" kern="1200" cap="none" spc="0" normalizeH="0" baseline="0" noProof="0">
+              <a:ln>
+                <a:noFill/>
+              </a:ln>
+              <a:solidFill>
+                <a:prstClr val="black"/>
+              </a:solidFill>
+              <a:effectLst/>
+              <a:uLnTx/>
+              <a:uFillTx/>
+              <a:latin typeface="Calibri" panose="020F0502020204030204"/>
+              <a:ea typeface="+mn-ea"/>
+              <a:cs typeface="+mn-cs"/>
+            </a:endParaRPr>
+          </a:p>
+        </p:txBody>
+      </p:sp>
+      <p:pic>
+        <p:nvPicPr>
+          <p:cNvPr id="77" name="Image 4" descr="preencoded.png">
+            <a:extLst>
+              <a:ext uri="{FF2B5EF4-FFF2-40B4-BE49-F238E27FC236}">
+                <a16:creationId xmlns:a16="http://schemas.microsoft.com/office/drawing/2014/main" id="{A365881A-C2E4-D63C-028B-D3A59CC4DE6B}"/>
+              </a:ext>
+            </a:extLst>
+          </p:cNvPr>
+          <p:cNvPicPr>
+            <a:picLocks noChangeAspect="1"/>
+          </p:cNvPicPr>
+          <p:nvPr/>
+        </p:nvPicPr>
+        <p:blipFill>
+          <a:blip r:embed="rId4"/>
+          <a:stretch>
+            <a:fillRect/>
+          </a:stretch>
+        </p:blipFill>
+        <p:spPr>
+          <a:xfrm>
+            <a:off x="491164" y="4141089"/>
+            <a:ext cx="164592" cy="164592"/>
+          </a:xfrm>
+          <a:prstGeom prst="rect">
+            <a:avLst/>
+          </a:prstGeom>
+        </p:spPr>
+      </p:pic>
+      <p:sp>
+        <p:nvSpPr>
+          <p:cNvPr id="78" name="Text 32">
+            <a:extLst>
+              <a:ext uri="{FF2B5EF4-FFF2-40B4-BE49-F238E27FC236}">
+                <a16:creationId xmlns:a16="http://schemas.microsoft.com/office/drawing/2014/main" id="{04B30698-FA57-0615-459E-0CED36A8B5BD}"/>
+              </a:ext>
+            </a:extLst>
+          </p:cNvPr>
+          <p:cNvSpPr/>
+          <p:nvPr/>
+        </p:nvSpPr>
+        <p:spPr>
+          <a:xfrm>
+            <a:off x="797488" y="4026789"/>
+            <a:ext cx="1627632" cy="365760"/>
+          </a:xfrm>
+          <a:prstGeom prst="rect">
+            <a:avLst/>
+          </a:prstGeom>
+          <a:noFill/>
+          <a:ln/>
+        </p:spPr>
+        <p:txBody>
+          <a:bodyPr wrap="square" lIns="0" tIns="0" rIns="0" bIns="0" rtlCol="0" anchor="ctr"/>
+          <a:lstStyle/>
+          <a:p>
+            <a:pPr marL="0" marR="0" lvl="0" indent="0" algn="l" defTabSz="914400" rtl="0" eaLnBrk="1" fontAlgn="auto" latinLnBrk="0" hangingPunct="1">
+              <a:lnSpc>
+                <a:spcPct val="100000"/>
+              </a:lnSpc>
+              <a:spcBef>
+                <a:spcPts val="0"/>
+              </a:spcBef>
+              <a:spcAft>
+                <a:spcPts val="0"/>
+              </a:spcAft>
+              <a:buClrTx/>
+              <a:buSzTx/>
+              <a:buFontTx/>
+              <a:buNone/>
+              <a:tabLst/>
+              <a:defRPr/>
+            </a:pPr>
+            <a:r>
+              <a:rPr kumimoji="0" lang="en-US" sz="800" b="1" i="0" u="none" strike="noStrike" kern="1200" cap="none" spc="0" normalizeH="0" baseline="0" noProof="0" dirty="0">
+                <a:ln>
+                  <a:noFill/>
+                </a:ln>
+                <a:solidFill>
+                  <a:srgbClr val="0F172A"/>
+                </a:solidFill>
+                <a:effectLst/>
+                <a:uLnTx/>
+                <a:uFillTx/>
+                <a:latin typeface="Calibri" pitchFamily="34" charset="0"/>
+                <a:ea typeface="Calibri" pitchFamily="34" charset="-122"/>
+                <a:cs typeface="Calibri" pitchFamily="34" charset="-120"/>
+              </a:rPr>
+              <a:t>vCIO services</a:t>
+            </a:r>
+            <a:endParaRPr kumimoji="0" lang="en-US" sz="800" b="0" i="0" u="none" strike="noStrike" kern="1200" cap="none" spc="0" normalizeH="0" baseline="0" noProof="0" dirty="0">
+              <a:ln>
+                <a:noFill/>
+              </a:ln>
+              <a:solidFill>
+                <a:prstClr val="black"/>
+              </a:solidFill>
+              <a:effectLst/>
+              <a:uLnTx/>
+              <a:uFillTx/>
+              <a:latin typeface="Calibri" panose="020F0502020204030204"/>
+              <a:ea typeface="+mn-ea"/>
+              <a:cs typeface="+mn-cs"/>
+            </a:endParaRPr>
+          </a:p>
+        </p:txBody>
+      </p:sp>
+      <p:sp>
+        <p:nvSpPr>
+          <p:cNvPr id="79" name="Text 33">
+            <a:extLst>
+              <a:ext uri="{FF2B5EF4-FFF2-40B4-BE49-F238E27FC236}">
+                <a16:creationId xmlns:a16="http://schemas.microsoft.com/office/drawing/2014/main" id="{F874E584-3E00-B437-F96A-118795319B5E}"/>
+              </a:ext>
+            </a:extLst>
+          </p:cNvPr>
+          <p:cNvSpPr/>
+          <p:nvPr/>
+        </p:nvSpPr>
+        <p:spPr>
+          <a:xfrm>
+            <a:off x="413440" y="4520565"/>
+            <a:ext cx="1965960" cy="594360"/>
+          </a:xfrm>
+          <a:prstGeom prst="rect">
+            <a:avLst/>
+          </a:prstGeom>
+          <a:noFill/>
+          <a:ln/>
+        </p:spPr>
+        <p:txBody>
+          <a:bodyPr wrap="square" lIns="0" tIns="0" rIns="0" bIns="0" rtlCol="0" anchor="t"/>
+          <a:lstStyle/>
+          <a:p>
+            <a:pPr marL="0" marR="0" lvl="0" indent="0" algn="l" defTabSz="914400" rtl="0" eaLnBrk="1" fontAlgn="auto" latinLnBrk="0" hangingPunct="1">
+              <a:lnSpc>
+                <a:spcPct val="100000"/>
+              </a:lnSpc>
+              <a:spcBef>
+                <a:spcPts val="0"/>
+              </a:spcBef>
+              <a:spcAft>
+                <a:spcPts val="0"/>
+              </a:spcAft>
+              <a:buClrTx/>
+              <a:buSzTx/>
+              <a:buFontTx/>
+              <a:buNone/>
+              <a:tabLst/>
+              <a:defRPr/>
+            </a:pPr>
+            <a:r>
+              <a:rPr kumimoji="0" lang="en-US" sz="700" b="0" i="0" u="none" strike="noStrike" kern="1200" cap="none" spc="0" normalizeH="0" baseline="0" noProof="0" dirty="0">
+                <a:ln>
+                  <a:noFill/>
+                </a:ln>
+                <a:solidFill>
+                  <a:srgbClr val="64748B"/>
+                </a:solidFill>
+                <a:effectLst/>
+                <a:uLnTx/>
+                <a:uFillTx/>
+                <a:latin typeface="Calibri" pitchFamily="34" charset="0"/>
+                <a:ea typeface="Calibri" pitchFamily="34" charset="-122"/>
+                <a:cs typeface="Calibri" pitchFamily="34" charset="-120"/>
+              </a:rPr>
+              <a:t>Strategic IT planning aligned to your goals.</a:t>
+            </a:r>
+            <a:endParaRPr kumimoji="0" lang="en-US" sz="700" b="0" i="0" u="none" strike="noStrike" kern="1200" cap="none" spc="0" normalizeH="0" baseline="0" noProof="0" dirty="0">
+              <a:ln>
+                <a:noFill/>
+              </a:ln>
+              <a:solidFill>
+                <a:prstClr val="black"/>
+              </a:solidFill>
+              <a:effectLst/>
+              <a:uLnTx/>
+              <a:uFillTx/>
+              <a:latin typeface="Calibri" panose="020F0502020204030204"/>
+              <a:ea typeface="+mn-ea"/>
+              <a:cs typeface="+mn-cs"/>
+            </a:endParaRPr>
+          </a:p>
+        </p:txBody>
+      </p:sp>
+      <p:grpSp>
+        <p:nvGrpSpPr>
+          <p:cNvPr id="5" name="Group 4">
+            <a:extLst>
+              <a:ext uri="{FF2B5EF4-FFF2-40B4-BE49-F238E27FC236}">
+                <a16:creationId xmlns:a16="http://schemas.microsoft.com/office/drawing/2014/main" id="{827F6156-C171-BFC6-702B-5CF9B1B10A63}"/>
+              </a:ext>
+            </a:extLst>
+          </p:cNvPr>
+          <p:cNvGrpSpPr/>
+          <p:nvPr/>
+        </p:nvGrpSpPr>
+        <p:grpSpPr>
+          <a:xfrm>
+            <a:off x="4160520" y="2646549"/>
+            <a:ext cx="4526280" cy="1279508"/>
+            <a:chOff x="4160520" y="2685735"/>
+            <a:chExt cx="4526280" cy="1279508"/>
+          </a:xfrm>
+        </p:grpSpPr>
+        <p:sp>
+          <p:nvSpPr>
+            <p:cNvPr id="37" name="Shape 34"/>
+            <p:cNvSpPr/>
+            <p:nvPr/>
+          </p:nvSpPr>
+          <p:spPr>
+            <a:xfrm>
+              <a:off x="4160520" y="2685735"/>
+              <a:ext cx="4526280" cy="1279508"/>
+            </a:xfrm>
+            <a:prstGeom prst="rect">
+              <a:avLst/>
+            </a:prstGeom>
+            <a:solidFill>
+              <a:srgbClr val="FFFFFF"/>
+            </a:solidFill>
+            <a:ln w="9525">
+              <a:solidFill>
+                <a:srgbClr val="E2E8F0"/>
+              </a:solidFill>
+              <a:prstDash val="solid"/>
+            </a:ln>
+            <a:effectLst>
+              <a:outerShdw blurRad="127000" dist="38100" dir="5400000" algn="bl" rotWithShape="0">
+                <a:srgbClr val="0F172A">
+                  <a:alpha val="10000"/>
+                </a:srgbClr>
+              </a:outerShdw>
+            </a:effectLst>
+          </p:spPr>
+          <p:txBody>
+            <a:bodyPr/>
+            <a:lstStyle/>
+            <a:p>
+              <a:pPr marL="0" marR="0" lvl="0" indent="0" algn="l" defTabSz="914400" rtl="0" eaLnBrk="1" fontAlgn="auto" latinLnBrk="0" hangingPunct="1">
+                <a:lnSpc>
+                  <a:spcPct val="100000"/>
+                </a:lnSpc>
+                <a:spcBef>
+                  <a:spcPts val="0"/>
+                </a:spcBef>
+                <a:spcAft>
+                  <a:spcPts val="0"/>
+                </a:spcAft>
+                <a:buClrTx/>
+                <a:buSzTx/>
+                <a:buFontTx/>
+                <a:buNone/>
+                <a:tabLst/>
+                <a:defRPr/>
+              </a:pPr>
+              <a:endParaRPr kumimoji="0" lang="en-US" sz="1800" b="0" i="0" u="none" strike="noStrike" kern="1200" cap="none" spc="0" normalizeH="0" baseline="0" noProof="0">
+                <a:ln>
+                  <a:noFill/>
+                </a:ln>
+                <a:solidFill>
+                  <a:prstClr val="black"/>
+                </a:solidFill>
+                <a:effectLst/>
+                <a:uLnTx/>
+                <a:uFillTx/>
+                <a:latin typeface="Calibri" panose="020F0502020204030204"/>
+                <a:ea typeface="+mn-ea"/>
+                <a:cs typeface="+mn-cs"/>
+              </a:endParaRPr>
+            </a:p>
+          </p:txBody>
+        </p:sp>
+        <p:sp>
+          <p:nvSpPr>
+            <p:cNvPr id="30" name="Text 27"/>
+            <p:cNvSpPr/>
+            <p:nvPr/>
+          </p:nvSpPr>
+          <p:spPr>
+            <a:xfrm>
+              <a:off x="4350910" y="3224741"/>
+              <a:ext cx="2377767" cy="616567"/>
+            </a:xfrm>
+            <a:prstGeom prst="rect">
+              <a:avLst/>
+            </a:prstGeom>
+            <a:noFill/>
+            <a:ln/>
+          </p:spPr>
+          <p:txBody>
+            <a:bodyPr wrap="square" lIns="0" tIns="0" rIns="0" bIns="0" rtlCol="0" anchor="ctr"/>
+            <a:lstStyle/>
+            <a:p>
+              <a:pPr marL="0" marR="0" lvl="0" indent="0" algn="l" defTabSz="914400" rtl="0" eaLnBrk="1" fontAlgn="auto" latinLnBrk="0" hangingPunct="1">
+                <a:lnSpc>
+                  <a:spcPct val="100000"/>
+                </a:lnSpc>
+                <a:spcBef>
+                  <a:spcPts val="0"/>
+                </a:spcBef>
+                <a:spcAft>
+                  <a:spcPts val="0"/>
+                </a:spcAft>
+                <a:buClrTx/>
+                <a:buSzTx/>
+                <a:buFontTx/>
+                <a:buNone/>
+                <a:tabLst/>
+                <a:defRPr/>
+              </a:pPr>
+              <a:r>
+                <a:rPr kumimoji="0" lang="en-US" sz="1000" b="0" i="0" u="none" strike="noStrike" kern="1200" cap="none" spc="0" normalizeH="0" baseline="0" noProof="0" dirty="0">
+                  <a:ln>
+                    <a:noFill/>
+                  </a:ln>
+                  <a:solidFill>
+                    <a:srgbClr val="0F172A"/>
+                  </a:solidFill>
+                  <a:effectLst/>
+                  <a:uLnTx/>
+                  <a:uFillTx/>
+                  <a:latin typeface="Calibri" pitchFamily="34" charset="0"/>
+                  <a:ea typeface="Calibri" pitchFamily="34" charset="-122"/>
+                  <a:cs typeface="Calibri" pitchFamily="34" charset="-120"/>
+                </a:rPr>
+                <a:t>Advanced Protection</a:t>
+              </a:r>
+            </a:p>
+            <a:p>
+              <a:pPr marL="0" marR="0" lvl="0" indent="0" algn="l" defTabSz="914400" rtl="0" eaLnBrk="1" fontAlgn="auto" latinLnBrk="0" hangingPunct="1">
+                <a:lnSpc>
+                  <a:spcPct val="100000"/>
+                </a:lnSpc>
+                <a:spcBef>
+                  <a:spcPts val="0"/>
+                </a:spcBef>
+                <a:spcAft>
+                  <a:spcPts val="0"/>
+                </a:spcAft>
+                <a:buClrTx/>
+                <a:buSzTx/>
+                <a:buFontTx/>
+                <a:buNone/>
+                <a:tabLst/>
+                <a:defRPr/>
+              </a:pPr>
+              <a:r>
+                <a:rPr kumimoji="0" lang="en-US" sz="800" b="0" i="0" u="none" strike="noStrike" kern="1200" cap="none" spc="0" normalizeH="0" baseline="0" noProof="0" dirty="0">
+                  <a:ln>
+                    <a:noFill/>
+                  </a:ln>
+                  <a:solidFill>
+                    <a:srgbClr val="0F172A"/>
+                  </a:solidFill>
+                  <a:effectLst/>
+                  <a:uLnTx/>
+                  <a:uFillTx/>
+                  <a:latin typeface="Calibri" pitchFamily="34" charset="0"/>
+                  <a:ea typeface="Calibri" pitchFamily="34" charset="-122"/>
+                  <a:cs typeface="Calibri" pitchFamily="34" charset="-120"/>
+                </a:rPr>
+                <a:t> (Email Security, Phishing, Device Encryption,</a:t>
+              </a:r>
+            </a:p>
+            <a:p>
+              <a:pPr marL="0" marR="0" lvl="0" indent="0" algn="l" defTabSz="914400" rtl="0" eaLnBrk="1" fontAlgn="auto" latinLnBrk="0" hangingPunct="1">
+                <a:lnSpc>
+                  <a:spcPct val="100000"/>
+                </a:lnSpc>
+                <a:spcBef>
+                  <a:spcPts val="0"/>
+                </a:spcBef>
+                <a:spcAft>
+                  <a:spcPts val="0"/>
+                </a:spcAft>
+                <a:buClrTx/>
+                <a:buSzTx/>
+                <a:buFontTx/>
+                <a:buNone/>
+                <a:tabLst/>
+                <a:defRPr/>
+              </a:pPr>
+              <a:r>
+                <a:rPr kumimoji="0" lang="en-US" sz="800" b="0" i="0" u="none" strike="noStrike" kern="1200" cap="none" spc="0" normalizeH="0" baseline="0" noProof="0" dirty="0">
+                  <a:ln>
+                    <a:noFill/>
+                  </a:ln>
+                  <a:solidFill>
+                    <a:srgbClr val="0F172A"/>
+                  </a:solidFill>
+                  <a:effectLst/>
+                  <a:uLnTx/>
+                  <a:uFillTx/>
+                  <a:latin typeface="Calibri" pitchFamily="34" charset="0"/>
+                  <a:ea typeface="Calibri" pitchFamily="34" charset="-122"/>
+                  <a:cs typeface="Calibri" pitchFamily="34" charset="-120"/>
+                </a:rPr>
+                <a:t>End point Protection,  </a:t>
+              </a:r>
+            </a:p>
+            <a:p>
+              <a:pPr marL="0" marR="0" lvl="0" indent="0" algn="l" defTabSz="914400" rtl="0" eaLnBrk="1" fontAlgn="auto" latinLnBrk="0" hangingPunct="1">
+                <a:lnSpc>
+                  <a:spcPct val="100000"/>
+                </a:lnSpc>
+                <a:spcBef>
+                  <a:spcPts val="0"/>
+                </a:spcBef>
+                <a:spcAft>
+                  <a:spcPts val="0"/>
+                </a:spcAft>
+                <a:buClrTx/>
+                <a:buSzTx/>
+                <a:buFontTx/>
+                <a:buNone/>
+                <a:tabLst/>
+                <a:defRPr/>
+              </a:pPr>
+              <a:r>
+                <a:rPr kumimoji="0" lang="en-US" sz="800" b="0" i="0" u="none" strike="noStrike" kern="1200" cap="none" spc="0" normalizeH="0" baseline="0" noProof="0" dirty="0">
+                  <a:ln>
+                    <a:noFill/>
+                  </a:ln>
+                  <a:solidFill>
+                    <a:srgbClr val="0F172A"/>
+                  </a:solidFill>
+                  <a:effectLst/>
+                  <a:uLnTx/>
+                  <a:uFillTx/>
+                  <a:latin typeface="Calibri" pitchFamily="34" charset="0"/>
+                  <a:ea typeface="Calibri" pitchFamily="34" charset="-122"/>
+                  <a:cs typeface="Calibri" pitchFamily="34" charset="-120"/>
+                </a:rPr>
+                <a:t>Managed Detection and Response (MDR) </a:t>
+              </a:r>
+            </a:p>
+            <a:p>
+              <a:pPr marL="0" marR="0" lvl="0" indent="0" algn="l" defTabSz="914400" rtl="0" eaLnBrk="1" fontAlgn="auto" latinLnBrk="0" hangingPunct="1">
+                <a:lnSpc>
+                  <a:spcPct val="100000"/>
+                </a:lnSpc>
+                <a:spcBef>
+                  <a:spcPts val="0"/>
+                </a:spcBef>
+                <a:spcAft>
+                  <a:spcPts val="0"/>
+                </a:spcAft>
+                <a:buClrTx/>
+                <a:buSzTx/>
+                <a:buFontTx/>
+                <a:buNone/>
+                <a:tabLst/>
+                <a:defRPr/>
+              </a:pPr>
+              <a:r>
+                <a:rPr kumimoji="0" lang="en-US" sz="800" b="0" i="0" u="none" strike="noStrike" kern="1200" cap="none" spc="0" normalizeH="0" baseline="0" noProof="0" dirty="0">
+                  <a:ln>
+                    <a:noFill/>
+                  </a:ln>
+                  <a:solidFill>
+                    <a:srgbClr val="0F172A"/>
+                  </a:solidFill>
+                  <a:effectLst/>
+                  <a:uLnTx/>
+                  <a:uFillTx/>
+                  <a:latin typeface="Calibri" pitchFamily="34" charset="0"/>
+                  <a:ea typeface="Calibri" pitchFamily="34" charset="-122"/>
+                  <a:cs typeface="Calibri" pitchFamily="34" charset="-120"/>
+                </a:rPr>
+                <a:t>SOC (Slide 6)</a:t>
+              </a:r>
+            </a:p>
+          </p:txBody>
+        </p:sp>
+        <p:sp>
+          <p:nvSpPr>
+            <p:cNvPr id="32" name="Text 29"/>
+            <p:cNvSpPr/>
+            <p:nvPr/>
+          </p:nvSpPr>
+          <p:spPr>
+            <a:xfrm>
+              <a:off x="8001000" y="3380679"/>
+              <a:ext cx="548640" cy="201168"/>
+            </a:xfrm>
+            <a:prstGeom prst="rect">
+              <a:avLst/>
+            </a:prstGeom>
+            <a:noFill/>
+            <a:ln/>
+          </p:spPr>
+          <p:txBody>
+            <a:bodyPr wrap="square" lIns="0" tIns="0" rIns="0" bIns="0" rtlCol="0" anchor="ctr"/>
+            <a:lstStyle/>
+            <a:p>
+              <a:pPr marL="0" marR="0" lvl="0" indent="0" algn="r" defTabSz="914400" rtl="0" eaLnBrk="1" fontAlgn="auto" latinLnBrk="0" hangingPunct="1">
+                <a:lnSpc>
+                  <a:spcPct val="100000"/>
+                </a:lnSpc>
+                <a:spcBef>
+                  <a:spcPts val="0"/>
+                </a:spcBef>
+                <a:spcAft>
+                  <a:spcPts val="0"/>
+                </a:spcAft>
+                <a:buClrTx/>
+                <a:buSzTx/>
+                <a:buFontTx/>
+                <a:buNone/>
+                <a:tabLst/>
+                <a:defRPr/>
+              </a:pPr>
+              <a:r>
+                <a:rPr kumimoji="0" lang="en-US" sz="1050" b="1" i="0" u="none" strike="noStrike" kern="1200" cap="none" spc="0" normalizeH="0" baseline="0" noProof="0" dirty="0">
+                  <a:ln>
+                    <a:noFill/>
+                  </a:ln>
+                  <a:solidFill>
+                    <a:srgbClr val="0F172A"/>
+                  </a:solidFill>
+                  <a:effectLst/>
+                  <a:uLnTx/>
+                  <a:uFillTx/>
+                  <a:latin typeface="Calibri" pitchFamily="34" charset="0"/>
+                  <a:ea typeface="Calibri" pitchFamily="34" charset="-122"/>
+                  <a:cs typeface="Calibri" pitchFamily="34" charset="-120"/>
+                </a:rPr>
+                <a:t>{{security_total}}</a:t>
+              </a:r>
+              <a:endParaRPr kumimoji="0" lang="en-US" sz="1050" b="0" i="0" u="none" strike="noStrike" kern="1200" cap="none" spc="0" normalizeH="0" baseline="0" noProof="0" dirty="0">
+                <a:ln>
+                  <a:noFill/>
+                </a:ln>
+                <a:solidFill>
+                  <a:prstClr val="black"/>
+                </a:solidFill>
+                <a:effectLst/>
+                <a:uLnTx/>
+                <a:uFillTx/>
+                <a:latin typeface="Calibri" panose="020F0502020204030204"/>
+                <a:ea typeface="+mn-ea"/>
+                <a:cs typeface="+mn-cs"/>
+              </a:endParaRPr>
+            </a:p>
+          </p:txBody>
+        </p:sp>
+        <p:sp>
+          <p:nvSpPr>
+            <p:cNvPr id="35" name="Text 32"/>
+            <p:cNvSpPr/>
+            <p:nvPr/>
+          </p:nvSpPr>
+          <p:spPr>
+            <a:xfrm>
+              <a:off x="6967728" y="3365167"/>
+              <a:ext cx="1143000" cy="201168"/>
+            </a:xfrm>
+            <a:prstGeom prst="rect">
+              <a:avLst/>
+            </a:prstGeom>
+            <a:noFill/>
+            <a:ln/>
+          </p:spPr>
+          <p:txBody>
+            <a:bodyPr wrap="square" lIns="0" tIns="0" rIns="0" bIns="0" rtlCol="0" anchor="ctr"/>
+            <a:lstStyle/>
+            <a:p>
+              <a:pPr marL="0" marR="0" lvl="0" indent="0" algn="l" defTabSz="914400" rtl="0" eaLnBrk="1" fontAlgn="auto" latinLnBrk="0" hangingPunct="1">
+                <a:lnSpc>
+                  <a:spcPct val="100000"/>
+                </a:lnSpc>
+                <a:spcBef>
+                  <a:spcPts val="0"/>
+                </a:spcBef>
+                <a:spcAft>
+                  <a:spcPts val="0"/>
+                </a:spcAft>
+                <a:buClrTx/>
+                <a:buSzTx/>
+                <a:buFontTx/>
+                <a:buNone/>
+                <a:tabLst/>
+                <a:defRPr/>
+              </a:pPr>
+              <a:r>
+                <a:rPr kumimoji="0" lang="en-US" sz="850" b="0" i="1" u="none" strike="noStrike" kern="1200" cap="none" spc="0" normalizeH="0" baseline="0" noProof="0" dirty="0">
+                  <a:ln>
+                    <a:noFill/>
+                  </a:ln>
+                  <a:solidFill>
+                    <a:srgbClr val="64748B"/>
+                  </a:solidFill>
+                  <a:effectLst/>
+                  <a:uLnTx/>
+                  <a:uFillTx/>
+                  <a:latin typeface="Calibri" pitchFamily="34" charset="0"/>
+                  <a:ea typeface="Calibri" pitchFamily="34" charset="-122"/>
+                  <a:cs typeface="Calibri" pitchFamily="34" charset="-120"/>
+                </a:rPr>
+                <a:t>{{security_detail}}</a:t>
+              </a:r>
+              <a:endParaRPr kumimoji="0" lang="en-US" sz="850" b="0" i="0" u="none" strike="noStrike" kern="1200" cap="none" spc="0" normalizeH="0" baseline="0" noProof="0" dirty="0">
+                <a:ln>
+                  <a:noFill/>
+                </a:ln>
+                <a:solidFill>
+                  <a:prstClr val="black"/>
+                </a:solidFill>
+                <a:effectLst/>
+                <a:uLnTx/>
+                <a:uFillTx/>
+                <a:latin typeface="Calibri" panose="020F0502020204030204"/>
+                <a:ea typeface="+mn-ea"/>
+                <a:cs typeface="+mn-cs"/>
+              </a:endParaRPr>
+            </a:p>
+          </p:txBody>
+        </p:sp>
+        <p:sp>
+          <p:nvSpPr>
+            <p:cNvPr id="38" name="Shape 35"/>
+            <p:cNvSpPr/>
+            <p:nvPr/>
+          </p:nvSpPr>
+          <p:spPr>
+            <a:xfrm>
+              <a:off x="4160520" y="2685735"/>
+              <a:ext cx="4526280" cy="438912"/>
+            </a:xfrm>
+            <a:prstGeom prst="rect">
+              <a:avLst/>
+            </a:prstGeom>
+            <a:solidFill>
+              <a:srgbClr val="10B981"/>
+            </a:solidFill>
+            <a:ln/>
+          </p:spPr>
+          <p:txBody>
+            <a:bodyPr/>
+            <a:lstStyle/>
+            <a:p>
+              <a:pPr marL="0" marR="0" lvl="0" indent="0" algn="l" defTabSz="914400" rtl="0" eaLnBrk="1" fontAlgn="auto" latinLnBrk="0" hangingPunct="1">
+                <a:lnSpc>
+                  <a:spcPct val="100000"/>
+                </a:lnSpc>
+                <a:spcBef>
+                  <a:spcPts val="0"/>
+                </a:spcBef>
+                <a:spcAft>
+                  <a:spcPts val="0"/>
+                </a:spcAft>
+                <a:buClrTx/>
+                <a:buSzTx/>
+                <a:buFontTx/>
+                <a:buNone/>
+                <a:tabLst/>
+                <a:defRPr/>
+              </a:pPr>
+              <a:endParaRPr kumimoji="0" lang="en-US" sz="1800" b="0" i="0" u="none" strike="noStrike" kern="1200" cap="none" spc="0" normalizeH="0" baseline="0" noProof="0">
+                <a:ln>
+                  <a:noFill/>
+                </a:ln>
+                <a:solidFill>
+                  <a:prstClr val="black"/>
+                </a:solidFill>
+                <a:effectLst/>
+                <a:uLnTx/>
+                <a:uFillTx/>
+                <a:latin typeface="Calibri" panose="020F0502020204030204"/>
+                <a:ea typeface="+mn-ea"/>
+                <a:cs typeface="+mn-cs"/>
+              </a:endParaRPr>
+            </a:p>
+          </p:txBody>
+        </p:sp>
+        <p:sp>
+          <p:nvSpPr>
+            <p:cNvPr id="39" name="Text 36"/>
+            <p:cNvSpPr/>
+            <p:nvPr/>
+          </p:nvSpPr>
+          <p:spPr>
+            <a:xfrm>
+              <a:off x="4361688" y="2731455"/>
+              <a:ext cx="2697480" cy="164592"/>
+            </a:xfrm>
+            <a:prstGeom prst="rect">
+              <a:avLst/>
+            </a:prstGeom>
+            <a:noFill/>
+            <a:ln/>
+          </p:spPr>
+          <p:txBody>
+            <a:bodyPr wrap="square" lIns="0" tIns="0" rIns="0" bIns="0" rtlCol="0" anchor="ctr"/>
+            <a:lstStyle/>
+            <a:p>
+              <a:pPr marL="0" marR="0" lvl="0" indent="0" algn="l" defTabSz="914400" rtl="0" eaLnBrk="1" fontAlgn="auto" latinLnBrk="0" hangingPunct="1">
+                <a:lnSpc>
+                  <a:spcPct val="100000"/>
+                </a:lnSpc>
+                <a:spcBef>
+                  <a:spcPts val="0"/>
+                </a:spcBef>
+                <a:spcAft>
+                  <a:spcPts val="0"/>
+                </a:spcAft>
+                <a:buClrTx/>
+                <a:buSzTx/>
+                <a:buFontTx/>
+                <a:buNone/>
+                <a:tabLst/>
+                <a:defRPr/>
+              </a:pPr>
+              <a:r>
+                <a:rPr kumimoji="0" lang="en-US" sz="850" b="1" i="0" u="none" strike="noStrike" kern="0" cap="none" spc="300" normalizeH="0" baseline="0" noProof="0" dirty="0">
+                  <a:ln>
+                    <a:noFill/>
+                  </a:ln>
+                  <a:solidFill>
+                    <a:srgbClr val="D1FAE5"/>
+                  </a:solidFill>
+                  <a:effectLst/>
+                  <a:uLnTx/>
+                  <a:uFillTx/>
+                  <a:latin typeface="Calibri" pitchFamily="34" charset="0"/>
+                  <a:ea typeface="Calibri" pitchFamily="34" charset="-122"/>
+                  <a:cs typeface="Calibri" pitchFamily="34" charset="-120"/>
+                </a:rPr>
+                <a:t>PROTECTION</a:t>
+              </a:r>
+              <a:endParaRPr kumimoji="0" lang="en-US" sz="850" b="0" i="0" u="none" strike="noStrike" kern="1200" cap="none" spc="0" normalizeH="0" baseline="0" noProof="0" dirty="0">
+                <a:ln>
+                  <a:noFill/>
+                </a:ln>
+                <a:solidFill>
+                  <a:prstClr val="black"/>
+                </a:solidFill>
+                <a:effectLst/>
+                <a:uLnTx/>
+                <a:uFillTx/>
+                <a:latin typeface="Calibri" panose="020F0502020204030204"/>
+                <a:ea typeface="+mn-ea"/>
+                <a:cs typeface="+mn-cs"/>
+              </a:endParaRPr>
+            </a:p>
+          </p:txBody>
+        </p:sp>
+        <p:sp>
+          <p:nvSpPr>
+            <p:cNvPr id="40" name="Text 37"/>
+            <p:cNvSpPr/>
+            <p:nvPr/>
+          </p:nvSpPr>
+          <p:spPr>
+            <a:xfrm>
+              <a:off x="4361688" y="2886903"/>
+              <a:ext cx="2697480" cy="219456"/>
+            </a:xfrm>
+            <a:prstGeom prst="rect">
+              <a:avLst/>
+            </a:prstGeom>
+            <a:noFill/>
+            <a:ln/>
+          </p:spPr>
+          <p:txBody>
+            <a:bodyPr wrap="square" lIns="0" tIns="0" rIns="0" bIns="0" rtlCol="0" anchor="ctr"/>
+            <a:lstStyle/>
+            <a:p>
+              <a:pPr marL="0" marR="0" lvl="0" indent="0" algn="l" defTabSz="914400" rtl="0" eaLnBrk="1" fontAlgn="auto" latinLnBrk="0" hangingPunct="1">
+                <a:lnSpc>
+                  <a:spcPct val="100000"/>
+                </a:lnSpc>
+                <a:spcBef>
+                  <a:spcPts val="0"/>
+                </a:spcBef>
+                <a:spcAft>
+                  <a:spcPts val="0"/>
+                </a:spcAft>
+                <a:buClrTx/>
+                <a:buSzTx/>
+                <a:buFontTx/>
+                <a:buNone/>
+                <a:tabLst/>
+                <a:defRPr/>
+              </a:pPr>
+              <a:r>
+                <a:rPr kumimoji="0" lang="en-US" sz="1350" b="1" i="0" u="none" strike="noStrike" kern="1200" cap="none" spc="0" normalizeH="0" baseline="0" noProof="0" dirty="0">
+                  <a:ln>
+                    <a:noFill/>
+                  </a:ln>
+                  <a:solidFill>
+                    <a:srgbClr val="FFFFFF"/>
+                  </a:solidFill>
+                  <a:effectLst/>
+                  <a:uLnTx/>
+                  <a:uFillTx/>
+                  <a:latin typeface="Calibri" pitchFamily="34" charset="0"/>
+                  <a:ea typeface="Calibri" pitchFamily="34" charset="-122"/>
+                  <a:cs typeface="Calibri" pitchFamily="34" charset="-120"/>
+                </a:rPr>
+                <a:t>Cybersecurity</a:t>
+              </a:r>
+              <a:endParaRPr kumimoji="0" lang="en-US" sz="1350" b="0" i="0" u="none" strike="noStrike" kern="1200" cap="none" spc="0" normalizeH="0" baseline="0" noProof="0" dirty="0">
+                <a:ln>
+                  <a:noFill/>
+                </a:ln>
+                <a:solidFill>
+                  <a:prstClr val="black"/>
+                </a:solidFill>
+                <a:effectLst/>
+                <a:uLnTx/>
+                <a:uFillTx/>
+                <a:latin typeface="Calibri" panose="020F0502020204030204"/>
+                <a:ea typeface="+mn-ea"/>
+                <a:cs typeface="+mn-cs"/>
+              </a:endParaRPr>
+            </a:p>
+          </p:txBody>
+        </p:sp>
+        <p:sp>
+          <p:nvSpPr>
+            <p:cNvPr id="80" name="Text 22">
+              <a:extLst>
+                <a:ext uri="{FF2B5EF4-FFF2-40B4-BE49-F238E27FC236}">
+                  <a16:creationId xmlns:a16="http://schemas.microsoft.com/office/drawing/2014/main" id="{26DD685A-F5EE-6295-31F0-CEEC08EFABB4}"/>
+                </a:ext>
+              </a:extLst>
+            </p:cNvPr>
+            <p:cNvSpPr/>
+            <p:nvPr/>
+          </p:nvSpPr>
+          <p:spPr>
+            <a:xfrm>
+              <a:off x="7038920" y="2686388"/>
+              <a:ext cx="1463040" cy="438912"/>
+            </a:xfrm>
+            <a:prstGeom prst="rect">
+              <a:avLst/>
+            </a:prstGeom>
+            <a:noFill/>
+            <a:ln/>
+          </p:spPr>
+          <p:txBody>
+            <a:bodyPr wrap="square" lIns="0" tIns="0" rIns="0" bIns="0" rtlCol="0" anchor="ctr"/>
+            <a:lstStyle/>
+            <a:p>
+              <a:pPr marL="0" marR="0" lvl="0" indent="0" algn="r" defTabSz="914400" rtl="0" eaLnBrk="1" fontAlgn="auto" latinLnBrk="0" hangingPunct="1">
+                <a:lnSpc>
+                  <a:spcPct val="100000"/>
+                </a:lnSpc>
+                <a:spcBef>
+                  <a:spcPts val="0"/>
+                </a:spcBef>
+                <a:spcAft>
+                  <a:spcPts val="0"/>
+                </a:spcAft>
+                <a:buClrTx/>
+                <a:buSzTx/>
+                <a:buFontTx/>
+                <a:buNone/>
+                <a:tabLst/>
+                <a:defRPr/>
+              </a:pPr>
+              <a:r>
+                <a:rPr kumimoji="0" lang="en-US" sz="1700" b="1" i="0" u="none" strike="noStrike" kern="1200" cap="none" spc="0" normalizeH="0" baseline="0" noProof="0" dirty="0">
+                  <a:ln>
+                    <a:noFill/>
+                  </a:ln>
+                  <a:solidFill>
+                    <a:srgbClr val="FFFFFF"/>
+                  </a:solidFill>
+                  <a:effectLst/>
+                  <a:uLnTx/>
+                  <a:uFillTx/>
+                  <a:latin typeface="Calibri" pitchFamily="34" charset="0"/>
+                  <a:ea typeface="Calibri" pitchFamily="34" charset="-122"/>
+                  <a:cs typeface="Calibri" pitchFamily="34" charset="-120"/>
+                </a:rPr>
+                <a:t>{{security_monthly}}/mo</a:t>
+              </a:r>
+              <a:endParaRPr kumimoji="0" lang="en-US" sz="1700" b="0" i="0" u="none" strike="noStrike" kern="1200" cap="none" spc="0" normalizeH="0" baseline="0" noProof="0" dirty="0">
+                <a:ln>
+                  <a:noFill/>
+                </a:ln>
+                <a:solidFill>
+                  <a:prstClr val="black"/>
+                </a:solidFill>
+                <a:effectLst/>
+                <a:uLnTx/>
+                <a:uFillTx/>
+                <a:latin typeface="Calibri" panose="020F0502020204030204"/>
+                <a:ea typeface="+mn-ea"/>
+                <a:cs typeface="+mn-cs"/>
+              </a:endParaRPr>
+            </a:p>
+          </p:txBody>
+        </p:sp>
+      </p:grpSp>
+      <p:sp>
+        <p:nvSpPr>
+          <p:cNvPr id="9" name="Shape 18">
+            <a:extLst>
+              <a:ext uri="{FF2B5EF4-FFF2-40B4-BE49-F238E27FC236}">
+                <a16:creationId xmlns:a16="http://schemas.microsoft.com/office/drawing/2014/main" id="{955BA055-A3BF-A298-027E-7D89837EB7B9}"/>
+              </a:ext>
+            </a:extLst>
+          </p:cNvPr>
+          <p:cNvSpPr/>
+          <p:nvPr/>
+        </p:nvSpPr>
+        <p:spPr>
+          <a:xfrm>
+            <a:off x="4160520" y="4013089"/>
+            <a:ext cx="4526280" cy="948841"/>
+          </a:xfrm>
+          <a:prstGeom prst="rect">
+            <a:avLst/>
+          </a:prstGeom>
+          <a:solidFill>
+            <a:srgbClr val="FFFFFF"/>
+          </a:solidFill>
+          <a:ln w="9525">
+            <a:solidFill>
+              <a:srgbClr val="E2E8F0"/>
+            </a:solidFill>
+            <a:prstDash val="solid"/>
+          </a:ln>
+          <a:effectLst>
+            <a:outerShdw blurRad="127000" dist="38100" dir="5400000" algn="bl" rotWithShape="0">
+              <a:srgbClr val="0F172A">
+                <a:alpha val="10000"/>
+              </a:srgbClr>
+            </a:outerShdw>
+          </a:effectLst>
+        </p:spPr>
+        <p:txBody>
+          <a:bodyPr/>
+          <a:lstStyle/>
+          <a:p>
+            <a:pPr marL="0" marR="0" lvl="0" indent="0" algn="l" defTabSz="914400" rtl="0" eaLnBrk="1" fontAlgn="auto" latinLnBrk="0" hangingPunct="1">
+              <a:lnSpc>
+                <a:spcPct val="100000"/>
+              </a:lnSpc>
+              <a:spcBef>
+                <a:spcPts val="0"/>
+              </a:spcBef>
+              <a:spcAft>
+                <a:spcPts val="0"/>
+              </a:spcAft>
+              <a:buClrTx/>
+              <a:buSzTx/>
+              <a:buFontTx/>
+              <a:buNone/>
+              <a:tabLst/>
+              <a:defRPr/>
+            </a:pPr>
+            <a:endParaRPr kumimoji="0" lang="en-US" sz="1800" b="0" i="0" u="none" strike="noStrike" kern="1200" cap="none" spc="0" normalizeH="0" baseline="0" noProof="0" dirty="0">
+              <a:ln>
+                <a:noFill/>
+              </a:ln>
+              <a:solidFill>
+                <a:prstClr val="black"/>
+              </a:solidFill>
+              <a:effectLst/>
+              <a:uLnTx/>
+              <a:uFillTx/>
+              <a:latin typeface="Calibri" panose="020F0502020204030204"/>
+              <a:ea typeface="+mn-ea"/>
+              <a:cs typeface="+mn-cs"/>
+            </a:endParaRPr>
+          </a:p>
+        </p:txBody>
+      </p:sp>
+      <p:sp>
+        <p:nvSpPr>
+          <p:cNvPr id="10" name="Shape 19">
+            <a:extLst>
+              <a:ext uri="{FF2B5EF4-FFF2-40B4-BE49-F238E27FC236}">
+                <a16:creationId xmlns:a16="http://schemas.microsoft.com/office/drawing/2014/main" id="{8D68B6C0-4045-780E-25BF-D44202060E68}"/>
+              </a:ext>
+            </a:extLst>
+          </p:cNvPr>
+          <p:cNvSpPr/>
+          <p:nvPr/>
+        </p:nvSpPr>
+        <p:spPr>
+          <a:xfrm>
+            <a:off x="4160520" y="4013089"/>
+            <a:ext cx="4526280" cy="438912"/>
+          </a:xfrm>
+          <a:prstGeom prst="rect">
+            <a:avLst/>
+          </a:prstGeom>
+          <a:solidFill>
+            <a:srgbClr val="0F5132"/>
+          </a:solidFill>
+          <a:ln/>
+        </p:spPr>
+        <p:txBody>
+          <a:bodyPr/>
+          <a:lstStyle/>
+          <a:p>
+            <a:pPr marL="0" marR="0" lvl="0" indent="0" algn="l" defTabSz="914400" rtl="0" eaLnBrk="1" fontAlgn="auto" latinLnBrk="0" hangingPunct="1">
+              <a:lnSpc>
+                <a:spcPct val="100000"/>
+              </a:lnSpc>
+              <a:spcBef>
+                <a:spcPts val="0"/>
+              </a:spcBef>
+              <a:spcAft>
+                <a:spcPts val="0"/>
+              </a:spcAft>
+              <a:buClrTx/>
+              <a:buSzTx/>
+              <a:buFontTx/>
+              <a:buNone/>
+              <a:tabLst/>
+              <a:defRPr/>
+            </a:pPr>
+            <a:endParaRPr kumimoji="0" lang="en-US" sz="1800" b="0" i="0" u="none" strike="noStrike" kern="1200" cap="none" spc="0" normalizeH="0" baseline="0" noProof="0" dirty="0">
+              <a:ln>
+                <a:noFill/>
+              </a:ln>
+              <a:solidFill>
+                <a:prstClr val="black"/>
+              </a:solidFill>
+              <a:effectLst/>
+              <a:uLnTx/>
+              <a:uFillTx/>
+              <a:latin typeface="Calibri" panose="020F0502020204030204"/>
+              <a:ea typeface="+mn-ea"/>
+              <a:cs typeface="+mn-cs"/>
+            </a:endParaRPr>
+          </a:p>
+        </p:txBody>
+      </p:sp>
+      <p:sp>
+        <p:nvSpPr>
+          <p:cNvPr id="15" name="Text 21">
+            <a:extLst>
+              <a:ext uri="{FF2B5EF4-FFF2-40B4-BE49-F238E27FC236}">
+                <a16:creationId xmlns:a16="http://schemas.microsoft.com/office/drawing/2014/main" id="{BDBF401A-4C05-2BD3-3E64-1D9994168084}"/>
+              </a:ext>
+            </a:extLst>
+          </p:cNvPr>
+          <p:cNvSpPr/>
+          <p:nvPr/>
+        </p:nvSpPr>
+        <p:spPr>
+          <a:xfrm>
+            <a:off x="4361688" y="4214257"/>
+            <a:ext cx="2697480" cy="219456"/>
+          </a:xfrm>
+          <a:prstGeom prst="rect">
+            <a:avLst/>
+          </a:prstGeom>
+          <a:noFill/>
+          <a:ln/>
+        </p:spPr>
+        <p:txBody>
+          <a:bodyPr wrap="square" lIns="0" tIns="0" rIns="0" bIns="0" rtlCol="0" anchor="ctr"/>
+          <a:lstStyle/>
+          <a:p>
+            <a:pPr marL="0" marR="0" lvl="0" indent="0" algn="l" defTabSz="914400" rtl="0" eaLnBrk="1" fontAlgn="auto" latinLnBrk="0" hangingPunct="1">
+              <a:lnSpc>
+                <a:spcPct val="100000"/>
+              </a:lnSpc>
+              <a:spcBef>
+                <a:spcPts val="0"/>
+              </a:spcBef>
+              <a:spcAft>
+                <a:spcPts val="0"/>
+              </a:spcAft>
+              <a:buClrTx/>
+              <a:buSzTx/>
+              <a:buFontTx/>
+              <a:buNone/>
+              <a:tabLst/>
+              <a:defRPr/>
+            </a:pPr>
+            <a:endParaRPr kumimoji="0" lang="en-US" sz="1350" b="0" i="0" u="none" strike="noStrike" kern="1200" cap="none" spc="0" normalizeH="0" baseline="0" noProof="0" dirty="0">
+              <a:ln>
+                <a:noFill/>
+              </a:ln>
+              <a:solidFill>
+                <a:prstClr val="black"/>
+              </a:solidFill>
+              <a:effectLst/>
+              <a:uLnTx/>
+              <a:uFillTx/>
+              <a:latin typeface="Calibri" panose="020F0502020204030204"/>
+              <a:ea typeface="+mn-ea"/>
+              <a:cs typeface="+mn-cs"/>
+            </a:endParaRPr>
+          </a:p>
+        </p:txBody>
+      </p:sp>
+      <p:sp>
+        <p:nvSpPr>
+          <p:cNvPr id="16" name="Text 22">
+            <a:extLst>
+              <a:ext uri="{FF2B5EF4-FFF2-40B4-BE49-F238E27FC236}">
+                <a16:creationId xmlns:a16="http://schemas.microsoft.com/office/drawing/2014/main" id="{82B36D0F-4227-198F-F4A7-6B89EC369265}"/>
+              </a:ext>
+            </a:extLst>
+          </p:cNvPr>
+          <p:cNvSpPr/>
+          <p:nvPr/>
+        </p:nvSpPr>
+        <p:spPr>
+          <a:xfrm>
+            <a:off x="7086600" y="4013089"/>
+            <a:ext cx="1463040" cy="438912"/>
+          </a:xfrm>
+          <a:prstGeom prst="rect">
+            <a:avLst/>
+          </a:prstGeom>
+          <a:noFill/>
+          <a:ln/>
+        </p:spPr>
+        <p:txBody>
+          <a:bodyPr wrap="square" lIns="0" tIns="0" rIns="0" bIns="0" rtlCol="0" anchor="ctr"/>
+          <a:lstStyle/>
+          <a:p>
+            <a:pPr marL="0" marR="0" lvl="0" indent="0" algn="r" defTabSz="914400" rtl="0" eaLnBrk="1" fontAlgn="auto" latinLnBrk="0" hangingPunct="1">
+              <a:lnSpc>
+                <a:spcPct val="100000"/>
+              </a:lnSpc>
+              <a:spcBef>
+                <a:spcPts val="0"/>
+              </a:spcBef>
+              <a:spcAft>
+                <a:spcPts val="0"/>
+              </a:spcAft>
+              <a:buClrTx/>
+              <a:buSzTx/>
+              <a:buFontTx/>
+              <a:buNone/>
+              <a:tabLst/>
+              <a:defRPr/>
+            </a:pPr>
+            <a:r>
+              <a:rPr kumimoji="0" lang="en-US" sz="1700" b="1" i="0" u="none" strike="noStrike" kern="1200" cap="none" spc="0" normalizeH="0" baseline="0" noProof="0" dirty="0">
+                <a:ln>
+                  <a:noFill/>
+                </a:ln>
+                <a:solidFill>
+                  <a:srgbClr val="FFFFFF"/>
+                </a:solidFill>
+                <a:effectLst/>
+                <a:uLnTx/>
+                <a:uFillTx/>
+                <a:latin typeface="Calibri" pitchFamily="34" charset="0"/>
+                <a:ea typeface="Calibri" pitchFamily="34" charset="-122"/>
+                <a:cs typeface="Calibri" pitchFamily="34" charset="-120"/>
+              </a:rPr>
+              <a:t>{{backup_monthly}}/mo</a:t>
+            </a:r>
+            <a:endParaRPr kumimoji="0" lang="en-US" sz="1700" b="0" i="0" u="none" strike="noStrike" kern="1200" cap="none" spc="0" normalizeH="0" baseline="0" noProof="0" dirty="0">
+              <a:ln>
+                <a:noFill/>
+              </a:ln>
+              <a:solidFill>
+                <a:prstClr val="black"/>
+              </a:solidFill>
+              <a:effectLst/>
+              <a:uLnTx/>
+              <a:uFillTx/>
+              <a:latin typeface="Calibri" panose="020F0502020204030204"/>
+              <a:ea typeface="+mn-ea"/>
+              <a:cs typeface="+mn-cs"/>
+            </a:endParaRPr>
+          </a:p>
+        </p:txBody>
+      </p:sp>
+      <p:sp>
+        <p:nvSpPr>
+          <p:cNvPr id="17" name="Text 23">
+            <a:extLst>
+              <a:ext uri="{FF2B5EF4-FFF2-40B4-BE49-F238E27FC236}">
+                <a16:creationId xmlns:a16="http://schemas.microsoft.com/office/drawing/2014/main" id="{182BF8B9-FAA1-AA14-596C-C5A853E05D13}"/>
+              </a:ext>
+            </a:extLst>
+          </p:cNvPr>
+          <p:cNvSpPr/>
+          <p:nvPr/>
+        </p:nvSpPr>
+        <p:spPr>
+          <a:xfrm>
+            <a:off x="4314009" y="4539033"/>
+            <a:ext cx="2606040" cy="201168"/>
+          </a:xfrm>
+          <a:prstGeom prst="rect">
+            <a:avLst/>
+          </a:prstGeom>
+          <a:noFill/>
+          <a:ln/>
+        </p:spPr>
+        <p:txBody>
+          <a:bodyPr wrap="square" lIns="0" tIns="0" rIns="0" bIns="0" rtlCol="0" anchor="ctr"/>
+          <a:lstStyle/>
+          <a:p>
+            <a:pPr marL="0" marR="0" lvl="0" indent="0" algn="l" defTabSz="914400" rtl="0" eaLnBrk="1" fontAlgn="auto" latinLnBrk="0" hangingPunct="1">
+              <a:lnSpc>
+                <a:spcPct val="100000"/>
+              </a:lnSpc>
+              <a:spcBef>
+                <a:spcPts val="0"/>
+              </a:spcBef>
+              <a:spcAft>
+                <a:spcPts val="0"/>
+              </a:spcAft>
+              <a:buClrTx/>
+              <a:buSzTx/>
+              <a:buFontTx/>
+              <a:buNone/>
+              <a:tabLst/>
+              <a:defRPr/>
+            </a:pPr>
+            <a:r>
+              <a:rPr kumimoji="0" lang="en-US" sz="1000" b="0" i="0" u="none" strike="noStrike" kern="1200" cap="none" spc="0" normalizeH="0" baseline="0" noProof="0" dirty="0">
+                <a:ln>
+                  <a:noFill/>
+                </a:ln>
+                <a:solidFill>
+                  <a:srgbClr val="0F172A"/>
+                </a:solidFill>
+                <a:effectLst/>
+                <a:uLnTx/>
+                <a:uFillTx/>
+                <a:latin typeface="Calibri" pitchFamily="34" charset="0"/>
+                <a:ea typeface="Calibri" pitchFamily="34" charset="-122"/>
+                <a:cs typeface="Calibri" pitchFamily="34" charset="-120"/>
+              </a:rPr>
+              <a:t>Cloud to Cloud backup</a:t>
+            </a:r>
+          </a:p>
+          <a:p>
+            <a:pPr marL="0" marR="0" lvl="0" indent="0" algn="l" defTabSz="914400" rtl="0" eaLnBrk="1" fontAlgn="auto" latinLnBrk="0" hangingPunct="1">
+              <a:lnSpc>
+                <a:spcPct val="100000"/>
+              </a:lnSpc>
+              <a:spcBef>
+                <a:spcPts val="0"/>
+              </a:spcBef>
+              <a:spcAft>
+                <a:spcPts val="0"/>
+              </a:spcAft>
+              <a:buClrTx/>
+              <a:buSzTx/>
+              <a:buFontTx/>
+              <a:buNone/>
+              <a:tabLst/>
+              <a:defRPr/>
+            </a:pPr>
+            <a:r>
+              <a:rPr lang="en-US" sz="1000" dirty="0">
+                <a:solidFill>
+                  <a:srgbClr val="0F172A"/>
+                </a:solidFill>
+                <a:latin typeface="Calibri" pitchFamily="34" charset="0"/>
+                <a:ea typeface="Calibri" pitchFamily="34" charset="-122"/>
+                <a:cs typeface="Calibri" pitchFamily="34" charset="-120"/>
+              </a:rPr>
+              <a:t>Annual Term/Monthly Billing</a:t>
+            </a:r>
+          </a:p>
+        </p:txBody>
+      </p:sp>
+      <p:sp>
+        <p:nvSpPr>
+          <p:cNvPr id="19" name="Text 25">
+            <a:extLst>
+              <a:ext uri="{FF2B5EF4-FFF2-40B4-BE49-F238E27FC236}">
+                <a16:creationId xmlns:a16="http://schemas.microsoft.com/office/drawing/2014/main" id="{F21B650A-588C-CDBB-7CBB-FD6D3FF78860}"/>
+              </a:ext>
+            </a:extLst>
+          </p:cNvPr>
+          <p:cNvSpPr/>
+          <p:nvPr/>
+        </p:nvSpPr>
+        <p:spPr>
+          <a:xfrm>
+            <a:off x="8001000" y="4525153"/>
+            <a:ext cx="548640" cy="201168"/>
+          </a:xfrm>
+          <a:prstGeom prst="rect">
+            <a:avLst/>
+          </a:prstGeom>
+          <a:noFill/>
+          <a:ln/>
+        </p:spPr>
+        <p:txBody>
+          <a:bodyPr wrap="square" lIns="0" tIns="0" rIns="0" bIns="0" rtlCol="0" anchor="ctr"/>
+          <a:lstStyle/>
+          <a:p>
+            <a:pPr marL="0" marR="0" lvl="0" indent="0" algn="r" defTabSz="914400" rtl="0" eaLnBrk="1" fontAlgn="auto" latinLnBrk="0" hangingPunct="1">
+              <a:lnSpc>
+                <a:spcPct val="100000"/>
+              </a:lnSpc>
+              <a:spcBef>
+                <a:spcPts val="0"/>
+              </a:spcBef>
+              <a:spcAft>
+                <a:spcPts val="0"/>
+              </a:spcAft>
+              <a:buClrTx/>
+              <a:buSzTx/>
+              <a:buFontTx/>
+              <a:buNone/>
+              <a:tabLst/>
+              <a:defRPr/>
+            </a:pPr>
+            <a:r>
+              <a:rPr kumimoji="0" lang="en-US" sz="1050" b="1" i="0" u="none" strike="noStrike" kern="1200" cap="none" spc="0" normalizeH="0" baseline="0" noProof="0" dirty="0">
+                <a:ln>
+                  <a:noFill/>
+                </a:ln>
+                <a:solidFill>
+                  <a:srgbClr val="0F172A"/>
+                </a:solidFill>
+                <a:effectLst/>
+                <a:uLnTx/>
+                <a:uFillTx/>
+                <a:latin typeface="Calibri" pitchFamily="34" charset="0"/>
+                <a:ea typeface="Calibri" pitchFamily="34" charset="-122"/>
+                <a:cs typeface="Calibri" pitchFamily="34" charset="-120"/>
+              </a:rPr>
+              <a:t>{{backup_total}}</a:t>
+            </a:r>
+            <a:endParaRPr kumimoji="0" lang="en-US" sz="1050" b="0" i="0" u="none" strike="noStrike" kern="1200" cap="none" spc="0" normalizeH="0" baseline="0" noProof="0" dirty="0">
+              <a:ln>
+                <a:noFill/>
+              </a:ln>
+              <a:solidFill>
+                <a:prstClr val="black"/>
+              </a:solidFill>
+              <a:effectLst/>
+              <a:uLnTx/>
+              <a:uFillTx/>
+              <a:latin typeface="Calibri" panose="020F0502020204030204"/>
+              <a:ea typeface="+mn-ea"/>
+              <a:cs typeface="+mn-cs"/>
+            </a:endParaRPr>
+          </a:p>
+        </p:txBody>
+      </p:sp>
+      <p:sp>
+        <p:nvSpPr>
+          <p:cNvPr id="6" name="Text 32">
+            <a:extLst>
+              <a:ext uri="{FF2B5EF4-FFF2-40B4-BE49-F238E27FC236}">
+                <a16:creationId xmlns:a16="http://schemas.microsoft.com/office/drawing/2014/main" id="{28AE0A89-2FC6-746F-CD91-DA61FDC6826F}"/>
+              </a:ext>
+            </a:extLst>
+          </p:cNvPr>
+          <p:cNvSpPr/>
+          <p:nvPr/>
+        </p:nvSpPr>
+        <p:spPr>
+          <a:xfrm>
+            <a:off x="6967728" y="4562702"/>
+            <a:ext cx="1143000" cy="201168"/>
+          </a:xfrm>
+          <a:prstGeom prst="rect">
+            <a:avLst/>
+          </a:prstGeom>
+          <a:noFill/>
+          <a:ln/>
+        </p:spPr>
+        <p:txBody>
+          <a:bodyPr wrap="square" lIns="0" tIns="0" rIns="0" bIns="0" rtlCol="0" anchor="ctr"/>
+          <a:lstStyle/>
+          <a:p>
+            <a:pPr marL="0" marR="0" lvl="0" indent="0" algn="l" defTabSz="914400" rtl="0" eaLnBrk="1" fontAlgn="auto" latinLnBrk="0" hangingPunct="1">
+              <a:lnSpc>
+                <a:spcPct val="100000"/>
+              </a:lnSpc>
+              <a:spcBef>
+                <a:spcPts val="0"/>
+              </a:spcBef>
+              <a:spcAft>
+                <a:spcPts val="0"/>
+              </a:spcAft>
+              <a:buClrTx/>
+              <a:buSzTx/>
+              <a:buFontTx/>
+              <a:buNone/>
+              <a:tabLst/>
+              <a:defRPr/>
+            </a:pPr>
+            <a:r>
+              <a:rPr kumimoji="0" lang="en-US" sz="850" b="0" i="1" u="none" strike="noStrike" kern="1200" cap="none" spc="0" normalizeH="0" baseline="0" noProof="0" dirty="0">
+                <a:ln>
+                  <a:noFill/>
+                </a:ln>
+                <a:solidFill>
+                  <a:srgbClr val="64748B"/>
+                </a:solidFill>
+                <a:effectLst/>
+                <a:uLnTx/>
+                <a:uFillTx/>
+                <a:latin typeface="Calibri" pitchFamily="34" charset="0"/>
+                <a:ea typeface="Calibri" pitchFamily="34" charset="-122"/>
+                <a:cs typeface="Calibri" pitchFamily="34" charset="-120"/>
+              </a:rPr>
+              <a:t>{{backup_detail}}</a:t>
+            </a:r>
+          </a:p>
+        </p:txBody>
+      </p:sp>
+      <p:sp>
+        <p:nvSpPr>
+          <p:cNvPr id="13" name="TextBox 12">
+            <a:extLst>
+              <a:ext uri="{FF2B5EF4-FFF2-40B4-BE49-F238E27FC236}">
+                <a16:creationId xmlns:a16="http://schemas.microsoft.com/office/drawing/2014/main" id="{6F11A1A8-729B-0636-AC5A-20BD8BD7E280}"/>
+              </a:ext>
+            </a:extLst>
+          </p:cNvPr>
+          <p:cNvSpPr txBox="1"/>
+          <p:nvPr/>
+        </p:nvSpPr>
+        <p:spPr>
+          <a:xfrm>
+            <a:off x="6098339" y="4726321"/>
+            <a:ext cx="2225289" cy="230832"/>
+          </a:xfrm>
+          <a:prstGeom prst="rect">
+            <a:avLst/>
+          </a:prstGeom>
+          <a:noFill/>
+        </p:spPr>
+        <p:txBody>
+          <a:bodyPr wrap="none" rtlCol="0">
+            <a:spAutoFit/>
+          </a:bodyPr>
+          <a:lstStyle/>
+          <a:p>
+            <a:r>
+              <a:rPr lang="en-US" sz="900" i="1" dirty="0"/>
+              <a:t>Additional licenses will be added as needed</a:t>
+            </a:r>
+          </a:p>
+        </p:txBody>
+      </p:sp>
+      <p:sp>
+        <p:nvSpPr>
+          <p:cNvPr id="31" name="Text 36">
+            <a:extLst>
+              <a:ext uri="{FF2B5EF4-FFF2-40B4-BE49-F238E27FC236}">
+                <a16:creationId xmlns:a16="http://schemas.microsoft.com/office/drawing/2014/main" id="{9530135A-C6C2-7F85-A20A-13E56D3DBEE2}"/>
+              </a:ext>
+            </a:extLst>
+          </p:cNvPr>
+          <p:cNvSpPr/>
+          <p:nvPr/>
+        </p:nvSpPr>
+        <p:spPr>
+          <a:xfrm>
+            <a:off x="4332624" y="4009356"/>
+            <a:ext cx="2697480" cy="164592"/>
+          </a:xfrm>
+          <a:prstGeom prst="rect">
+            <a:avLst/>
+          </a:prstGeom>
+          <a:noFill/>
+          <a:ln/>
+        </p:spPr>
+        <p:txBody>
+          <a:bodyPr wrap="square" lIns="0" tIns="0" rIns="0" bIns="0" rtlCol="0" anchor="ctr"/>
+          <a:lstStyle/>
+          <a:p>
+            <a:pPr marL="0" marR="0" lvl="0" indent="0" algn="l" defTabSz="914400" rtl="0" eaLnBrk="1" fontAlgn="auto" latinLnBrk="0" hangingPunct="1">
+              <a:lnSpc>
+                <a:spcPct val="100000"/>
+              </a:lnSpc>
+              <a:spcBef>
+                <a:spcPts val="0"/>
+              </a:spcBef>
+              <a:spcAft>
+                <a:spcPts val="0"/>
+              </a:spcAft>
+              <a:buClrTx/>
+              <a:buSzTx/>
+              <a:buFontTx/>
+              <a:buNone/>
+              <a:tabLst/>
+              <a:defRPr/>
+            </a:pPr>
+            <a:r>
+              <a:rPr kumimoji="0" lang="en-US" sz="850" b="1" i="0" u="none" strike="noStrike" kern="0" cap="none" spc="300" normalizeH="0" baseline="0" noProof="0" dirty="0">
+                <a:ln>
+                  <a:noFill/>
+                </a:ln>
+                <a:solidFill>
+                  <a:srgbClr val="D1FAE5"/>
+                </a:solidFill>
+                <a:effectLst/>
+                <a:uLnTx/>
+                <a:uFillTx/>
+                <a:latin typeface="Calibri" pitchFamily="34" charset="0"/>
+                <a:ea typeface="Calibri" pitchFamily="34" charset="-122"/>
+                <a:cs typeface="Calibri" pitchFamily="34" charset="-120"/>
+              </a:rPr>
+              <a:t>{{backup_label}}</a:t>
+            </a:r>
+            <a:endParaRPr kumimoji="0" lang="en-US" sz="850" b="0" i="0" u="none" strike="noStrike" kern="1200" cap="none" spc="0" normalizeH="0" baseline="0" noProof="0" dirty="0">
+              <a:ln>
+                <a:noFill/>
+              </a:ln>
+              <a:solidFill>
+                <a:prstClr val="black"/>
+              </a:solidFill>
+              <a:effectLst/>
+              <a:uLnTx/>
+              <a:uFillTx/>
+              <a:latin typeface="Calibri" panose="020F0502020204030204"/>
+              <a:ea typeface="+mn-ea"/>
+              <a:cs typeface="+mn-cs"/>
+            </a:endParaRPr>
+          </a:p>
+        </p:txBody>
+      </p:sp>
+      <p:sp>
+        <p:nvSpPr>
+          <p:cNvPr id="36" name="Text 37">
+            <a:extLst>
+              <a:ext uri="{FF2B5EF4-FFF2-40B4-BE49-F238E27FC236}">
+                <a16:creationId xmlns:a16="http://schemas.microsoft.com/office/drawing/2014/main" id="{EB4FE2F8-3C60-81F3-BEA6-A576BC0D6583}"/>
+              </a:ext>
+            </a:extLst>
+          </p:cNvPr>
+          <p:cNvSpPr/>
+          <p:nvPr/>
+        </p:nvSpPr>
+        <p:spPr>
+          <a:xfrm>
+            <a:off x="4332624" y="4164804"/>
+            <a:ext cx="2697480" cy="219456"/>
+          </a:xfrm>
+          <a:prstGeom prst="rect">
+            <a:avLst/>
+          </a:prstGeom>
+          <a:noFill/>
+          <a:ln/>
+        </p:spPr>
+        <p:txBody>
+          <a:bodyPr wrap="square" lIns="0" tIns="0" rIns="0" bIns="0" rtlCol="0" anchor="ctr"/>
+          <a:lstStyle/>
+          <a:p>
+            <a:pPr marL="0" marR="0" lvl="0" indent="0" algn="l" defTabSz="914400" rtl="0" eaLnBrk="1" fontAlgn="auto" latinLnBrk="0" hangingPunct="1">
+              <a:lnSpc>
+                <a:spcPct val="100000"/>
+              </a:lnSpc>
+              <a:spcBef>
+                <a:spcPts val="0"/>
+              </a:spcBef>
+              <a:spcAft>
+                <a:spcPts val="0"/>
+              </a:spcAft>
+              <a:buClrTx/>
+              <a:buSzTx/>
+              <a:buFontTx/>
+              <a:buNone/>
+              <a:tabLst/>
+              <a:defRPr/>
+            </a:pPr>
+            <a:r>
+              <a:rPr kumimoji="0" lang="en-US" sz="1350" b="1" i="0" u="none" strike="noStrike" kern="1200" cap="none" spc="0" normalizeH="0" baseline="0" noProof="0" dirty="0">
+                <a:ln>
+                  <a:noFill/>
+                </a:ln>
+                <a:solidFill>
+                  <a:srgbClr val="FFFFFF"/>
+                </a:solidFill>
+                <a:effectLst/>
+                <a:uLnTx/>
+                <a:uFillTx/>
+                <a:latin typeface="Calibri" pitchFamily="34" charset="0"/>
+                <a:ea typeface="Calibri" pitchFamily="34" charset="-122"/>
+                <a:cs typeface="Calibri" pitchFamily="34" charset="-120"/>
+              </a:rPr>
+              <a:t>Backup</a:t>
+            </a:r>
+            <a:endParaRPr kumimoji="0" lang="en-US" sz="1350" b="0" i="0" u="none" strike="noStrike" kern="1200" cap="none" spc="0" normalizeH="0" baseline="0" noProof="0" dirty="0">
+              <a:ln>
+                <a:noFill/>
+              </a:ln>
+              <a:solidFill>
+                <a:prstClr val="black"/>
+              </a:solidFill>
+              <a:effectLst/>
+              <a:uLnTx/>
+              <a:uFillTx/>
+              <a:latin typeface="Calibri" panose="020F0502020204030204"/>
+              <a:ea typeface="+mn-ea"/>
+              <a:cs typeface="+mn-cs"/>
+            </a:endParaRPr>
+          </a:p>
+        </p:txBody>
+      </p:sp>
+    </p:spTree>
+  </p:cSld>
+  <p:clrMapOvr>
+    <a:masterClrMapping/>
+  </p:clrMapOvr>
+</p:sld>
+</file>
+
+<file path=ppt/slides/slide13.xml><?xml version="1.0" encoding="utf-8"?>
+<p:sld xmlns:a="http://schemas.openxmlformats.org/drawingml/2006/main" xmlns:r="http://schemas.openxmlformats.org/officeDocument/2006/relationships" xmlns:p="http://schemas.openxmlformats.org/presentationml/2006/main">
+  <p:cSld>
+    <p:bg>
+      <p:bgPr>
+        <a:solidFill>
+          <a:srgbClr val="F8FAFC"/>
+        </a:solidFill>
+        <a:effectLst/>
+      </p:bgPr>
+    </p:bg>
+    <p:spTree>
+      <p:nvGrpSpPr>
+        <p:cNvPr id="1" name=""/>
+        <p:cNvGrpSpPr/>
+        <p:nvPr/>
+      </p:nvGrpSpPr>
+      <p:grpSpPr>
+        <a:xfrm>
+          <a:off x="0" y="0"/>
+          <a:ext cx="0" cy="0"/>
+          <a:chOff x="0" y="0"/>
+          <a:chExt cx="0" cy="0"/>
+        </a:xfrm>
+      </p:grpSpPr>
+      <p:pic>
+        <p:nvPicPr>
+          <p:cNvPr id="2" name="Image 0" descr="/home/claude/logo_clean.png"/>
+          <p:cNvPicPr>
+            <a:picLocks noChangeAspect="1"/>
+          </p:cNvPicPr>
+          <p:nvPr/>
+        </p:nvPicPr>
+        <p:blipFill>
+          <a:blip r:embed="rId3"/>
+          <a:stretch>
+            <a:fillRect/>
+          </a:stretch>
+        </p:blipFill>
+        <p:spPr>
+          <a:xfrm>
+            <a:off x="7498080" y="201168"/>
+            <a:ext cx="1234440" cy="330064"/>
+          </a:xfrm>
+          <a:prstGeom prst="rect">
+            <a:avLst/>
+          </a:prstGeom>
+        </p:spPr>
+      </p:pic>
+      <p:sp>
+        <p:nvSpPr>
+          <p:cNvPr id="3" name="Text 0"/>
+          <p:cNvSpPr/>
+          <p:nvPr/>
+        </p:nvSpPr>
+        <p:spPr>
+          <a:xfrm>
+            <a:off x="457200" y="292608"/>
+            <a:ext cx="5486400" cy="274320"/>
+          </a:xfrm>
+          <a:prstGeom prst="rect">
+            <a:avLst/>
+          </a:prstGeom>
+          <a:noFill/>
+          <a:ln/>
+        </p:spPr>
+        <p:txBody>
+          <a:bodyPr wrap="square" lIns="0" tIns="0" rIns="0" bIns="0" rtlCol="0" anchor="ctr"/>
+          <a:lstStyle/>
+          <a:p>
+            <a:pPr marL="0" marR="0" lvl="0" indent="0" algn="l" defTabSz="914400" rtl="0" eaLnBrk="1" fontAlgn="auto" latinLnBrk="0" hangingPunct="1">
+              <a:lnSpc>
+                <a:spcPct val="100000"/>
+              </a:lnSpc>
+              <a:spcBef>
+                <a:spcPts val="0"/>
+              </a:spcBef>
+              <a:spcAft>
+                <a:spcPts val="0"/>
+              </a:spcAft>
+              <a:buClrTx/>
+              <a:buSzTx/>
+              <a:buFontTx/>
+              <a:buNone/>
+              <a:tabLst/>
+              <a:defRPr/>
+            </a:pPr>
+            <a:r>
+              <a:rPr kumimoji="0" lang="en-US" sz="1050" b="1" i="0" u="none" strike="noStrike" kern="0" cap="none" spc="400" normalizeH="0" baseline="0" noProof="0" dirty="0">
+                <a:ln>
+                  <a:noFill/>
+                </a:ln>
+                <a:solidFill>
+                  <a:srgbClr val="10B981"/>
+                </a:solidFill>
+                <a:effectLst/>
+                <a:uLnTx/>
+                <a:uFillTx/>
+                <a:latin typeface="Calibri" pitchFamily="34" charset="0"/>
+                <a:ea typeface="Calibri" pitchFamily="34" charset="-122"/>
+                <a:cs typeface="Calibri" pitchFamily="34" charset="-120"/>
+              </a:rPr>
+              <a:t>HOURLY &amp; ONE-TIME</a:t>
+            </a:r>
+            <a:endParaRPr kumimoji="0" lang="en-US" sz="1050" b="0" i="0" u="none" strike="noStrike" kern="1200" cap="none" spc="0" normalizeH="0" baseline="0" noProof="0" dirty="0">
+              <a:ln>
+                <a:noFill/>
+              </a:ln>
+              <a:solidFill>
+                <a:prstClr val="black"/>
+              </a:solidFill>
+              <a:effectLst/>
+              <a:uLnTx/>
+              <a:uFillTx/>
+              <a:latin typeface="Calibri" panose="020F0502020204030204"/>
+              <a:ea typeface="+mn-ea"/>
+              <a:cs typeface="+mn-cs"/>
+            </a:endParaRPr>
+          </a:p>
+        </p:txBody>
+      </p:sp>
+      <p:sp>
+        <p:nvSpPr>
+          <p:cNvPr id="4" name="Text 1"/>
+          <p:cNvSpPr/>
+          <p:nvPr/>
+        </p:nvSpPr>
+        <p:spPr>
+          <a:xfrm>
+            <a:off x="457200" y="566928"/>
+            <a:ext cx="7132320" cy="594360"/>
+          </a:xfrm>
+          <a:prstGeom prst="rect">
+            <a:avLst/>
+          </a:prstGeom>
+          <a:noFill/>
+          <a:ln/>
+        </p:spPr>
+        <p:txBody>
+          <a:bodyPr wrap="square" lIns="0" tIns="0" rIns="0" bIns="0" rtlCol="0" anchor="ctr"/>
+          <a:lstStyle/>
+          <a:p>
+            <a:pPr marL="0" marR="0" lvl="0" indent="0" algn="l" defTabSz="914400" rtl="0" eaLnBrk="1" fontAlgn="auto" latinLnBrk="0" hangingPunct="1">
+              <a:lnSpc>
+                <a:spcPct val="100000"/>
+              </a:lnSpc>
+              <a:spcBef>
+                <a:spcPts val="0"/>
+              </a:spcBef>
+              <a:spcAft>
+                <a:spcPts val="0"/>
+              </a:spcAft>
+              <a:buClrTx/>
+              <a:buSzTx/>
+              <a:buFontTx/>
+              <a:buNone/>
+              <a:tabLst/>
+              <a:defRPr/>
+            </a:pPr>
+            <a:r>
+              <a:rPr kumimoji="0" lang="en-US" sz="2600" b="1" i="0" u="none" strike="noStrike" kern="1200" cap="none" spc="0" normalizeH="0" baseline="0" noProof="0" dirty="0">
+                <a:ln>
+                  <a:noFill/>
+                </a:ln>
+                <a:solidFill>
+                  <a:srgbClr val="0F172A"/>
+                </a:solidFill>
+                <a:effectLst/>
+                <a:uLnTx/>
+                <a:uFillTx/>
+                <a:latin typeface="Calibri" pitchFamily="34" charset="0"/>
+                <a:ea typeface="Calibri" pitchFamily="34" charset="-122"/>
+                <a:cs typeface="Calibri" pitchFamily="34" charset="-120"/>
+              </a:rPr>
+              <a:t>Additional Service Rates – Special Projects/Onsite</a:t>
+            </a:r>
+            <a:endParaRPr kumimoji="0" lang="en-US" sz="2600" b="0" i="0" u="none" strike="noStrike" kern="1200" cap="none" spc="0" normalizeH="0" baseline="0" noProof="0" dirty="0">
+              <a:ln>
+                <a:noFill/>
+              </a:ln>
+              <a:solidFill>
+                <a:prstClr val="black"/>
+              </a:solidFill>
+              <a:effectLst/>
+              <a:uLnTx/>
+              <a:uFillTx/>
+              <a:latin typeface="Calibri" panose="020F0502020204030204"/>
+              <a:ea typeface="+mn-ea"/>
+              <a:cs typeface="+mn-cs"/>
+            </a:endParaRPr>
+          </a:p>
+        </p:txBody>
+      </p:sp>
+      <p:sp>
+        <p:nvSpPr>
+          <p:cNvPr id="5" name="Shape 2"/>
+          <p:cNvSpPr/>
+          <p:nvPr/>
+        </p:nvSpPr>
+        <p:spPr>
+          <a:xfrm>
+            <a:off x="457200" y="1280160"/>
+            <a:ext cx="2697480" cy="1417320"/>
+          </a:xfrm>
+          <a:prstGeom prst="rect">
+            <a:avLst/>
+          </a:prstGeom>
+          <a:solidFill>
+            <a:srgbClr val="0F5132"/>
+          </a:solidFill>
+          <a:ln/>
+          <a:effectLst>
+            <a:outerShdw blurRad="127000" dist="38100" dir="5400000" algn="bl" rotWithShape="0">
+              <a:srgbClr val="0F172A">
+                <a:alpha val="10000"/>
+              </a:srgbClr>
+            </a:outerShdw>
+          </a:effectLst>
+        </p:spPr>
+        <p:txBody>
+          <a:bodyPr/>
+          <a:lstStyle/>
+          <a:p>
+            <a:pPr marL="0" marR="0" lvl="0" indent="0" algn="l" defTabSz="914400" rtl="0" eaLnBrk="1" fontAlgn="auto" latinLnBrk="0" hangingPunct="1">
+              <a:lnSpc>
+                <a:spcPct val="100000"/>
+              </a:lnSpc>
+              <a:spcBef>
+                <a:spcPts val="0"/>
+              </a:spcBef>
+              <a:spcAft>
+                <a:spcPts val="0"/>
+              </a:spcAft>
+              <a:buClrTx/>
+              <a:buSzTx/>
+              <a:buFontTx/>
+              <a:buNone/>
+              <a:tabLst/>
+              <a:defRPr/>
+            </a:pPr>
+            <a:endParaRPr kumimoji="0" lang="en-US" sz="1800" b="0" i="0" u="none" strike="noStrike" kern="1200" cap="none" spc="0" normalizeH="0" baseline="0" noProof="0">
+              <a:ln>
+                <a:noFill/>
+              </a:ln>
+              <a:solidFill>
+                <a:prstClr val="black"/>
+              </a:solidFill>
+              <a:effectLst/>
+              <a:uLnTx/>
+              <a:uFillTx/>
+              <a:latin typeface="Calibri" panose="020F0502020204030204"/>
+              <a:ea typeface="+mn-ea"/>
+              <a:cs typeface="+mn-cs"/>
+            </a:endParaRPr>
+          </a:p>
+        </p:txBody>
+      </p:sp>
+      <p:sp>
+        <p:nvSpPr>
+          <p:cNvPr id="6" name="Text 3"/>
+          <p:cNvSpPr/>
+          <p:nvPr/>
+        </p:nvSpPr>
+        <p:spPr>
+          <a:xfrm>
+            <a:off x="640080" y="1417320"/>
+            <a:ext cx="2331720" cy="274320"/>
+          </a:xfrm>
+          <a:prstGeom prst="rect">
+            <a:avLst/>
+          </a:prstGeom>
+          <a:noFill/>
+          <a:ln/>
+        </p:spPr>
+        <p:txBody>
+          <a:bodyPr wrap="square" lIns="0" tIns="0" rIns="0" bIns="0" rtlCol="0" anchor="ctr"/>
+          <a:lstStyle/>
+          <a:p>
+            <a:pPr marL="0" marR="0" lvl="0" indent="0" algn="l" defTabSz="914400" rtl="0" eaLnBrk="1" fontAlgn="auto" latinLnBrk="0" hangingPunct="1">
+              <a:lnSpc>
+                <a:spcPct val="100000"/>
+              </a:lnSpc>
+              <a:spcBef>
+                <a:spcPts val="0"/>
+              </a:spcBef>
+              <a:spcAft>
+                <a:spcPts val="0"/>
+              </a:spcAft>
+              <a:buClrTx/>
+              <a:buSzTx/>
+              <a:buFontTx/>
+              <a:buNone/>
+              <a:tabLst/>
+              <a:defRPr/>
+            </a:pPr>
+            <a:r>
+              <a:rPr kumimoji="0" lang="en-US" sz="1000" b="1" i="0" u="none" strike="noStrike" kern="0" cap="none" spc="300" normalizeH="0" baseline="0" noProof="0" dirty="0">
+                <a:ln>
+                  <a:noFill/>
+                </a:ln>
+                <a:solidFill>
+                  <a:srgbClr val="10B981"/>
+                </a:solidFill>
+                <a:effectLst/>
+                <a:uLnTx/>
+                <a:uFillTx/>
+                <a:latin typeface="Calibri" pitchFamily="34" charset="0"/>
+                <a:ea typeface="Calibri" pitchFamily="34" charset="-122"/>
+                <a:cs typeface="Calibri" pitchFamily="34" charset="-120"/>
+              </a:rPr>
+              <a:t>BUSINESS HOURS</a:t>
+            </a:r>
+            <a:endParaRPr kumimoji="0" lang="en-US" sz="1000" b="0" i="0" u="none" strike="noStrike" kern="1200" cap="none" spc="0" normalizeH="0" baseline="0" noProof="0" dirty="0">
+              <a:ln>
+                <a:noFill/>
+              </a:ln>
+              <a:solidFill>
+                <a:prstClr val="black"/>
+              </a:solidFill>
+              <a:effectLst/>
+              <a:uLnTx/>
+              <a:uFillTx/>
+              <a:latin typeface="Calibri" panose="020F0502020204030204"/>
+              <a:ea typeface="+mn-ea"/>
+              <a:cs typeface="+mn-cs"/>
+            </a:endParaRPr>
+          </a:p>
+        </p:txBody>
+      </p:sp>
+      <p:sp>
+        <p:nvSpPr>
+          <p:cNvPr id="7" name="Text 4"/>
+          <p:cNvSpPr/>
+          <p:nvPr/>
+        </p:nvSpPr>
+        <p:spPr>
+          <a:xfrm>
+            <a:off x="640080" y="1664208"/>
+            <a:ext cx="2331720" cy="594360"/>
+          </a:xfrm>
+          <a:prstGeom prst="rect">
+            <a:avLst/>
+          </a:prstGeom>
+          <a:noFill/>
+          <a:ln/>
+        </p:spPr>
+        <p:txBody>
+          <a:bodyPr wrap="square" lIns="0" tIns="0" rIns="0" bIns="0" rtlCol="0" anchor="ctr"/>
+          <a:lstStyle/>
+          <a:p>
+            <a:pPr marL="0" marR="0" lvl="0" indent="0" algn="l" defTabSz="914400" rtl="0" eaLnBrk="1" fontAlgn="auto" latinLnBrk="0" hangingPunct="1">
+              <a:lnSpc>
+                <a:spcPct val="100000"/>
+              </a:lnSpc>
+              <a:spcBef>
+                <a:spcPts val="0"/>
+              </a:spcBef>
+              <a:spcAft>
+                <a:spcPts val="0"/>
+              </a:spcAft>
+              <a:buClrTx/>
+              <a:buSzTx/>
+              <a:buFontTx/>
+              <a:buNone/>
+              <a:tabLst/>
+              <a:defRPr/>
+            </a:pPr>
+            <a:r>
+              <a:rPr kumimoji="0" lang="en-US" sz="3600" b="1" i="0" u="none" strike="noStrike" kern="1200" cap="none" spc="0" normalizeH="0" baseline="0" noProof="0" dirty="0">
+                <a:ln>
+                  <a:noFill/>
+                </a:ln>
+                <a:solidFill>
+                  <a:srgbClr val="FFFFFF"/>
+                </a:solidFill>
+                <a:effectLst/>
+                <a:uLnTx/>
+                <a:uFillTx/>
+                <a:latin typeface="Calibri" pitchFamily="34" charset="0"/>
+                <a:ea typeface="Calibri" pitchFamily="34" charset="-122"/>
+                <a:cs typeface="Calibri" pitchFamily="34" charset="-120"/>
+              </a:rPr>
+              <a:t>{{hourly_rate}}</a:t>
+            </a:r>
+            <a:endParaRPr kumimoji="0" lang="en-US" sz="3600" b="0" i="0" u="none" strike="noStrike" kern="1200" cap="none" spc="0" normalizeH="0" baseline="0" noProof="0" dirty="0">
+              <a:ln>
+                <a:noFill/>
+              </a:ln>
+              <a:solidFill>
+                <a:prstClr val="black"/>
+              </a:solidFill>
+              <a:effectLst/>
+              <a:uLnTx/>
+              <a:uFillTx/>
+              <a:latin typeface="Calibri" panose="020F0502020204030204"/>
+              <a:ea typeface="+mn-ea"/>
+              <a:cs typeface="+mn-cs"/>
+            </a:endParaRPr>
+          </a:p>
+        </p:txBody>
+      </p:sp>
+      <p:sp>
+        <p:nvSpPr>
+          <p:cNvPr id="8" name="Text 5"/>
+          <p:cNvSpPr/>
+          <p:nvPr/>
+        </p:nvSpPr>
+        <p:spPr>
+          <a:xfrm>
+            <a:off x="640080" y="2240280"/>
+            <a:ext cx="2331720" cy="228600"/>
+          </a:xfrm>
+          <a:prstGeom prst="rect">
+            <a:avLst/>
+          </a:prstGeom>
+          <a:noFill/>
+          <a:ln/>
+        </p:spPr>
+        <p:txBody>
+          <a:bodyPr wrap="square" lIns="0" tIns="0" rIns="0" bIns="0" rtlCol="0" anchor="ctr"/>
+          <a:lstStyle/>
+          <a:p>
+            <a:pPr marL="0" marR="0" lvl="0" indent="0" algn="l" defTabSz="914400" rtl="0" eaLnBrk="1" fontAlgn="auto" latinLnBrk="0" hangingPunct="1">
+              <a:lnSpc>
+                <a:spcPct val="100000"/>
+              </a:lnSpc>
+              <a:spcBef>
+                <a:spcPts val="0"/>
+              </a:spcBef>
+              <a:spcAft>
+                <a:spcPts val="0"/>
+              </a:spcAft>
+              <a:buClrTx/>
+              <a:buSzTx/>
+              <a:buFontTx/>
+              <a:buNone/>
+              <a:tabLst/>
+              <a:defRPr/>
+            </a:pPr>
+            <a:r>
+              <a:rPr kumimoji="0" lang="en-US" sz="1100" b="0" i="1" u="none" strike="noStrike" kern="1200" cap="none" spc="0" normalizeH="0" baseline="0" noProof="0" dirty="0">
+                <a:ln>
+                  <a:noFill/>
+                </a:ln>
+                <a:solidFill>
+                  <a:srgbClr val="D1FAE5"/>
+                </a:solidFill>
+                <a:effectLst/>
+                <a:uLnTx/>
+                <a:uFillTx/>
+                <a:latin typeface="Calibri" pitchFamily="34" charset="0"/>
+                <a:ea typeface="Calibri" pitchFamily="34" charset="-122"/>
+                <a:cs typeface="Calibri" pitchFamily="34" charset="-120"/>
+              </a:rPr>
+              <a:t>/ hour</a:t>
+            </a:r>
+            <a:endParaRPr kumimoji="0" lang="en-US" sz="1100" b="0" i="0" u="none" strike="noStrike" kern="1200" cap="none" spc="0" normalizeH="0" baseline="0" noProof="0" dirty="0">
+              <a:ln>
+                <a:noFill/>
+              </a:ln>
+              <a:solidFill>
+                <a:prstClr val="black"/>
+              </a:solidFill>
+              <a:effectLst/>
+              <a:uLnTx/>
+              <a:uFillTx/>
+              <a:latin typeface="Calibri" panose="020F0502020204030204"/>
+              <a:ea typeface="+mn-ea"/>
+              <a:cs typeface="+mn-cs"/>
+            </a:endParaRPr>
+          </a:p>
+        </p:txBody>
+      </p:sp>
+      <p:sp>
+        <p:nvSpPr>
+          <p:cNvPr id="9" name="Text 6"/>
+          <p:cNvSpPr/>
+          <p:nvPr/>
+        </p:nvSpPr>
+        <p:spPr>
+          <a:xfrm>
+            <a:off x="640080" y="2404872"/>
+            <a:ext cx="2331720" cy="274320"/>
+          </a:xfrm>
+          <a:prstGeom prst="rect">
+            <a:avLst/>
+          </a:prstGeom>
+          <a:noFill/>
+          <a:ln/>
+        </p:spPr>
+        <p:txBody>
+          <a:bodyPr wrap="square" lIns="0" tIns="0" rIns="0" bIns="0" rtlCol="0" anchor="ctr"/>
+          <a:lstStyle/>
+          <a:p>
+            <a:pPr marL="0" marR="0" lvl="0" indent="0" algn="l" defTabSz="914400" rtl="0" eaLnBrk="1" fontAlgn="auto" latinLnBrk="0" hangingPunct="1">
+              <a:lnSpc>
+                <a:spcPct val="100000"/>
+              </a:lnSpc>
+              <a:spcBef>
+                <a:spcPts val="0"/>
+              </a:spcBef>
+              <a:spcAft>
+                <a:spcPts val="0"/>
+              </a:spcAft>
+              <a:buClrTx/>
+              <a:buSzTx/>
+              <a:buFontTx/>
+              <a:buNone/>
+              <a:tabLst/>
+              <a:defRPr/>
+            </a:pPr>
+            <a:r>
+              <a:rPr kumimoji="0" lang="en-US" sz="850" b="0" i="0" u="none" strike="noStrike" kern="1200" cap="none" spc="0" normalizeH="0" baseline="0" noProof="0" dirty="0">
+                <a:ln>
+                  <a:noFill/>
+                </a:ln>
+                <a:solidFill>
+                  <a:srgbClr val="CBD5E1"/>
+                </a:solidFill>
+                <a:effectLst/>
+                <a:uLnTx/>
+                <a:uFillTx/>
+                <a:latin typeface="Calibri" pitchFamily="34" charset="0"/>
+                <a:ea typeface="Calibri" pitchFamily="34" charset="-122"/>
+                <a:cs typeface="Calibri" pitchFamily="34" charset="-120"/>
+              </a:rPr>
+              <a:t>Mon–Fri, 8:00 AM – 5:00 PM MST</a:t>
+            </a:r>
+            <a:endParaRPr kumimoji="0" lang="en-US" sz="850" b="0" i="0" u="none" strike="noStrike" kern="1200" cap="none" spc="0" normalizeH="0" baseline="0" noProof="0" dirty="0">
+              <a:ln>
+                <a:noFill/>
+              </a:ln>
+              <a:solidFill>
+                <a:prstClr val="black"/>
+              </a:solidFill>
+              <a:effectLst/>
+              <a:uLnTx/>
+              <a:uFillTx/>
+              <a:latin typeface="Calibri" panose="020F0502020204030204"/>
+              <a:ea typeface="+mn-ea"/>
+              <a:cs typeface="+mn-cs"/>
+            </a:endParaRPr>
+          </a:p>
+        </p:txBody>
+      </p:sp>
+      <p:sp>
+        <p:nvSpPr>
+          <p:cNvPr id="10" name="Shape 7"/>
+          <p:cNvSpPr/>
+          <p:nvPr/>
+        </p:nvSpPr>
+        <p:spPr>
+          <a:xfrm>
+            <a:off x="3273552" y="1280160"/>
+            <a:ext cx="2697480" cy="1417320"/>
+          </a:xfrm>
+          <a:prstGeom prst="rect">
+            <a:avLst/>
+          </a:prstGeom>
+          <a:solidFill>
+            <a:srgbClr val="0F172A"/>
+          </a:solidFill>
+          <a:ln/>
+          <a:effectLst>
+            <a:outerShdw blurRad="127000" dist="38100" dir="5400000" algn="bl" rotWithShape="0">
+              <a:srgbClr val="0F172A">
+                <a:alpha val="10000"/>
+              </a:srgbClr>
+            </a:outerShdw>
+          </a:effectLst>
+        </p:spPr>
+        <p:txBody>
+          <a:bodyPr/>
+          <a:lstStyle/>
+          <a:p>
+            <a:pPr marL="0" marR="0" lvl="0" indent="0" algn="l" defTabSz="914400" rtl="0" eaLnBrk="1" fontAlgn="auto" latinLnBrk="0" hangingPunct="1">
+              <a:lnSpc>
+                <a:spcPct val="100000"/>
+              </a:lnSpc>
+              <a:spcBef>
+                <a:spcPts val="0"/>
+              </a:spcBef>
+              <a:spcAft>
+                <a:spcPts val="0"/>
+              </a:spcAft>
+              <a:buClrTx/>
+              <a:buSzTx/>
+              <a:buFontTx/>
+              <a:buNone/>
+              <a:tabLst/>
+              <a:defRPr/>
+            </a:pPr>
+            <a:endParaRPr kumimoji="0" lang="en-US" sz="1800" b="0" i="0" u="none" strike="noStrike" kern="1200" cap="none" spc="0" normalizeH="0" baseline="0" noProof="0">
+              <a:ln>
+                <a:noFill/>
+              </a:ln>
+              <a:solidFill>
+                <a:prstClr val="black"/>
+              </a:solidFill>
+              <a:effectLst/>
+              <a:uLnTx/>
+              <a:uFillTx/>
+              <a:latin typeface="Calibri" panose="020F0502020204030204"/>
+              <a:ea typeface="+mn-ea"/>
+              <a:cs typeface="+mn-cs"/>
+            </a:endParaRPr>
+          </a:p>
+        </p:txBody>
+      </p:sp>
+      <p:sp>
+        <p:nvSpPr>
+          <p:cNvPr id="11" name="Text 8"/>
+          <p:cNvSpPr/>
+          <p:nvPr/>
+        </p:nvSpPr>
+        <p:spPr>
+          <a:xfrm>
+            <a:off x="3456432" y="1417320"/>
+            <a:ext cx="2331720" cy="274320"/>
+          </a:xfrm>
+          <a:prstGeom prst="rect">
+            <a:avLst/>
+          </a:prstGeom>
+          <a:noFill/>
+          <a:ln/>
+        </p:spPr>
+        <p:txBody>
+          <a:bodyPr wrap="square" lIns="0" tIns="0" rIns="0" bIns="0" rtlCol="0" anchor="ctr"/>
+          <a:lstStyle/>
+          <a:p>
+            <a:pPr marL="0" marR="0" lvl="0" indent="0" algn="l" defTabSz="914400" rtl="0" eaLnBrk="1" fontAlgn="auto" latinLnBrk="0" hangingPunct="1">
+              <a:lnSpc>
+                <a:spcPct val="100000"/>
+              </a:lnSpc>
+              <a:spcBef>
+                <a:spcPts val="0"/>
+              </a:spcBef>
+              <a:spcAft>
+                <a:spcPts val="0"/>
+              </a:spcAft>
+              <a:buClrTx/>
+              <a:buSzTx/>
+              <a:buFontTx/>
+              <a:buNone/>
+              <a:tabLst/>
+              <a:defRPr/>
+            </a:pPr>
+            <a:r>
+              <a:rPr kumimoji="0" lang="en-US" sz="1000" b="1" i="0" u="none" strike="noStrike" kern="0" cap="none" spc="300" normalizeH="0" baseline="0" noProof="0" dirty="0">
+                <a:ln>
+                  <a:noFill/>
+                </a:ln>
+                <a:solidFill>
+                  <a:srgbClr val="10B981"/>
+                </a:solidFill>
+                <a:effectLst/>
+                <a:uLnTx/>
+                <a:uFillTx/>
+                <a:latin typeface="Calibri" pitchFamily="34" charset="0"/>
+                <a:ea typeface="Calibri" pitchFamily="34" charset="-122"/>
+                <a:cs typeface="Calibri" pitchFamily="34" charset="-120"/>
+              </a:rPr>
+              <a:t>AFTER-HOURS / WEEKEND</a:t>
+            </a:r>
+            <a:endParaRPr kumimoji="0" lang="en-US" sz="1000" b="0" i="0" u="none" strike="noStrike" kern="1200" cap="none" spc="0" normalizeH="0" baseline="0" noProof="0" dirty="0">
+              <a:ln>
+                <a:noFill/>
+              </a:ln>
+              <a:solidFill>
+                <a:prstClr val="black"/>
+              </a:solidFill>
+              <a:effectLst/>
+              <a:uLnTx/>
+              <a:uFillTx/>
+              <a:latin typeface="Calibri" panose="020F0502020204030204"/>
+              <a:ea typeface="+mn-ea"/>
+              <a:cs typeface="+mn-cs"/>
+            </a:endParaRPr>
+          </a:p>
+        </p:txBody>
+      </p:sp>
+      <p:sp>
+        <p:nvSpPr>
+          <p:cNvPr id="12" name="Text 9"/>
+          <p:cNvSpPr/>
+          <p:nvPr/>
+        </p:nvSpPr>
+        <p:spPr>
+          <a:xfrm>
+            <a:off x="3456432" y="1664208"/>
+            <a:ext cx="2331720" cy="594360"/>
+          </a:xfrm>
+          <a:prstGeom prst="rect">
+            <a:avLst/>
+          </a:prstGeom>
+          <a:noFill/>
+          <a:ln/>
+        </p:spPr>
+        <p:txBody>
+          <a:bodyPr wrap="square" lIns="0" tIns="0" rIns="0" bIns="0" rtlCol="0" anchor="ctr"/>
+          <a:lstStyle/>
+          <a:p>
+            <a:pPr marL="0" marR="0" lvl="0" indent="0" algn="l" defTabSz="914400" rtl="0" eaLnBrk="1" fontAlgn="auto" latinLnBrk="0" hangingPunct="1">
+              <a:lnSpc>
+                <a:spcPct val="100000"/>
+              </a:lnSpc>
+              <a:spcBef>
+                <a:spcPts val="0"/>
+              </a:spcBef>
+              <a:spcAft>
+                <a:spcPts val="0"/>
+              </a:spcAft>
+              <a:buClrTx/>
+              <a:buSzTx/>
+              <a:buFontTx/>
+              <a:buNone/>
+              <a:tabLst/>
+              <a:defRPr/>
+            </a:pPr>
+            <a:r>
+              <a:rPr kumimoji="0" lang="en-US" sz="3600" b="1" i="0" u="none" strike="noStrike" kern="1200" cap="none" spc="0" normalizeH="0" baseline="0" noProof="0" dirty="0">
+                <a:ln>
+                  <a:noFill/>
+                </a:ln>
+                <a:solidFill>
+                  <a:srgbClr val="FFFFFF"/>
+                </a:solidFill>
+                <a:effectLst/>
+                <a:uLnTx/>
+                <a:uFillTx/>
+                <a:latin typeface="Calibri" pitchFamily="34" charset="0"/>
+                <a:ea typeface="Calibri" pitchFamily="34" charset="-122"/>
+                <a:cs typeface="Calibri" pitchFamily="34" charset="-120"/>
+              </a:rPr>
+              <a:t>{{after_hours_rate}}</a:t>
+            </a:r>
+            <a:endParaRPr kumimoji="0" lang="en-US" sz="3600" b="0" i="0" u="none" strike="noStrike" kern="1200" cap="none" spc="0" normalizeH="0" baseline="0" noProof="0" dirty="0">
+              <a:ln>
+                <a:noFill/>
+              </a:ln>
+              <a:solidFill>
+                <a:prstClr val="black"/>
+              </a:solidFill>
+              <a:effectLst/>
+              <a:uLnTx/>
+              <a:uFillTx/>
+              <a:latin typeface="Calibri" panose="020F0502020204030204"/>
+              <a:ea typeface="+mn-ea"/>
+              <a:cs typeface="+mn-cs"/>
+            </a:endParaRPr>
+          </a:p>
+        </p:txBody>
+      </p:sp>
+      <p:sp>
+        <p:nvSpPr>
+          <p:cNvPr id="13" name="Text 10"/>
+          <p:cNvSpPr/>
+          <p:nvPr/>
+        </p:nvSpPr>
+        <p:spPr>
+          <a:xfrm>
+            <a:off x="3456432" y="2240280"/>
+            <a:ext cx="2331720" cy="228600"/>
+          </a:xfrm>
+          <a:prstGeom prst="rect">
+            <a:avLst/>
+          </a:prstGeom>
+          <a:noFill/>
+          <a:ln/>
+        </p:spPr>
+        <p:txBody>
+          <a:bodyPr wrap="square" lIns="0" tIns="0" rIns="0" bIns="0" rtlCol="0" anchor="ctr"/>
+          <a:lstStyle/>
+          <a:p>
+            <a:pPr marL="0" marR="0" lvl="0" indent="0" algn="l" defTabSz="914400" rtl="0" eaLnBrk="1" fontAlgn="auto" latinLnBrk="0" hangingPunct="1">
+              <a:lnSpc>
+                <a:spcPct val="100000"/>
+              </a:lnSpc>
+              <a:spcBef>
+                <a:spcPts val="0"/>
+              </a:spcBef>
+              <a:spcAft>
+                <a:spcPts val="0"/>
+              </a:spcAft>
+              <a:buClrTx/>
+              <a:buSzTx/>
+              <a:buFontTx/>
+              <a:buNone/>
+              <a:tabLst/>
+              <a:defRPr/>
+            </a:pPr>
+            <a:r>
+              <a:rPr kumimoji="0" lang="en-US" sz="1100" b="0" i="1" u="none" strike="noStrike" kern="1200" cap="none" spc="0" normalizeH="0" baseline="0" noProof="0" dirty="0">
+                <a:ln>
+                  <a:noFill/>
+                </a:ln>
+                <a:solidFill>
+                  <a:srgbClr val="D1FAE5"/>
+                </a:solidFill>
+                <a:effectLst/>
+                <a:uLnTx/>
+                <a:uFillTx/>
+                <a:latin typeface="Calibri" pitchFamily="34" charset="0"/>
+                <a:ea typeface="Calibri" pitchFamily="34" charset="-122"/>
+                <a:cs typeface="Calibri" pitchFamily="34" charset="-120"/>
+              </a:rPr>
+              <a:t>/ hour</a:t>
+            </a:r>
+            <a:endParaRPr kumimoji="0" lang="en-US" sz="1100" b="0" i="0" u="none" strike="noStrike" kern="1200" cap="none" spc="0" normalizeH="0" baseline="0" noProof="0" dirty="0">
+              <a:ln>
+                <a:noFill/>
+              </a:ln>
+              <a:solidFill>
+                <a:prstClr val="black"/>
+              </a:solidFill>
+              <a:effectLst/>
+              <a:uLnTx/>
+              <a:uFillTx/>
+              <a:latin typeface="Calibri" panose="020F0502020204030204"/>
+              <a:ea typeface="+mn-ea"/>
+              <a:cs typeface="+mn-cs"/>
+            </a:endParaRPr>
+          </a:p>
+        </p:txBody>
+      </p:sp>
+      <p:sp>
+        <p:nvSpPr>
+          <p:cNvPr id="14" name="Text 11"/>
+          <p:cNvSpPr/>
+          <p:nvPr/>
+        </p:nvSpPr>
+        <p:spPr>
+          <a:xfrm>
+            <a:off x="3456432" y="2404872"/>
+            <a:ext cx="2331720" cy="274320"/>
+          </a:xfrm>
+          <a:prstGeom prst="rect">
+            <a:avLst/>
+          </a:prstGeom>
+          <a:noFill/>
+          <a:ln/>
+        </p:spPr>
+        <p:txBody>
+          <a:bodyPr wrap="square" lIns="0" tIns="0" rIns="0" bIns="0" rtlCol="0" anchor="ctr"/>
+          <a:lstStyle/>
+          <a:p>
+            <a:pPr marL="0" marR="0" lvl="0" indent="0" algn="l" defTabSz="914400" rtl="0" eaLnBrk="1" fontAlgn="auto" latinLnBrk="0" hangingPunct="1">
+              <a:lnSpc>
+                <a:spcPct val="100000"/>
+              </a:lnSpc>
+              <a:spcBef>
+                <a:spcPts val="0"/>
+              </a:spcBef>
+              <a:spcAft>
+                <a:spcPts val="0"/>
+              </a:spcAft>
+              <a:buClrTx/>
+              <a:buSzTx/>
+              <a:buFontTx/>
+              <a:buNone/>
+              <a:tabLst/>
+              <a:defRPr/>
+            </a:pPr>
+            <a:r>
+              <a:rPr kumimoji="0" lang="en-US" sz="850" b="0" i="0" u="none" strike="noStrike" kern="1200" cap="none" spc="0" normalizeH="0" baseline="0" noProof="0" dirty="0">
+                <a:ln>
+                  <a:noFill/>
+                </a:ln>
+                <a:solidFill>
+                  <a:srgbClr val="CBD5E1"/>
+                </a:solidFill>
+                <a:effectLst/>
+                <a:uLnTx/>
+                <a:uFillTx/>
+                <a:latin typeface="Calibri" pitchFamily="34" charset="0"/>
+                <a:ea typeface="Calibri" pitchFamily="34" charset="-122"/>
+                <a:cs typeface="Calibri" pitchFamily="34" charset="-120"/>
+              </a:rPr>
+              <a:t>Billed in 15-minute increments (15 min minimum)</a:t>
+            </a:r>
+            <a:endParaRPr kumimoji="0" lang="en-US" sz="850" b="0" i="0" u="none" strike="noStrike" kern="1200" cap="none" spc="0" normalizeH="0" baseline="0" noProof="0" dirty="0">
+              <a:ln>
+                <a:noFill/>
+              </a:ln>
+              <a:solidFill>
+                <a:prstClr val="black"/>
+              </a:solidFill>
+              <a:effectLst/>
+              <a:uLnTx/>
+              <a:uFillTx/>
+              <a:latin typeface="Calibri" panose="020F0502020204030204"/>
+              <a:ea typeface="+mn-ea"/>
+              <a:cs typeface="+mn-cs"/>
+            </a:endParaRPr>
+          </a:p>
+        </p:txBody>
+      </p:sp>
+      <p:sp>
+        <p:nvSpPr>
+          <p:cNvPr id="26" name="Shape 22"/>
+          <p:cNvSpPr/>
+          <p:nvPr/>
+        </p:nvSpPr>
+        <p:spPr>
+          <a:xfrm>
+            <a:off x="2496312" y="3474720"/>
+            <a:ext cx="9144" cy="868680"/>
+          </a:xfrm>
+          <a:prstGeom prst="rect">
+            <a:avLst/>
+          </a:prstGeom>
+          <a:solidFill>
+            <a:srgbClr val="E2E8F0"/>
+          </a:solidFill>
+          <a:ln/>
+        </p:spPr>
+        <p:txBody>
+          <a:bodyPr/>
+          <a:lstStyle/>
+          <a:p>
+            <a:pPr marL="0" marR="0" lvl="0" indent="0" algn="l" defTabSz="914400" rtl="0" eaLnBrk="1" fontAlgn="auto" latinLnBrk="0" hangingPunct="1">
+              <a:lnSpc>
+                <a:spcPct val="100000"/>
+              </a:lnSpc>
+              <a:spcBef>
+                <a:spcPts val="0"/>
+              </a:spcBef>
+              <a:spcAft>
+                <a:spcPts val="0"/>
+              </a:spcAft>
+              <a:buClrTx/>
+              <a:buSzTx/>
+              <a:buFontTx/>
+              <a:buNone/>
+              <a:tabLst/>
+              <a:defRPr/>
+            </a:pPr>
+            <a:endParaRPr kumimoji="0" lang="en-US" sz="1800" b="0" i="0" u="none" strike="noStrike" kern="1200" cap="none" spc="0" normalizeH="0" baseline="0" noProof="0">
+              <a:ln>
+                <a:noFill/>
+              </a:ln>
+              <a:solidFill>
+                <a:prstClr val="black"/>
+              </a:solidFill>
+              <a:effectLst/>
+              <a:uLnTx/>
+              <a:uFillTx/>
+              <a:latin typeface="Calibri" panose="020F0502020204030204"/>
+              <a:ea typeface="+mn-ea"/>
+              <a:cs typeface="+mn-cs"/>
+            </a:endParaRPr>
+          </a:p>
+        </p:txBody>
+      </p:sp>
+      <p:pic>
+        <p:nvPicPr>
+          <p:cNvPr id="28" name="Image 2" descr="preencoded.png"/>
+          <p:cNvPicPr>
+            <a:picLocks noChangeAspect="1"/>
+          </p:cNvPicPr>
+          <p:nvPr/>
+        </p:nvPicPr>
+        <p:blipFill>
+          <a:blip r:embed="rId4"/>
+          <a:stretch>
+            <a:fillRect/>
+          </a:stretch>
+        </p:blipFill>
+        <p:spPr>
+          <a:xfrm>
+            <a:off x="2610612" y="3461004"/>
+            <a:ext cx="164592" cy="164592"/>
+          </a:xfrm>
+          <a:prstGeom prst="rect">
+            <a:avLst/>
+          </a:prstGeom>
+        </p:spPr>
+      </p:pic>
+      <p:sp>
+        <p:nvSpPr>
+          <p:cNvPr id="31" name="Shape 26"/>
+          <p:cNvSpPr/>
+          <p:nvPr/>
+        </p:nvSpPr>
+        <p:spPr>
+          <a:xfrm>
+            <a:off x="4572000" y="3474720"/>
+            <a:ext cx="9144" cy="868680"/>
+          </a:xfrm>
+          <a:prstGeom prst="rect">
+            <a:avLst/>
+          </a:prstGeom>
+          <a:solidFill>
+            <a:srgbClr val="E2E8F0"/>
+          </a:solidFill>
+          <a:ln/>
+        </p:spPr>
+        <p:txBody>
+          <a:bodyPr/>
+          <a:lstStyle/>
+          <a:p>
+            <a:pPr marL="0" marR="0" lvl="0" indent="0" algn="l" defTabSz="914400" rtl="0" eaLnBrk="1" fontAlgn="auto" latinLnBrk="0" hangingPunct="1">
+              <a:lnSpc>
+                <a:spcPct val="100000"/>
+              </a:lnSpc>
+              <a:spcBef>
+                <a:spcPts val="0"/>
+              </a:spcBef>
+              <a:spcAft>
+                <a:spcPts val="0"/>
+              </a:spcAft>
+              <a:buClrTx/>
+              <a:buSzTx/>
+              <a:buFontTx/>
+              <a:buNone/>
+              <a:tabLst/>
+              <a:defRPr/>
+            </a:pPr>
+            <a:endParaRPr kumimoji="0" lang="en-US" sz="1800" b="0" i="0" u="none" strike="noStrike" kern="1200" cap="none" spc="0" normalizeH="0" baseline="0" noProof="0">
+              <a:ln>
+                <a:noFill/>
+              </a:ln>
+              <a:solidFill>
+                <a:prstClr val="black"/>
+              </a:solidFill>
+              <a:effectLst/>
+              <a:uLnTx/>
+              <a:uFillTx/>
+              <a:latin typeface="Calibri" panose="020F0502020204030204"/>
+              <a:ea typeface="+mn-ea"/>
+              <a:cs typeface="+mn-cs"/>
+            </a:endParaRPr>
+          </a:p>
+        </p:txBody>
+      </p:sp>
+      <p:sp>
+        <p:nvSpPr>
+          <p:cNvPr id="36" name="Shape 30"/>
+          <p:cNvSpPr/>
+          <p:nvPr/>
+        </p:nvSpPr>
+        <p:spPr>
+          <a:xfrm>
+            <a:off x="6647688" y="3474720"/>
+            <a:ext cx="9144" cy="868680"/>
+          </a:xfrm>
+          <a:prstGeom prst="rect">
+            <a:avLst/>
+          </a:prstGeom>
+          <a:solidFill>
+            <a:srgbClr val="E2E8F0"/>
+          </a:solidFill>
+          <a:ln/>
+        </p:spPr>
+        <p:txBody>
+          <a:bodyPr/>
+          <a:lstStyle/>
+          <a:p>
+            <a:pPr marL="0" marR="0" lvl="0" indent="0" algn="l" defTabSz="914400" rtl="0" eaLnBrk="1" fontAlgn="auto" latinLnBrk="0" hangingPunct="1">
+              <a:lnSpc>
+                <a:spcPct val="100000"/>
+              </a:lnSpc>
+              <a:spcBef>
+                <a:spcPts val="0"/>
+              </a:spcBef>
+              <a:spcAft>
+                <a:spcPts val="0"/>
+              </a:spcAft>
+              <a:buClrTx/>
+              <a:buSzTx/>
+              <a:buFontTx/>
+              <a:buNone/>
+              <a:tabLst/>
+              <a:defRPr/>
+            </a:pPr>
+            <a:endParaRPr kumimoji="0" lang="en-US" sz="1800" b="0" i="0" u="none" strike="noStrike" kern="1200" cap="none" spc="0" normalizeH="0" baseline="0" noProof="0">
+              <a:ln>
+                <a:noFill/>
+              </a:ln>
+              <a:solidFill>
+                <a:prstClr val="black"/>
+              </a:solidFill>
+              <a:effectLst/>
+              <a:uLnTx/>
+              <a:uFillTx/>
+              <a:latin typeface="Calibri" panose="020F0502020204030204"/>
+              <a:ea typeface="+mn-ea"/>
+              <a:cs typeface="+mn-cs"/>
+            </a:endParaRPr>
+          </a:p>
+        </p:txBody>
+      </p:sp>
+      <p:pic>
+        <p:nvPicPr>
+          <p:cNvPr id="38" name="Image 4" descr="preencoded.png"/>
+          <p:cNvPicPr>
+            <a:picLocks noChangeAspect="1"/>
+          </p:cNvPicPr>
+          <p:nvPr/>
+        </p:nvPicPr>
+        <p:blipFill>
+          <a:blip r:embed="rId4"/>
+          <a:stretch>
+            <a:fillRect/>
+          </a:stretch>
+        </p:blipFill>
+        <p:spPr>
+          <a:xfrm>
+            <a:off x="6761988" y="3461004"/>
+            <a:ext cx="164592" cy="164592"/>
+          </a:xfrm>
+          <a:prstGeom prst="rect">
+            <a:avLst/>
+          </a:prstGeom>
+        </p:spPr>
+      </p:pic>
+      <p:sp>
+        <p:nvSpPr>
+          <p:cNvPr id="41" name="Shape 34"/>
+          <p:cNvSpPr/>
+          <p:nvPr/>
+        </p:nvSpPr>
+        <p:spPr>
+          <a:xfrm>
+            <a:off x="457200" y="4526280"/>
+            <a:ext cx="8229600" cy="27432"/>
+          </a:xfrm>
+          <a:prstGeom prst="rect">
+            <a:avLst/>
+          </a:prstGeom>
+          <a:solidFill>
+            <a:srgbClr val="10B981"/>
+          </a:solidFill>
+          <a:ln/>
+        </p:spPr>
+        <p:txBody>
+          <a:bodyPr/>
+          <a:lstStyle/>
+          <a:p>
+            <a:pPr marL="0" marR="0" lvl="0" indent="0" algn="l" defTabSz="914400" rtl="0" eaLnBrk="1" fontAlgn="auto" latinLnBrk="0" hangingPunct="1">
+              <a:lnSpc>
+                <a:spcPct val="100000"/>
+              </a:lnSpc>
+              <a:spcBef>
+                <a:spcPts val="0"/>
+              </a:spcBef>
+              <a:spcAft>
+                <a:spcPts val="0"/>
+              </a:spcAft>
+              <a:buClrTx/>
+              <a:buSzTx/>
+              <a:buFontTx/>
+              <a:buNone/>
+              <a:tabLst/>
+              <a:defRPr/>
+            </a:pPr>
+            <a:endParaRPr kumimoji="0" lang="en-US" sz="1800" b="0" i="0" u="none" strike="noStrike" kern="1200" cap="none" spc="0" normalizeH="0" baseline="0" noProof="0">
+              <a:ln>
+                <a:noFill/>
+              </a:ln>
+              <a:solidFill>
+                <a:prstClr val="black"/>
+              </a:solidFill>
+              <a:effectLst/>
+              <a:uLnTx/>
+              <a:uFillTx/>
+              <a:latin typeface="Calibri" panose="020F0502020204030204"/>
+              <a:ea typeface="+mn-ea"/>
+              <a:cs typeface="+mn-cs"/>
+            </a:endParaRPr>
+          </a:p>
+        </p:txBody>
+      </p:sp>
+      <p:sp>
+        <p:nvSpPr>
+          <p:cNvPr id="42" name="Text 35"/>
+          <p:cNvSpPr/>
+          <p:nvPr/>
+        </p:nvSpPr>
+        <p:spPr>
+          <a:xfrm>
+            <a:off x="457200" y="4617720"/>
+            <a:ext cx="8229600" cy="228600"/>
+          </a:xfrm>
+          <a:prstGeom prst="rect">
+            <a:avLst/>
+          </a:prstGeom>
+          <a:noFill/>
+          <a:ln/>
+        </p:spPr>
+        <p:txBody>
+          <a:bodyPr wrap="square" lIns="0" tIns="0" rIns="0" bIns="0" rtlCol="0" anchor="ctr"/>
+          <a:lstStyle/>
+          <a:p>
+            <a:pPr marL="0" marR="0" lvl="0" indent="0" algn="ctr" defTabSz="914400" rtl="0" eaLnBrk="1" fontAlgn="auto" latinLnBrk="0" hangingPunct="1">
+              <a:lnSpc>
+                <a:spcPct val="100000"/>
+              </a:lnSpc>
+              <a:spcBef>
+                <a:spcPts val="0"/>
+              </a:spcBef>
+              <a:spcAft>
+                <a:spcPts val="0"/>
+              </a:spcAft>
+              <a:buClrTx/>
+              <a:buSzTx/>
+              <a:buFontTx/>
+              <a:buNone/>
+              <a:tabLst/>
+              <a:defRPr/>
+            </a:pPr>
+            <a:r>
+              <a:rPr kumimoji="0" lang="en-US" sz="900" b="0" i="1" u="none" strike="noStrike" kern="1200" cap="none" spc="0" normalizeH="0" baseline="0" noProof="0" dirty="0">
+                <a:ln>
+                  <a:noFill/>
+                </a:ln>
+                <a:solidFill>
+                  <a:srgbClr val="64748B"/>
+                </a:solidFill>
+                <a:effectLst/>
+                <a:uLnTx/>
+                <a:uFillTx/>
+                <a:latin typeface="Calibri" pitchFamily="34" charset="0"/>
+                <a:ea typeface="Calibri" pitchFamily="34" charset="-122"/>
+                <a:cs typeface="Calibri" pitchFamily="34" charset="-120"/>
+              </a:rPr>
+              <a:t>Pricing valid for the engagement scope outlined in this proposal. Final SOW provided upon agreement.</a:t>
+            </a:r>
+            <a:endParaRPr kumimoji="0" lang="en-US" sz="900" b="0" i="0" u="none" strike="noStrike" kern="1200" cap="none" spc="0" normalizeH="0" baseline="0" noProof="0" dirty="0">
+              <a:ln>
+                <a:noFill/>
+              </a:ln>
+              <a:solidFill>
+                <a:prstClr val="black"/>
+              </a:solidFill>
+              <a:effectLst/>
+              <a:uLnTx/>
+              <a:uFillTx/>
+              <a:latin typeface="Calibri" panose="020F0502020204030204"/>
+              <a:ea typeface="+mn-ea"/>
+              <a:cs typeface="+mn-cs"/>
+            </a:endParaRPr>
+          </a:p>
+        </p:txBody>
+      </p:sp>
+      <p:sp>
+        <p:nvSpPr>
+          <p:cNvPr id="43" name="Text 36"/>
+          <p:cNvSpPr/>
+          <p:nvPr/>
+        </p:nvSpPr>
+        <p:spPr>
+          <a:xfrm>
+            <a:off x="411480" y="4800600"/>
+            <a:ext cx="3657600" cy="228600"/>
+          </a:xfrm>
+          <a:prstGeom prst="rect">
+            <a:avLst/>
+          </a:prstGeom>
+          <a:noFill/>
+          <a:ln/>
+        </p:spPr>
+        <p:txBody>
+          <a:bodyPr wrap="square" lIns="0" tIns="0" rIns="0" bIns="0" rtlCol="0" anchor="ctr"/>
+          <a:lstStyle/>
+          <a:p>
+            <a:pPr marL="0" marR="0" lvl="0" indent="0" algn="l" defTabSz="914400" rtl="0" eaLnBrk="1" fontAlgn="auto" latinLnBrk="0" hangingPunct="1">
+              <a:lnSpc>
+                <a:spcPct val="100000"/>
+              </a:lnSpc>
+              <a:spcBef>
+                <a:spcPts val="0"/>
+              </a:spcBef>
+              <a:spcAft>
+                <a:spcPts val="0"/>
+              </a:spcAft>
+              <a:buClrTx/>
+              <a:buSzTx/>
+              <a:buFontTx/>
+              <a:buNone/>
+              <a:tabLst/>
+              <a:defRPr/>
+            </a:pPr>
+            <a:r>
+              <a:rPr kumimoji="0" lang="en-US" sz="900" b="0" i="0" u="none" strike="noStrike" kern="1200" cap="none" spc="0" normalizeH="0" baseline="0" noProof="0" dirty="0">
+                <a:ln>
+                  <a:noFill/>
+                </a:ln>
+                <a:solidFill>
+                  <a:srgbClr val="64748B"/>
+                </a:solidFill>
+                <a:effectLst/>
+                <a:uLnTx/>
+                <a:uFillTx/>
+                <a:latin typeface="Calibri" pitchFamily="34" charset="0"/>
+                <a:ea typeface="Calibri" pitchFamily="34" charset="-122"/>
+                <a:cs typeface="Calibri" pitchFamily="34" charset="-120"/>
+              </a:rPr>
+              <a:t>TeamLogic IT  |  Scottsdale</a:t>
+            </a:r>
+            <a:endParaRPr kumimoji="0" lang="en-US" sz="900" b="0" i="0" u="none" strike="noStrike" kern="1200" cap="none" spc="0" normalizeH="0" baseline="0" noProof="0" dirty="0">
+              <a:ln>
+                <a:noFill/>
+              </a:ln>
+              <a:solidFill>
+                <a:prstClr val="black"/>
+              </a:solidFill>
+              <a:effectLst/>
+              <a:uLnTx/>
+              <a:uFillTx/>
+              <a:latin typeface="Calibri" panose="020F0502020204030204"/>
+              <a:ea typeface="+mn-ea"/>
+              <a:cs typeface="+mn-cs"/>
+            </a:endParaRPr>
+          </a:p>
         </p:txBody>
       </p:sp>
     </p:spTree>
@@ -4119,29 +10990,6 @@
           </a:p>
         </p:txBody>
       </p:sp>
-      <p:sp>
-        <p:nvSpPr>
-          <p:cNvPr id="31" name="Text 28"/>
-          <p:cNvSpPr/>
-          <p:nvPr/>
-        </p:nvSpPr>
-        <p:spPr>
-          <a:xfrm>
-            <a:off x="5074920" y="4800600"/>
-            <a:ext cx="3657600" cy="228600"/>
-          </a:xfrm>
-          <a:prstGeom prst="rect">
-            <a:avLst/>
-          </a:prstGeom>
-          <a:noFill/>
-          <a:ln/>
-        </p:spPr>
-        <p:txBody>
-          <a:bodyPr wrap="square" lIns="0" tIns="0" rIns="0" bIns="0" rtlCol="0" anchor="ctr"/>
-          <a:lstStyle/>
-          <a:p/>
-        </p:txBody>
-      </p:sp>
     </p:spTree>
   </p:cSld>
   <p:clrMapOvr>
@@ -5424,29 +12272,6 @@
           </a:p>
         </p:txBody>
       </p:sp>
-      <p:sp>
-        <p:nvSpPr>
-          <p:cNvPr id="41" name="Text 33"/>
-          <p:cNvSpPr/>
-          <p:nvPr/>
-        </p:nvSpPr>
-        <p:spPr>
-          <a:xfrm>
-            <a:off x="5074920" y="4800600"/>
-            <a:ext cx="3657600" cy="228600"/>
-          </a:xfrm>
-          <a:prstGeom prst="rect">
-            <a:avLst/>
-          </a:prstGeom>
-          <a:noFill/>
-          <a:ln/>
-        </p:spPr>
-        <p:txBody>
-          <a:bodyPr wrap="square" lIns="0" tIns="0" rIns="0" bIns="0" rtlCol="0" anchor="ctr"/>
-          <a:lstStyle/>
-          <a:p/>
-        </p:txBody>
-      </p:sp>
     </p:spTree>
   </p:cSld>
   <p:clrMapOvr>
@@ -6509,29 +13334,6 @@
           </a:p>
         </p:txBody>
       </p:sp>
-      <p:sp>
-        <p:nvSpPr>
-          <p:cNvPr id="33" name="Text 27"/>
-          <p:cNvSpPr/>
-          <p:nvPr/>
-        </p:nvSpPr>
-        <p:spPr>
-          <a:xfrm>
-            <a:off x="5074920" y="4800600"/>
-            <a:ext cx="3657600" cy="228600"/>
-          </a:xfrm>
-          <a:prstGeom prst="rect">
-            <a:avLst/>
-          </a:prstGeom>
-          <a:noFill/>
-          <a:ln/>
-        </p:spPr>
-        <p:txBody>
-          <a:bodyPr wrap="square" lIns="0" tIns="0" rIns="0" bIns="0" rtlCol="0" anchor="ctr"/>
-          <a:lstStyle/>
-          <a:p/>
-        </p:txBody>
-      </p:sp>
     </p:spTree>
   </p:cSld>
   <p:clrMapOvr>
@@ -7691,29 +14493,6 @@
           </a:p>
         </p:txBody>
       </p:sp>
-      <p:sp>
-        <p:nvSpPr>
-          <p:cNvPr id="33" name="Text 30"/>
-          <p:cNvSpPr/>
-          <p:nvPr/>
-        </p:nvSpPr>
-        <p:spPr>
-          <a:xfrm>
-            <a:off x="5074920" y="4800600"/>
-            <a:ext cx="3657600" cy="228600"/>
-          </a:xfrm>
-          <a:prstGeom prst="rect">
-            <a:avLst/>
-          </a:prstGeom>
-          <a:noFill/>
-          <a:ln/>
-        </p:spPr>
-        <p:txBody>
-          <a:bodyPr wrap="square" lIns="0" tIns="0" rIns="0" bIns="0" rtlCol="0" anchor="ctr"/>
-          <a:lstStyle/>
-          <a:p/>
-        </p:txBody>
-      </p:sp>
     </p:spTree>
   </p:cSld>
   <p:clrMapOvr>
@@ -8827,29 +15606,6 @@
           </a:p>
         </p:txBody>
       </p:sp>
-      <p:sp>
-        <p:nvSpPr>
-          <p:cNvPr id="34" name="Text 27"/>
-          <p:cNvSpPr/>
-          <p:nvPr/>
-        </p:nvSpPr>
-        <p:spPr>
-          <a:xfrm>
-            <a:off x="5074920" y="4800600"/>
-            <a:ext cx="3657600" cy="228600"/>
-          </a:xfrm>
-          <a:prstGeom prst="rect">
-            <a:avLst/>
-          </a:prstGeom>
-          <a:noFill/>
-          <a:ln/>
-        </p:spPr>
-        <p:txBody>
-          <a:bodyPr wrap="square" lIns="0" tIns="0" rIns="0" bIns="0" rtlCol="0" anchor="ctr"/>
-          <a:lstStyle/>
-          <a:p/>
-        </p:txBody>
-      </p:sp>
     </p:spTree>
   </p:cSld>
   <p:clrMapOvr>
@@ -9160,29 +15916,6 @@
           </a:p>
         </p:txBody>
       </p:sp>
-      <p:sp>
-        <p:nvSpPr>
-          <p:cNvPr id="10" name="Text 7"/>
-          <p:cNvSpPr/>
-          <p:nvPr/>
-        </p:nvSpPr>
-        <p:spPr>
-          <a:xfrm>
-            <a:off x="5074920" y="4800600"/>
-            <a:ext cx="3657600" cy="228600"/>
-          </a:xfrm>
-          <a:prstGeom prst="rect">
-            <a:avLst/>
-          </a:prstGeom>
-          <a:noFill/>
-          <a:ln/>
-        </p:spPr>
-        <p:txBody>
-          <a:bodyPr wrap="square" lIns="0" tIns="0" rIns="0" bIns="0" rtlCol="0" anchor="ctr"/>
-          <a:lstStyle/>
-          <a:p/>
-        </p:txBody>
-      </p:sp>
     </p:spTree>
   </p:cSld>
   <p:clrMapOvr>
@@ -11062,29 +17795,6 @@
           </a:p>
         </p:txBody>
       </p:sp>
-      <p:sp>
-        <p:nvSpPr>
-          <p:cNvPr id="54" name="Text 51"/>
-          <p:cNvSpPr/>
-          <p:nvPr/>
-        </p:nvSpPr>
-        <p:spPr>
-          <a:xfrm>
-            <a:off x="5074920" y="4800600"/>
-            <a:ext cx="3657600" cy="228600"/>
-          </a:xfrm>
-          <a:prstGeom prst="rect">
-            <a:avLst/>
-          </a:prstGeom>
-          <a:noFill/>
-          <a:ln/>
-        </p:spPr>
-        <p:txBody>
-          <a:bodyPr wrap="square" lIns="0" tIns="0" rIns="0" bIns="0" rtlCol="0" anchor="ctr"/>
-          <a:lstStyle/>
-          <a:p/>
-        </p:txBody>
-      </p:sp>
     </p:spTree>
   </p:cSld>
   <p:clrMapOvr>
@@ -12026,29 +18736,6 @@
             </a:r>
             <a:endParaRPr lang="en-US" sz="900" dirty="0"/>
           </a:p>
-        </p:txBody>
-      </p:sp>
-      <p:sp>
-        <p:nvSpPr>
-          <p:cNvPr id="30" name="Text 22"/>
-          <p:cNvSpPr/>
-          <p:nvPr/>
-        </p:nvSpPr>
-        <p:spPr>
-          <a:xfrm>
-            <a:off x="5074920" y="4800600"/>
-            <a:ext cx="3657600" cy="228600"/>
-          </a:xfrm>
-          <a:prstGeom prst="rect">
-            <a:avLst/>
-          </a:prstGeom>
-          <a:noFill/>
-          <a:ln/>
-        </p:spPr>
-        <p:txBody>
-          <a:bodyPr wrap="square" lIns="0" tIns="0" rIns="0" bIns="0" rtlCol="0" anchor="ctr"/>
-          <a:lstStyle/>
-          <a:p/>
         </p:txBody>
       </p:sp>
     </p:spTree>

--- a/templates/proposal.pptx
+++ b/templates/proposal.pptx
@@ -4240,8 +4240,8 @@
         </p:nvSpPr>
         <p:spPr>
           <a:xfrm>
-            <a:off x="3038668" y="1953137"/>
-            <a:ext cx="3383280" cy="365760"/>
+            <a:off x="3038668" y="2331720"/>
+            <a:ext cx="3383280" cy="274320"/>
           </a:xfrm>
           <a:prstGeom prst="rect">
             <a:avLst/>
@@ -9149,225 +9149,6 @@
           </a:p>
         </p:txBody>
       </p:sp>
-      <p:sp>
-        <p:nvSpPr>
-          <p:cNvPr id="26" name="Shape 22"/>
-          <p:cNvSpPr/>
-          <p:nvPr/>
-        </p:nvSpPr>
-        <p:spPr>
-          <a:xfrm>
-            <a:off x="2496312" y="3474720"/>
-            <a:ext cx="9144" cy="868680"/>
-          </a:xfrm>
-          <a:prstGeom prst="rect">
-            <a:avLst/>
-          </a:prstGeom>
-          <a:solidFill>
-            <a:srgbClr val="E2E8F0"/>
-          </a:solidFill>
-          <a:ln/>
-        </p:spPr>
-        <p:txBody>
-          <a:bodyPr/>
-          <a:lstStyle/>
-          <a:p>
-            <a:pPr marL="0" marR="0" lvl="0" indent="0" algn="l" defTabSz="914400" rtl="0" eaLnBrk="1" fontAlgn="auto" latinLnBrk="0" hangingPunct="1">
-              <a:lnSpc>
-                <a:spcPct val="100000"/>
-              </a:lnSpc>
-              <a:spcBef>
-                <a:spcPts val="0"/>
-              </a:spcBef>
-              <a:spcAft>
-                <a:spcPts val="0"/>
-              </a:spcAft>
-              <a:buClrTx/>
-              <a:buSzTx/>
-              <a:buFontTx/>
-              <a:buNone/>
-              <a:tabLst/>
-              <a:defRPr/>
-            </a:pPr>
-            <a:endParaRPr kumimoji="0" lang="en-US" sz="1800" b="0" i="0" u="none" strike="noStrike" kern="1200" cap="none" spc="0" normalizeH="0" baseline="0" noProof="0">
-              <a:ln>
-                <a:noFill/>
-              </a:ln>
-              <a:solidFill>
-                <a:prstClr val="black"/>
-              </a:solidFill>
-              <a:effectLst/>
-              <a:uLnTx/>
-              <a:uFillTx/>
-              <a:latin typeface="Calibri" panose="020F0502020204030204"/>
-              <a:ea typeface="+mn-ea"/>
-              <a:cs typeface="+mn-cs"/>
-            </a:endParaRPr>
-          </a:p>
-        </p:txBody>
-      </p:sp>
-      <p:pic>
-        <p:nvPicPr>
-          <p:cNvPr id="28" name="Image 2" descr="preencoded.png"/>
-          <p:cNvPicPr>
-            <a:picLocks noChangeAspect="1"/>
-          </p:cNvPicPr>
-          <p:nvPr/>
-        </p:nvPicPr>
-        <p:blipFill>
-          <a:blip r:embed="rId4"/>
-          <a:stretch>
-            <a:fillRect/>
-          </a:stretch>
-        </p:blipFill>
-        <p:spPr>
-          <a:xfrm>
-            <a:off x="2610612" y="3461004"/>
-            <a:ext cx="164592" cy="164592"/>
-          </a:xfrm>
-          <a:prstGeom prst="rect">
-            <a:avLst/>
-          </a:prstGeom>
-        </p:spPr>
-      </p:pic>
-      <p:sp>
-        <p:nvSpPr>
-          <p:cNvPr id="31" name="Shape 26"/>
-          <p:cNvSpPr/>
-          <p:nvPr/>
-        </p:nvSpPr>
-        <p:spPr>
-          <a:xfrm>
-            <a:off x="4572000" y="3474720"/>
-            <a:ext cx="9144" cy="868680"/>
-          </a:xfrm>
-          <a:prstGeom prst="rect">
-            <a:avLst/>
-          </a:prstGeom>
-          <a:solidFill>
-            <a:srgbClr val="E2E8F0"/>
-          </a:solidFill>
-          <a:ln/>
-        </p:spPr>
-        <p:txBody>
-          <a:bodyPr/>
-          <a:lstStyle/>
-          <a:p>
-            <a:pPr marL="0" marR="0" lvl="0" indent="0" algn="l" defTabSz="914400" rtl="0" eaLnBrk="1" fontAlgn="auto" latinLnBrk="0" hangingPunct="1">
-              <a:lnSpc>
-                <a:spcPct val="100000"/>
-              </a:lnSpc>
-              <a:spcBef>
-                <a:spcPts val="0"/>
-              </a:spcBef>
-              <a:spcAft>
-                <a:spcPts val="0"/>
-              </a:spcAft>
-              <a:buClrTx/>
-              <a:buSzTx/>
-              <a:buFontTx/>
-              <a:buNone/>
-              <a:tabLst/>
-              <a:defRPr/>
-            </a:pPr>
-            <a:endParaRPr kumimoji="0" lang="en-US" sz="1800" b="0" i="0" u="none" strike="noStrike" kern="1200" cap="none" spc="0" normalizeH="0" baseline="0" noProof="0">
-              <a:ln>
-                <a:noFill/>
-              </a:ln>
-              <a:solidFill>
-                <a:prstClr val="black"/>
-              </a:solidFill>
-              <a:effectLst/>
-              <a:uLnTx/>
-              <a:uFillTx/>
-              <a:latin typeface="Calibri" panose="020F0502020204030204"/>
-              <a:ea typeface="+mn-ea"/>
-              <a:cs typeface="+mn-cs"/>
-            </a:endParaRPr>
-          </a:p>
-        </p:txBody>
-      </p:sp>
-      <p:sp>
-        <p:nvSpPr>
-          <p:cNvPr id="36" name="Shape 30"/>
-          <p:cNvSpPr/>
-          <p:nvPr/>
-        </p:nvSpPr>
-        <p:spPr>
-          <a:xfrm>
-            <a:off x="6647688" y="3474720"/>
-            <a:ext cx="9144" cy="868680"/>
-          </a:xfrm>
-          <a:prstGeom prst="rect">
-            <a:avLst/>
-          </a:prstGeom>
-          <a:solidFill>
-            <a:srgbClr val="E2E8F0"/>
-          </a:solidFill>
-          <a:ln/>
-        </p:spPr>
-        <p:txBody>
-          <a:bodyPr/>
-          <a:lstStyle/>
-          <a:p>
-            <a:pPr marL="0" marR="0" lvl="0" indent="0" algn="l" defTabSz="914400" rtl="0" eaLnBrk="1" fontAlgn="auto" latinLnBrk="0" hangingPunct="1">
-              <a:lnSpc>
-                <a:spcPct val="100000"/>
-              </a:lnSpc>
-              <a:spcBef>
-                <a:spcPts val="0"/>
-              </a:spcBef>
-              <a:spcAft>
-                <a:spcPts val="0"/>
-              </a:spcAft>
-              <a:buClrTx/>
-              <a:buSzTx/>
-              <a:buFontTx/>
-              <a:buNone/>
-              <a:tabLst/>
-              <a:defRPr/>
-            </a:pPr>
-            <a:endParaRPr kumimoji="0" lang="en-US" sz="1800" b="0" i="0" u="none" strike="noStrike" kern="1200" cap="none" spc="0" normalizeH="0" baseline="0" noProof="0">
-              <a:ln>
-                <a:noFill/>
-              </a:ln>
-              <a:solidFill>
-                <a:prstClr val="black"/>
-              </a:solidFill>
-              <a:effectLst/>
-              <a:uLnTx/>
-              <a:uFillTx/>
-              <a:latin typeface="Calibri" panose="020F0502020204030204"/>
-              <a:ea typeface="+mn-ea"/>
-              <a:cs typeface="+mn-cs"/>
-            </a:endParaRPr>
-          </a:p>
-        </p:txBody>
-      </p:sp>
-      <p:pic>
-        <p:nvPicPr>
-          <p:cNvPr id="38" name="Image 4" descr="preencoded.png"/>
-          <p:cNvPicPr>
-            <a:picLocks noChangeAspect="1"/>
-          </p:cNvPicPr>
-          <p:nvPr/>
-        </p:nvPicPr>
-        <p:blipFill>
-          <a:blip r:embed="rId4"/>
-          <a:stretch>
-            <a:fillRect/>
-          </a:stretch>
-        </p:blipFill>
-        <p:spPr>
-          <a:xfrm>
-            <a:off x="6761988" y="3461004"/>
-            <a:ext cx="164592" cy="164592"/>
-          </a:xfrm>
-          <a:prstGeom prst="rect">
-            <a:avLst/>
-          </a:prstGeom>
-        </p:spPr>
-      </p:pic>
       <p:sp>
         <p:nvSpPr>
           <p:cNvPr id="41" name="Shape 34"/>
